--- a/docs/進度報告/09月/九月份進度報告.pptx
+++ b/docs/進度報告/09月/九月份進度報告.pptx
@@ -5,7 +5,7 @@
     <p:sldMasterId id="2147483648" r:id="rId1"/>
   </p:sldMasterIdLst>
   <p:notesMasterIdLst>
-    <p:notesMasterId r:id="rId20"/>
+    <p:notesMasterId r:id="rId25"/>
   </p:notesMasterIdLst>
   <p:sldIdLst>
     <p:sldId id="256" r:id="rId2"/>
@@ -26,6 +26,11 @@
     <p:sldId id="272" r:id="rId17"/>
     <p:sldId id="273" r:id="rId18"/>
     <p:sldId id="276" r:id="rId19"/>
+    <p:sldId id="277" r:id="rId20"/>
+    <p:sldId id="278" r:id="rId21"/>
+    <p:sldId id="279" r:id="rId22"/>
+    <p:sldId id="280" r:id="rId23"/>
+    <p:sldId id="281" r:id="rId24"/>
   </p:sldIdLst>
   <p:sldSz cx="12192000" cy="6858000"/>
   <p:notesSz cx="6858000" cy="9144000"/>
@@ -1921,7 +1926,7 @@
             </a:r>
             <a:r>
               <a:rPr lang="en-US" altLang="zh-TW"/>
-              <a:t>Antenna docs/</a:t>
+              <a:t>docs/</a:t>
             </a:r>
             <a:r>
               <a:rPr lang="zh-TW" altLang="en-US"/>
@@ -1945,7 +1950,7 @@
             </a:r>
             <a:r>
               <a:rPr lang="en-US" altLang="zh-TW"/>
-              <a:t>_2026-07.md</a:t>
+              <a:t>_v2.md §1–2</a:t>
             </a:r>
             <a:r>
               <a:rPr lang="zh-TW" altLang="en-US"/>
@@ -1961,7 +1966,7 @@
             </a:r>
             <a:r>
               <a:rPr lang="en-US" altLang="zh-TW"/>
-              <a:t>/08</a:t>
+              <a:t>/07</a:t>
             </a:r>
             <a:r>
               <a:rPr lang="zh-TW" altLang="en-US"/>
@@ -1973,15 +1978,79 @@
             </a:r>
             <a:r>
               <a:rPr lang="zh-TW" altLang="en-US"/>
-              <a:t>八月份進度報告</a:t>
+              <a:t>進度報告</a:t>
             </a:r>
             <a:r>
               <a:rPr lang="en-US" altLang="zh-TW"/>
-              <a:t>.md</a:t>
+              <a:t>_2026-07.md §8.1</a:t>
             </a:r>
             <a:r>
               <a:rPr lang="zh-TW" altLang="en-US"/>
-              <a:t>。數字為各月報告當時口徑。</a:t>
+              <a:t>；</a:t>
+            </a:r>
+            <a:r>
+              <a:rPr lang="en-US" altLang="zh-TW"/>
+              <a:t>docs/methodology-divergences.md D22</a:t>
+            </a:r>
+            <a:r>
+              <a:rPr lang="zh-TW" altLang="en-US"/>
+              <a:t>。</a:t>
+            </a:r>
+            <a:r>
+              <a:rPr lang="en-US" altLang="zh-TW"/>
+              <a:t>278 </a:t>
+            </a:r>
+            <a:r>
+              <a:rPr lang="zh-TW" altLang="en-US"/>
+              <a:t>秒</a:t>
+            </a:r>
+            <a:r>
+              <a:rPr lang="en-US" altLang="zh-TW"/>
+              <a:t>/epoch </a:t>
+            </a:r>
+            <a:r>
+              <a:rPr lang="zh-TW" altLang="en-US"/>
+              <a:t>為單次正式機 </a:t>
+            </a:r>
+            <a:r>
+              <a:rPr lang="en-US" altLang="zh-TW"/>
+              <a:t>profiling</a:t>
+            </a:r>
+            <a:r>
+              <a:rPr lang="zh-TW" altLang="en-US"/>
+              <a:t>，</a:t>
+            </a:r>
+            <a:r>
+              <a:rPr lang="en-US" altLang="zh-TW"/>
+              <a:t>HFSS </a:t>
+            </a:r>
+            <a:r>
+              <a:rPr lang="zh-TW" altLang="en-US"/>
+              <a:t>約</a:t>
+            </a:r>
+            <a:r>
+              <a:rPr lang="en-US" altLang="zh-TW"/>
+              <a:t>170</a:t>
+            </a:r>
+            <a:r>
+              <a:rPr lang="zh-TW" altLang="en-US"/>
+              <a:t>秒；批次線中位</a:t>
+            </a:r>
+            <a:r>
+              <a:rPr lang="en-US" altLang="zh-TW"/>
+              <a:t>160</a:t>
+            </a:r>
+            <a:r>
+              <a:rPr lang="zh-TW" altLang="en-US"/>
+              <a:t>秒</a:t>
+            </a:r>
+            <a:r>
+              <a:rPr lang="en-US" altLang="zh-TW"/>
+              <a:t>/</a:t>
+            </a:r>
+            <a:r>
+              <a:rPr lang="zh-TW" altLang="en-US"/>
+              <a:t>筆。不可推算同條件加速倍率。原生可編輯流程圖為依上述來源重繪。</a:t>
             </a:r>
           </a:p>
         </p:txBody>
@@ -2012,7 +2081,206 @@
     </p:spTree>
     <p:extLst>
       <p:ext uri="{BB962C8B-B14F-4D97-AF65-F5344CB8AC3E}">
-        <p14:creationId xmlns:p14="http://schemas.microsoft.com/office/powerpoint/2010/main" val="2349589311"/>
+        <p14:creationId xmlns:p14="http://schemas.microsoft.com/office/powerpoint/2010/main" val="2787392356"/>
+      </p:ext>
+    </p:extLst>
+  </p:cSld>
+  <p:clrMapOvr>
+    <a:masterClrMapping/>
+  </p:clrMapOvr>
+</p:notes>
+</file>
+
+<file path=ppt/notesSlides/notesSlide19.xml><?xml version="1.0" encoding="utf-8"?>
+<p:notes xmlns:a="http://schemas.openxmlformats.org/drawingml/2006/main" xmlns:r="http://schemas.openxmlformats.org/officeDocument/2006/relationships" xmlns:p="http://schemas.openxmlformats.org/presentationml/2006/main">
+  <p:cSld>
+    <p:spTree>
+      <p:nvGrpSpPr>
+        <p:cNvPr id="1" name=""/>
+        <p:cNvGrpSpPr/>
+        <p:nvPr/>
+      </p:nvGrpSpPr>
+      <p:grpSpPr>
+        <a:xfrm>
+          <a:off x="0" y="0"/>
+          <a:ext cx="0" cy="0"/>
+          <a:chOff x="0" y="0"/>
+          <a:chExt cx="0" cy="0"/>
+        </a:xfrm>
+      </p:grpSpPr>
+      <p:sp>
+        <p:nvSpPr>
+          <p:cNvPr id="2" name="投影片影像版面配置區 1"/>
+          <p:cNvSpPr>
+            <a:spLocks noGrp="1" noRot="1" noChangeAspect="1"/>
+          </p:cNvSpPr>
+          <p:nvPr>
+            <p:ph type="sldImg"/>
+          </p:nvPr>
+        </p:nvSpPr>
+        <p:spPr/>
+      </p:sp>
+      <p:sp>
+        <p:nvSpPr>
+          <p:cNvPr id="3" name="備忘稿版面配置區 2"/>
+          <p:cNvSpPr>
+            <a:spLocks noGrp="1"/>
+          </p:cNvSpPr>
+          <p:nvPr>
+            <p:ph type="body" idx="1"/>
+          </p:nvPr>
+        </p:nvSpPr>
+        <p:spPr/>
+        <p:txBody>
+          <a:bodyPr/>
+          <a:lstStyle/>
+          <a:p>
+            <a:r>
+              <a:rPr lang="zh-TW" altLang="en-US"/>
+              <a:t>來源：</a:t>
+            </a:r>
+            <a:r>
+              <a:rPr lang="en-US" altLang="zh-TW"/>
+              <a:t>docs/</a:t>
+            </a:r>
+            <a:r>
+              <a:rPr lang="zh-TW" altLang="en-US"/>
+              <a:t>進度報告</a:t>
+            </a:r>
+            <a:r>
+              <a:rPr lang="en-US" altLang="zh-TW"/>
+              <a:t>/07</a:t>
+            </a:r>
+            <a:r>
+              <a:rPr lang="zh-TW" altLang="en-US"/>
+              <a:t>月</a:t>
+            </a:r>
+            <a:r>
+              <a:rPr lang="en-US" altLang="zh-TW"/>
+              <a:t>/</a:t>
+            </a:r>
+            <a:r>
+              <a:rPr lang="zh-TW" altLang="en-US"/>
+              <a:t>進度報告</a:t>
+            </a:r>
+            <a:r>
+              <a:rPr lang="en-US" altLang="zh-TW"/>
+              <a:t>_v2.md</a:t>
+            </a:r>
+            <a:r>
+              <a:rPr lang="zh-TW" altLang="en-US"/>
+              <a:t>；</a:t>
+            </a:r>
+            <a:r>
+              <a:rPr lang="en-US" altLang="zh-TW"/>
+              <a:t>docs/log/round-07-dedust.md §4–5</a:t>
+            </a:r>
+            <a:r>
+              <a:rPr lang="zh-TW" altLang="en-US"/>
+              <a:t>；</a:t>
+            </a:r>
+            <a:r>
+              <a:rPr lang="en-US" altLang="zh-TW"/>
+              <a:t>docs/log/round-09-pool-revalidation.md</a:t>
+            </a:r>
+            <a:r>
+              <a:rPr lang="zh-TW" altLang="en-US"/>
+              <a:t>；</a:t>
+            </a:r>
+            <a:r>
+              <a:rPr lang="en-US" altLang="zh-TW"/>
+              <a:t>docs/log/round-10-refine-attribution.md</a:t>
+            </a:r>
+            <a:r>
+              <a:rPr lang="zh-TW" altLang="en-US"/>
+              <a:t>。圖樣取自</a:t>
+            </a:r>
+            <a:r>
+              <a:rPr lang="en-US" altLang="zh-TW"/>
+              <a:t>07</a:t>
+            </a:r>
+            <a:r>
+              <a:rPr lang="zh-TW" altLang="en-US"/>
+              <a:t>月</a:t>
+            </a:r>
+            <a:r>
+              <a:rPr lang="en-US" altLang="zh-TW"/>
+              <a:t>/</a:t>
+            </a:r>
+            <a:r>
+              <a:rPr lang="zh-TW" altLang="en-US"/>
+              <a:t>對稱化實例</a:t>
+            </a:r>
+            <a:r>
+              <a:rPr lang="en-US" altLang="zh-TW"/>
+              <a:t>.png</a:t>
+            </a:r>
+            <a:r>
+              <a:rPr lang="zh-TW" altLang="en-US"/>
+              <a:t>的左右原圖部分，以</a:t>
+            </a:r>
+            <a:r>
+              <a:rPr lang="en-US" altLang="zh-TW"/>
+              <a:t>PPT</a:t>
+            </a:r>
+            <a:r>
+              <a:rPr lang="zh-TW" altLang="en-US"/>
+              <a:t>原生裁切放大；無修改像素。</a:t>
+            </a:r>
+            <a:r>
+              <a:rPr lang="en-US" altLang="zh-TW"/>
+              <a:t>F2 wm</a:t>
+            </a:r>
+            <a:r>
+              <a:rPr lang="zh-TW" altLang="en-US"/>
+              <a:t>以重測−</a:t>
+            </a:r>
+            <a:r>
+              <a:rPr lang="en-US" altLang="zh-TW"/>
+              <a:t>1.42</a:t>
+            </a:r>
+            <a:r>
+              <a:rPr lang="zh-TW" altLang="en-US"/>
+              <a:t>為準，不採歷史池−</a:t>
+            </a:r>
+            <a:r>
+              <a:rPr lang="en-US" altLang="zh-TW"/>
+              <a:t>0.01</a:t>
+            </a:r>
+            <a:r>
+              <a:rPr lang="zh-TW" altLang="en-US"/>
+              <a:t>。此處可製造性僅指像素幾何判準，非已完成製程或實物驗證。</a:t>
+            </a:r>
+          </a:p>
+        </p:txBody>
+      </p:sp>
+      <p:sp>
+        <p:nvSpPr>
+          <p:cNvPr id="4" name="投影片編號版面配置區 3"/>
+          <p:cNvSpPr>
+            <a:spLocks noGrp="1"/>
+          </p:cNvSpPr>
+          <p:nvPr>
+            <p:ph type="sldNum" sz="quarter" idx="5"/>
+          </p:nvPr>
+        </p:nvSpPr>
+        <p:spPr/>
+        <p:txBody>
+          <a:bodyPr/>
+          <a:lstStyle/>
+          <a:p>
+            <a:fld id="{E6A5811E-D10F-48C4-88EB-A6ADFE3F5DF4}" type="slidenum">
+              <a:rPr lang="zh-TW" altLang="en-US" smtClean="0"/>
+              <a:t>19</a:t>
+            </a:fld>
+            <a:endParaRPr lang="zh-TW" altLang="en-US"/>
+          </a:p>
+        </p:txBody>
+      </p:sp>
+    </p:spTree>
+    <p:extLst>
+      <p:ext uri="{BB962C8B-B14F-4D97-AF65-F5344CB8AC3E}">
+        <p14:creationId xmlns:p14="http://schemas.microsoft.com/office/powerpoint/2010/main" val="2547227435"/>
       </p:ext>
     </p:extLst>
   </p:cSld>
@@ -2176,6 +2444,826 @@
     <p:extLst>
       <p:ext uri="{BB962C8B-B14F-4D97-AF65-F5344CB8AC3E}">
         <p14:creationId xmlns:p14="http://schemas.microsoft.com/office/powerpoint/2010/main" val="1262041905"/>
+      </p:ext>
+    </p:extLst>
+  </p:cSld>
+  <p:clrMapOvr>
+    <a:masterClrMapping/>
+  </p:clrMapOvr>
+</p:notes>
+</file>
+
+<file path=ppt/notesSlides/notesSlide20.xml><?xml version="1.0" encoding="utf-8"?>
+<p:notes xmlns:a="http://schemas.openxmlformats.org/drawingml/2006/main" xmlns:r="http://schemas.openxmlformats.org/officeDocument/2006/relationships" xmlns:p="http://schemas.openxmlformats.org/presentationml/2006/main">
+  <p:cSld>
+    <p:spTree>
+      <p:nvGrpSpPr>
+        <p:cNvPr id="1" name=""/>
+        <p:cNvGrpSpPr/>
+        <p:nvPr/>
+      </p:nvGrpSpPr>
+      <p:grpSpPr>
+        <a:xfrm>
+          <a:off x="0" y="0"/>
+          <a:ext cx="0" cy="0"/>
+          <a:chOff x="0" y="0"/>
+          <a:chExt cx="0" cy="0"/>
+        </a:xfrm>
+      </p:grpSpPr>
+      <p:sp>
+        <p:nvSpPr>
+          <p:cNvPr id="2" name="投影片影像版面配置區 1"/>
+          <p:cNvSpPr>
+            <a:spLocks noGrp="1" noRot="1" noChangeAspect="1"/>
+          </p:cNvSpPr>
+          <p:nvPr>
+            <p:ph type="sldImg"/>
+          </p:nvPr>
+        </p:nvSpPr>
+        <p:spPr/>
+      </p:sp>
+      <p:sp>
+        <p:nvSpPr>
+          <p:cNvPr id="3" name="備忘稿版面配置區 2"/>
+          <p:cNvSpPr>
+            <a:spLocks noGrp="1"/>
+          </p:cNvSpPr>
+          <p:nvPr>
+            <p:ph type="body" idx="1"/>
+          </p:nvPr>
+        </p:nvSpPr>
+        <p:spPr/>
+        <p:txBody>
+          <a:bodyPr/>
+          <a:lstStyle/>
+          <a:p>
+            <a:r>
+              <a:rPr lang="zh-TW" altLang="en-US"/>
+              <a:t>來源：</a:t>
+            </a:r>
+            <a:r>
+              <a:rPr lang="en-US" altLang="zh-TW"/>
+              <a:t>docs/</a:t>
+            </a:r>
+            <a:r>
+              <a:rPr lang="zh-TW" altLang="en-US"/>
+              <a:t>進度報告</a:t>
+            </a:r>
+            <a:r>
+              <a:rPr lang="en-US" altLang="zh-TW"/>
+              <a:t>/07</a:t>
+            </a:r>
+            <a:r>
+              <a:rPr lang="zh-TW" altLang="en-US"/>
+              <a:t>月</a:t>
+            </a:r>
+            <a:r>
+              <a:rPr lang="en-US" altLang="zh-TW"/>
+              <a:t>/</a:t>
+            </a:r>
+            <a:r>
+              <a:rPr lang="zh-TW" altLang="en-US"/>
+              <a:t>進度報告</a:t>
+            </a:r>
+            <a:r>
+              <a:rPr lang="en-US" altLang="zh-TW"/>
+              <a:t>_v2.md §7.1–7.3</a:t>
+            </a:r>
+            <a:r>
+              <a:rPr lang="zh-TW" altLang="en-US"/>
+              <a:t>；</a:t>
+            </a:r>
+            <a:r>
+              <a:rPr lang="en-US" altLang="zh-TW"/>
+              <a:t>07</a:t>
+            </a:r>
+            <a:r>
+              <a:rPr lang="zh-TW" altLang="en-US"/>
+              <a:t>月</a:t>
+            </a:r>
+            <a:r>
+              <a:rPr lang="en-US" altLang="zh-TW"/>
+              <a:t>/</a:t>
+            </a:r>
+            <a:r>
+              <a:rPr lang="zh-TW" altLang="en-US"/>
+              <a:t>多樣性</a:t>
+            </a:r>
+            <a:r>
+              <a:rPr lang="en-US" altLang="zh-TW"/>
+              <a:t>gallery_slide.png</a:t>
+            </a:r>
+            <a:r>
+              <a:rPr lang="zh-TW" altLang="en-US"/>
+              <a:t>。兩個圖樣以</a:t>
+            </a:r>
+            <a:r>
+              <a:rPr lang="en-US" altLang="zh-TW"/>
+              <a:t>PPT</a:t>
+            </a:r>
+            <a:r>
+              <a:rPr lang="zh-TW" altLang="en-US"/>
+              <a:t>原生裁切取原圖左右區域，不改動像素。數字為圖面快照：</a:t>
+            </a:r>
+            <a:r>
+              <a:rPr lang="en-US" altLang="zh-TW"/>
+              <a:t>1575</a:t>
+            </a:r>
+            <a:r>
+              <a:rPr lang="zh-TW" altLang="en-US"/>
+              <a:t>、</a:t>
+            </a:r>
+            <a:r>
+              <a:rPr lang="en-US" altLang="zh-TW"/>
+              <a:t>66</a:t>
+            </a:r>
+            <a:r>
+              <a:rPr lang="zh-TW" altLang="en-US"/>
+              <a:t>、</a:t>
+            </a:r>
+            <a:r>
+              <a:rPr lang="en-US" altLang="zh-TW"/>
+              <a:t>607</a:t>
+            </a:r>
+            <a:r>
+              <a:rPr lang="zh-TW" altLang="en-US"/>
+              <a:t>、</a:t>
+            </a:r>
+            <a:r>
+              <a:rPr lang="en-US" altLang="zh-TW"/>
+              <a:t>412</a:t>
+            </a:r>
+            <a:r>
+              <a:rPr lang="zh-TW" altLang="en-US"/>
+              <a:t>；</a:t>
+            </a:r>
+            <a:r>
+              <a:rPr lang="en-US" altLang="zh-TW"/>
+              <a:t>S11/Gain/radiation</a:t>
+            </a:r>
+            <a:r>
+              <a:rPr lang="zh-TW" altLang="en-US"/>
+              <a:t>餘裕分別</a:t>
+            </a:r>
+            <a:r>
+              <a:rPr lang="en-US" altLang="zh-TW"/>
+              <a:t>1.11/0.05/0.36</a:t>
+            </a:r>
+            <a:r>
+              <a:rPr lang="zh-TW" altLang="en-US"/>
+              <a:t>及</a:t>
+            </a:r>
+            <a:r>
+              <a:rPr lang="en-US" altLang="zh-TW"/>
+              <a:t>1.19/0.15/0.13 dB</a:t>
+            </a:r>
+            <a:r>
+              <a:rPr lang="zh-TW" altLang="en-US"/>
+              <a:t>。統計條件為 </a:t>
+            </a:r>
+            <a:r>
+              <a:rPr lang="en-US" altLang="zh-TW"/>
+              <a:t>wm≥0 </a:t>
+            </a:r>
+            <a:r>
+              <a:rPr lang="zh-TW" altLang="en-US"/>
+              <a:t>且 </a:t>
+            </a:r>
+            <a:r>
+              <a:rPr lang="en-US" altLang="zh-TW"/>
+              <a:t>rad_margin≥0</a:t>
+            </a:r>
+            <a:r>
+              <a:rPr lang="zh-TW" altLang="en-US"/>
+              <a:t>，未以帶外作篩選。不得作為月底全池統計、均勻隨機搜尋成功率或實物製造良率。</a:t>
+            </a:r>
+          </a:p>
+        </p:txBody>
+      </p:sp>
+      <p:sp>
+        <p:nvSpPr>
+          <p:cNvPr id="4" name="投影片編號版面配置區 3"/>
+          <p:cNvSpPr>
+            <a:spLocks noGrp="1"/>
+          </p:cNvSpPr>
+          <p:nvPr>
+            <p:ph type="sldNum" sz="quarter" idx="5"/>
+          </p:nvPr>
+        </p:nvSpPr>
+        <p:spPr/>
+        <p:txBody>
+          <a:bodyPr/>
+          <a:lstStyle/>
+          <a:p>
+            <a:fld id="{E6A5811E-D10F-48C4-88EB-A6ADFE3F5DF4}" type="slidenum">
+              <a:rPr lang="zh-TW" altLang="en-US" smtClean="0"/>
+              <a:t>20</a:t>
+            </a:fld>
+            <a:endParaRPr lang="zh-TW" altLang="en-US"/>
+          </a:p>
+        </p:txBody>
+      </p:sp>
+    </p:spTree>
+    <p:extLst>
+      <p:ext uri="{BB962C8B-B14F-4D97-AF65-F5344CB8AC3E}">
+        <p14:creationId xmlns:p14="http://schemas.microsoft.com/office/powerpoint/2010/main" val="3780495814"/>
+      </p:ext>
+    </p:extLst>
+  </p:cSld>
+  <p:clrMapOvr>
+    <a:masterClrMapping/>
+  </p:clrMapOvr>
+</p:notes>
+</file>
+
+<file path=ppt/notesSlides/notesSlide21.xml><?xml version="1.0" encoding="utf-8"?>
+<p:notes xmlns:a="http://schemas.openxmlformats.org/drawingml/2006/main" xmlns:r="http://schemas.openxmlformats.org/officeDocument/2006/relationships" xmlns:p="http://schemas.openxmlformats.org/presentationml/2006/main">
+  <p:cSld>
+    <p:spTree>
+      <p:nvGrpSpPr>
+        <p:cNvPr id="1" name=""/>
+        <p:cNvGrpSpPr/>
+        <p:nvPr/>
+      </p:nvGrpSpPr>
+      <p:grpSpPr>
+        <a:xfrm>
+          <a:off x="0" y="0"/>
+          <a:ext cx="0" cy="0"/>
+          <a:chOff x="0" y="0"/>
+          <a:chExt cx="0" cy="0"/>
+        </a:xfrm>
+      </p:grpSpPr>
+      <p:sp>
+        <p:nvSpPr>
+          <p:cNvPr id="2" name="投影片影像版面配置區 1"/>
+          <p:cNvSpPr>
+            <a:spLocks noGrp="1" noRot="1" noChangeAspect="1"/>
+          </p:cNvSpPr>
+          <p:nvPr>
+            <p:ph type="sldImg"/>
+          </p:nvPr>
+        </p:nvSpPr>
+        <p:spPr/>
+      </p:sp>
+      <p:sp>
+        <p:nvSpPr>
+          <p:cNvPr id="3" name="備忘稿版面配置區 2"/>
+          <p:cNvSpPr>
+            <a:spLocks noGrp="1"/>
+          </p:cNvSpPr>
+          <p:nvPr>
+            <p:ph type="body" idx="1"/>
+          </p:nvPr>
+        </p:nvSpPr>
+        <p:spPr/>
+        <p:txBody>
+          <a:bodyPr/>
+          <a:lstStyle/>
+          <a:p>
+            <a:r>
+              <a:rPr lang="zh-TW" altLang="en-US"/>
+              <a:t>來源：</a:t>
+            </a:r>
+            <a:r>
+              <a:rPr lang="en-US" altLang="zh-TW"/>
+              <a:t>docs/</a:t>
+            </a:r>
+            <a:r>
+              <a:rPr lang="zh-TW" altLang="en-US"/>
+              <a:t>進度報告</a:t>
+            </a:r>
+            <a:r>
+              <a:rPr lang="en-US" altLang="zh-TW"/>
+              <a:t>/08</a:t>
+            </a:r>
+            <a:r>
+              <a:rPr lang="zh-TW" altLang="en-US"/>
+              <a:t>月</a:t>
+            </a:r>
+            <a:r>
+              <a:rPr lang="en-US" altLang="zh-TW"/>
+              <a:t>/</a:t>
+            </a:r>
+            <a:r>
+              <a:rPr lang="zh-TW" altLang="en-US"/>
+              <a:t>八月份進度報告</a:t>
+            </a:r>
+            <a:r>
+              <a:rPr lang="en-US" altLang="zh-TW"/>
+              <a:t>.md §1</a:t>
+            </a:r>
+            <a:r>
+              <a:rPr lang="zh-TW" altLang="en-US"/>
+              <a:t>；</a:t>
+            </a:r>
+            <a:r>
+              <a:rPr lang="en-US" altLang="zh-TW"/>
+              <a:t>ui_06_mfg.png</a:t>
+            </a:r>
+            <a:r>
+              <a:rPr lang="zh-TW" altLang="en-US"/>
+              <a:t>。</a:t>
+            </a:r>
+            <a:r>
+              <a:rPr lang="en-US" altLang="zh-TW"/>
+              <a:t>08</a:t>
+            </a:r>
+            <a:r>
+              <a:rPr lang="zh-TW" altLang="en-US"/>
+              <a:t>月</a:t>
+            </a:r>
+            <a:r>
+              <a:rPr lang="en-US" altLang="zh-TW"/>
+              <a:t>MD</a:t>
+            </a:r>
+            <a:r>
+              <a:rPr lang="zh-TW" altLang="en-US"/>
+              <a:t>記錄</a:t>
+            </a:r>
+            <a:r>
+              <a:rPr lang="en-US" altLang="zh-TW"/>
+              <a:t>38972</a:t>
+            </a:r>
+            <a:r>
+              <a:rPr lang="zh-TW" altLang="en-US"/>
+              <a:t>筆，較晚的總覽截圖</a:t>
+            </a:r>
+            <a:r>
+              <a:rPr lang="en-US" altLang="zh-TW"/>
+              <a:t>39111</a:t>
+            </a:r>
+            <a:r>
+              <a:rPr lang="zh-TW" altLang="en-US"/>
+              <a:t>筆，因此以約</a:t>
+            </a:r>
+            <a:r>
+              <a:rPr lang="en-US" altLang="zh-TW"/>
+              <a:t>3.9</a:t>
+            </a:r>
+            <a:r>
+              <a:rPr lang="zh-TW" altLang="en-US"/>
+              <a:t>萬描述規模。製造視角截圖以</a:t>
+            </a:r>
+            <a:r>
+              <a:rPr lang="en-US" altLang="zh-TW"/>
+              <a:t>db100_wm</a:t>
+            </a:r>
+            <a:r>
+              <a:rPr lang="zh-TW" altLang="en-US"/>
+              <a:t>排序，為菱形化之後的</a:t>
+            </a:r>
+            <a:r>
+              <a:rPr lang="en-US" altLang="zh-TW"/>
+              <a:t>HFSS</a:t>
+            </a:r>
+            <a:r>
+              <a:rPr lang="zh-TW" altLang="en-US"/>
+              <a:t>結果；不是實測。截圖以</a:t>
+            </a:r>
+            <a:r>
+              <a:rPr lang="en-US" altLang="zh-TW"/>
+              <a:t>PPT</a:t>
+            </a:r>
+            <a:r>
+              <a:rPr lang="zh-TW" altLang="en-US"/>
+              <a:t>原生裁切放大上方控制及前三列，未改動原始數值。</a:t>
+            </a:r>
+          </a:p>
+        </p:txBody>
+      </p:sp>
+      <p:sp>
+        <p:nvSpPr>
+          <p:cNvPr id="4" name="投影片編號版面配置區 3"/>
+          <p:cNvSpPr>
+            <a:spLocks noGrp="1"/>
+          </p:cNvSpPr>
+          <p:nvPr>
+            <p:ph type="sldNum" sz="quarter" idx="5"/>
+          </p:nvPr>
+        </p:nvSpPr>
+        <p:spPr/>
+        <p:txBody>
+          <a:bodyPr/>
+          <a:lstStyle/>
+          <a:p>
+            <a:fld id="{E6A5811E-D10F-48C4-88EB-A6ADFE3F5DF4}" type="slidenum">
+              <a:rPr lang="zh-TW" altLang="en-US" smtClean="0"/>
+              <a:t>21</a:t>
+            </a:fld>
+            <a:endParaRPr lang="zh-TW" altLang="en-US"/>
+          </a:p>
+        </p:txBody>
+      </p:sp>
+    </p:spTree>
+    <p:extLst>
+      <p:ext uri="{BB962C8B-B14F-4D97-AF65-F5344CB8AC3E}">
+        <p14:creationId xmlns:p14="http://schemas.microsoft.com/office/powerpoint/2010/main" val="2045871675"/>
+      </p:ext>
+    </p:extLst>
+  </p:cSld>
+  <p:clrMapOvr>
+    <a:masterClrMapping/>
+  </p:clrMapOvr>
+</p:notes>
+</file>
+
+<file path=ppt/notesSlides/notesSlide22.xml><?xml version="1.0" encoding="utf-8"?>
+<p:notes xmlns:a="http://schemas.openxmlformats.org/drawingml/2006/main" xmlns:r="http://schemas.openxmlformats.org/officeDocument/2006/relationships" xmlns:p="http://schemas.openxmlformats.org/presentationml/2006/main">
+  <p:cSld>
+    <p:spTree>
+      <p:nvGrpSpPr>
+        <p:cNvPr id="1" name=""/>
+        <p:cNvGrpSpPr/>
+        <p:nvPr/>
+      </p:nvGrpSpPr>
+      <p:grpSpPr>
+        <a:xfrm>
+          <a:off x="0" y="0"/>
+          <a:ext cx="0" cy="0"/>
+          <a:chOff x="0" y="0"/>
+          <a:chExt cx="0" cy="0"/>
+        </a:xfrm>
+      </p:grpSpPr>
+      <p:sp>
+        <p:nvSpPr>
+          <p:cNvPr id="2" name="投影片影像版面配置區 1"/>
+          <p:cNvSpPr>
+            <a:spLocks noGrp="1" noRot="1" noChangeAspect="1"/>
+          </p:cNvSpPr>
+          <p:nvPr>
+            <p:ph type="sldImg"/>
+          </p:nvPr>
+        </p:nvSpPr>
+        <p:spPr/>
+      </p:sp>
+      <p:sp>
+        <p:nvSpPr>
+          <p:cNvPr id="3" name="備忘稿版面配置區 2"/>
+          <p:cNvSpPr>
+            <a:spLocks noGrp="1"/>
+          </p:cNvSpPr>
+          <p:nvPr>
+            <p:ph type="body" idx="1"/>
+          </p:nvPr>
+        </p:nvSpPr>
+        <p:spPr/>
+        <p:txBody>
+          <a:bodyPr/>
+          <a:lstStyle/>
+          <a:p>
+            <a:r>
+              <a:rPr lang="zh-TW" altLang="en-US"/>
+              <a:t>來源：</a:t>
+            </a:r>
+            <a:r>
+              <a:rPr lang="en-US" altLang="zh-TW"/>
+              <a:t>docs/log/round-70-dual-mfg-founding.md</a:t>
+            </a:r>
+            <a:r>
+              <a:rPr lang="zh-TW" altLang="en-US"/>
+              <a:t>；</a:t>
+            </a:r>
+            <a:r>
+              <a:rPr lang="en-US" altLang="zh-TW"/>
+              <a:t>docs/log/round-71-dual-dynasty-mining.md §4</a:t>
+            </a:r>
+            <a:r>
+              <a:rPr lang="zh-TW" altLang="en-US"/>
+              <a:t>；</a:t>
+            </a:r>
+            <a:r>
+              <a:rPr lang="en-US" altLang="zh-TW"/>
+              <a:t>antenna/patch/patch_simulator/dual_port.py:433–446</a:t>
+            </a:r>
+            <a:r>
+              <a:rPr lang="zh-TW" altLang="en-US"/>
+              <a:t>。</a:t>
+            </a:r>
+            <a:r>
+              <a:rPr lang="en-US" altLang="zh-TW"/>
+              <a:t>diag_bridge_w</a:t>
+            </a:r>
+            <a:r>
+              <a:rPr lang="zh-TW" altLang="en-US"/>
+              <a:t>是旋轉前</a:t>
+            </a:r>
+            <a:r>
+              <a:rPr lang="en-US" altLang="zh-TW"/>
+              <a:t>w×w</a:t>
+            </a:r>
+            <a:r>
+              <a:rPr lang="zh-TW" altLang="en-US"/>
+              <a:t>正方形邊長，非旋轉後水平對角長。</a:t>
+            </a:r>
+            <a:r>
+              <a:rPr lang="en-US" altLang="zh-TW"/>
+              <a:t>R71</a:t>
+            </a:r>
+            <a:r>
+              <a:rPr lang="zh-TW" altLang="en-US"/>
+              <a:t>單一冠軍三態：</a:t>
+            </a:r>
+            <a:r>
+              <a:rPr lang="en-US" altLang="zh-TW"/>
+              <a:t>0.075 mm −3.82</a:t>
+            </a:r>
+            <a:r>
+              <a:rPr lang="zh-TW" altLang="en-US"/>
+              <a:t>公證；</a:t>
+            </a:r>
+            <a:r>
+              <a:rPr lang="en-US" altLang="zh-TW"/>
+              <a:t>0.01 mm −6.86</a:t>
+            </a:r>
+            <a:r>
+              <a:rPr lang="zh-TW" altLang="en-US"/>
+              <a:t>單次；切角−</a:t>
+            </a:r>
+            <a:r>
+              <a:rPr lang="en-US" altLang="zh-TW"/>
+              <a:t>31.03</a:t>
+            </a:r>
+            <a:r>
+              <a:rPr lang="zh-TW" altLang="en-US"/>
+              <a:t>單次。這是八月研究條件；九月送板幾何以主報告</a:t>
+            </a:r>
+            <a:r>
+              <a:rPr lang="en-US" altLang="zh-TW"/>
+              <a:t>§2</a:t>
+            </a:r>
+            <a:r>
+              <a:rPr lang="zh-TW" altLang="en-US"/>
+              <a:t>為準。不將單一探針泛化為族群平均，不宣稱已有製程或實物驗證。</a:t>
+            </a:r>
+          </a:p>
+        </p:txBody>
+      </p:sp>
+      <p:sp>
+        <p:nvSpPr>
+          <p:cNvPr id="4" name="投影片編號版面配置區 3"/>
+          <p:cNvSpPr>
+            <a:spLocks noGrp="1"/>
+          </p:cNvSpPr>
+          <p:nvPr>
+            <p:ph type="sldNum" sz="quarter" idx="5"/>
+          </p:nvPr>
+        </p:nvSpPr>
+        <p:spPr/>
+        <p:txBody>
+          <a:bodyPr/>
+          <a:lstStyle/>
+          <a:p>
+            <a:fld id="{E6A5811E-D10F-48C4-88EB-A6ADFE3F5DF4}" type="slidenum">
+              <a:rPr lang="zh-TW" altLang="en-US" smtClean="0"/>
+              <a:t>22</a:t>
+            </a:fld>
+            <a:endParaRPr lang="zh-TW" altLang="en-US"/>
+          </a:p>
+        </p:txBody>
+      </p:sp>
+    </p:spTree>
+    <p:extLst>
+      <p:ext uri="{BB962C8B-B14F-4D97-AF65-F5344CB8AC3E}">
+        <p14:creationId xmlns:p14="http://schemas.microsoft.com/office/powerpoint/2010/main" val="734198147"/>
+      </p:ext>
+    </p:extLst>
+  </p:cSld>
+  <p:clrMapOvr>
+    <a:masterClrMapping/>
+  </p:clrMapOvr>
+</p:notes>
+</file>
+
+<file path=ppt/notesSlides/notesSlide23.xml><?xml version="1.0" encoding="utf-8"?>
+<p:notes xmlns:a="http://schemas.openxmlformats.org/drawingml/2006/main" xmlns:r="http://schemas.openxmlformats.org/officeDocument/2006/relationships" xmlns:p="http://schemas.openxmlformats.org/presentationml/2006/main">
+  <p:cSld>
+    <p:spTree>
+      <p:nvGrpSpPr>
+        <p:cNvPr id="1" name=""/>
+        <p:cNvGrpSpPr/>
+        <p:nvPr/>
+      </p:nvGrpSpPr>
+      <p:grpSpPr>
+        <a:xfrm>
+          <a:off x="0" y="0"/>
+          <a:ext cx="0" cy="0"/>
+          <a:chOff x="0" y="0"/>
+          <a:chExt cx="0" cy="0"/>
+        </a:xfrm>
+      </p:grpSpPr>
+      <p:sp>
+        <p:nvSpPr>
+          <p:cNvPr id="2" name="投影片影像版面配置區 1"/>
+          <p:cNvSpPr>
+            <a:spLocks noGrp="1" noRot="1" noChangeAspect="1"/>
+          </p:cNvSpPr>
+          <p:nvPr>
+            <p:ph type="sldImg"/>
+          </p:nvPr>
+        </p:nvSpPr>
+        <p:spPr/>
+      </p:sp>
+      <p:sp>
+        <p:nvSpPr>
+          <p:cNvPr id="3" name="備忘稿版面配置區 2"/>
+          <p:cNvSpPr>
+            <a:spLocks noGrp="1"/>
+          </p:cNvSpPr>
+          <p:nvPr>
+            <p:ph type="body" idx="1"/>
+          </p:nvPr>
+        </p:nvSpPr>
+        <p:spPr/>
+        <p:txBody>
+          <a:bodyPr/>
+          <a:lstStyle/>
+          <a:p>
+            <a:r>
+              <a:rPr lang="zh-TW" altLang="en-US"/>
+              <a:t>來源：</a:t>
+            </a:r>
+            <a:r>
+              <a:rPr lang="en-US" altLang="zh-TW"/>
+              <a:t>docs/</a:t>
+            </a:r>
+            <a:r>
+              <a:rPr lang="zh-TW" altLang="en-US"/>
+              <a:t>進度報告</a:t>
+            </a:r>
+            <a:r>
+              <a:rPr lang="en-US" altLang="zh-TW"/>
+              <a:t>/08</a:t>
+            </a:r>
+            <a:r>
+              <a:rPr lang="zh-TW" altLang="en-US"/>
+              <a:t>月</a:t>
+            </a:r>
+            <a:r>
+              <a:rPr lang="en-US" altLang="zh-TW"/>
+              <a:t>/</a:t>
+            </a:r>
+            <a:r>
+              <a:rPr lang="zh-TW" altLang="en-US"/>
+              <a:t>八月份進度報告</a:t>
+            </a:r>
+            <a:r>
+              <a:rPr lang="en-US" altLang="zh-TW"/>
+              <a:t>.md §2</a:t>
+            </a:r>
+            <a:r>
+              <a:rPr lang="zh-TW" altLang="en-US"/>
+              <a:t>；</a:t>
+            </a:r>
+            <a:r>
+              <a:rPr lang="en-US" altLang="zh-TW"/>
+              <a:t>dual_progress.png</a:t>
+            </a:r>
+            <a:r>
+              <a:rPr lang="zh-TW" altLang="en-US"/>
+              <a:t>；</a:t>
+            </a:r>
+            <a:r>
+              <a:rPr lang="en-US" altLang="zh-TW"/>
+              <a:t>dual_ladder.png</a:t>
+            </a:r>
+            <a:r>
+              <a:rPr lang="zh-TW" altLang="en-US"/>
+              <a:t>；</a:t>
+            </a:r>
+            <a:r>
+              <a:rPr lang="en-US" altLang="zh-TW"/>
+              <a:t>docs/records_dual.json</a:t>
+            </a:r>
+            <a:r>
+              <a:rPr lang="zh-TW" altLang="en-US"/>
+              <a:t>。</a:t>
+            </a:r>
+            <a:r>
+              <a:rPr lang="en-US" altLang="zh-TW"/>
+              <a:t>8/13</a:t>
+            </a:r>
+            <a:r>
+              <a:rPr lang="zh-TW" altLang="en-US"/>
+              <a:t>幾何換代後</a:t>
+            </a:r>
+            <a:r>
+              <a:rPr lang="en-US" altLang="zh-TW"/>
+              <a:t>wm_mfg</a:t>
+            </a:r>
+            <a:r>
+              <a:rPr lang="zh-TW" altLang="en-US"/>
+              <a:t>由−</a:t>
+            </a:r>
+            <a:r>
+              <a:rPr lang="en-US" altLang="zh-TW"/>
+              <a:t>5.90</a:t>
+            </a:r>
+            <a:r>
+              <a:rPr lang="zh-TW" altLang="en-US"/>
+              <a:t>到</a:t>
+            </a:r>
+            <a:r>
+              <a:rPr lang="en-US" altLang="zh-TW"/>
+              <a:t>8/24−2.39</a:t>
+            </a:r>
+            <a:r>
+              <a:rPr lang="zh-TW" altLang="en-US"/>
+              <a:t>，改善</a:t>
+            </a:r>
+            <a:r>
+              <a:rPr lang="en-US" altLang="zh-TW"/>
+              <a:t>3.51dB</a:t>
+            </a:r>
+            <a:r>
+              <a:rPr lang="zh-TW" altLang="en-US"/>
+              <a:t>，</a:t>
+            </a:r>
+            <a:r>
+              <a:rPr lang="en-US" altLang="zh-TW"/>
+              <a:t>17</a:t>
+            </a:r>
+            <a:r>
+              <a:rPr lang="zh-TW" altLang="en-US"/>
+              <a:t>次刷新；</a:t>
+            </a:r>
+            <a:r>
+              <a:rPr lang="en-US" altLang="zh-TW"/>
+              <a:t>8/11–8/24</a:t>
+            </a:r>
+            <a:r>
+              <a:rPr lang="zh-TW" altLang="en-US"/>
+              <a:t>完成</a:t>
+            </a:r>
+            <a:r>
+              <a:rPr lang="en-US" altLang="zh-TW"/>
+              <a:t>R57–R79</a:t>
+            </a:r>
+            <a:r>
+              <a:rPr lang="zh-TW" altLang="en-US"/>
+              <a:t>共</a:t>
+            </a:r>
+            <a:r>
+              <a:rPr lang="en-US" altLang="zh-TW"/>
+              <a:t>23</a:t>
+            </a:r>
+            <a:r>
+              <a:rPr lang="zh-TW" altLang="en-US"/>
+              <a:t>輪。代表圖样以</a:t>
+            </a:r>
+            <a:r>
+              <a:rPr lang="en-US" altLang="zh-TW"/>
+              <a:t>PPT</a:t>
+            </a:r>
+            <a:r>
+              <a:rPr lang="zh-TW" altLang="en-US"/>
+              <a:t>原生裁切取最初與最末圖，不修改像素</a:t>
+            </a:r>
+            <a:r>
+              <a:rPr lang="en-US" altLang="zh-TW"/>
+              <a:t>/</a:t>
+            </a:r>
+            <a:r>
+              <a:rPr lang="zh-TW" altLang="en-US"/>
+              <a:t>方向。未採用含−</a:t>
+            </a:r>
+            <a:r>
+              <a:rPr lang="en-US" altLang="zh-TW"/>
+              <a:t>2.30</a:t>
+            </a:r>
+            <a:r>
+              <a:rPr lang="zh-TW" altLang="en-US"/>
+              <a:t>理論上界的舊圖；該上界不可作理論保證。</a:t>
+            </a:r>
+          </a:p>
+        </p:txBody>
+      </p:sp>
+      <p:sp>
+        <p:nvSpPr>
+          <p:cNvPr id="4" name="投影片編號版面配置區 3"/>
+          <p:cNvSpPr>
+            <a:spLocks noGrp="1"/>
+          </p:cNvSpPr>
+          <p:nvPr>
+            <p:ph type="sldNum" sz="quarter" idx="5"/>
+          </p:nvPr>
+        </p:nvSpPr>
+        <p:spPr/>
+        <p:txBody>
+          <a:bodyPr/>
+          <a:lstStyle/>
+          <a:p>
+            <a:fld id="{E6A5811E-D10F-48C4-88EB-A6ADFE3F5DF4}" type="slidenum">
+              <a:rPr lang="zh-TW" altLang="en-US" smtClean="0"/>
+              <a:t>23</a:t>
+            </a:fld>
+            <a:endParaRPr lang="zh-TW" altLang="en-US"/>
+          </a:p>
+        </p:txBody>
+      </p:sp>
+    </p:spTree>
+    <p:extLst>
+      <p:ext uri="{BB962C8B-B14F-4D97-AF65-F5344CB8AC3E}">
+        <p14:creationId xmlns:p14="http://schemas.microsoft.com/office/powerpoint/2010/main" val="2632469234"/>
       </p:ext>
     </p:extLst>
   </p:cSld>
@@ -13791,10 +14879,10 @@
       </p:grpSpPr>
       <p:sp>
         <p:nvSpPr>
-          <p:cNvPr id="2" name="文字方塊 1">
+          <p:cNvPr id="2" name="recap_title">
             <a:extLst>
               <a:ext uri="{FF2B5EF4-FFF2-40B4-BE49-F238E27FC236}">
-                <a16:creationId xmlns:a16="http://schemas.microsoft.com/office/drawing/2014/main" id="{173E11E2-AADE-E4C4-4EA3-D376F8EC4EA8}"/>
+                <a16:creationId xmlns:a16="http://schemas.microsoft.com/office/drawing/2014/main" id="{8C057258-7C30-00BB-EF62-34B295631762}"/>
               </a:ext>
             </a:extLst>
           </p:cNvPr>
@@ -13803,8 +14891,8 @@
         </p:nvSpPr>
         <p:spPr>
           <a:xfrm>
-            <a:off x="406400" y="203200"/>
-            <a:ext cx="11379200" cy="384721"/>
+            <a:off x="533400" y="279399"/>
+            <a:ext cx="11112500" cy="584200"/>
           </a:xfrm>
           <a:prstGeom prst="rect">
             <a:avLst/>
@@ -13813,87 +14901,29 @@
         </p:spPr>
         <p:txBody>
           <a:bodyPr vert="horz" wrap="square" lIns="0" tIns="0" rIns="0" bIns="0" rtlCol="0">
-            <a:spAutoFit/>
+            <a:noAutofit/>
           </a:bodyPr>
           <a:lstStyle/>
           <a:p>
             <a:r>
-              <a:rPr lang="zh-TW" altLang="en-US" sz="2500" b="1">
-                <a:solidFill>
-                  <a:srgbClr val="1C5CAB"/>
+              <a:rPr lang="zh-TW" altLang="en-US" sz="3000" b="1">
+                <a:solidFill>
+                  <a:srgbClr val="152C3D"/>
                 </a:solidFill>
                 <a:latin typeface="Microsoft JhengHei" panose="020B0604030504040204" pitchFamily="34" charset="-120"/>
                 <a:ea typeface="Microsoft JhengHei" panose="020B0604030504040204" pitchFamily="34" charset="-120"/>
               </a:rPr>
-              <a:t>七、八月成果回顧（討論用）</a:t>
-            </a:r>
-          </a:p>
-        </p:txBody>
-      </p:sp>
-      <p:sp>
-        <p:nvSpPr>
-          <p:cNvPr id="3" name="矩形 2">
+              <a:t>七月：研究流程與驗證效率</a:t>
+            </a:r>
+          </a:p>
+        </p:txBody>
+      </p:sp>
+      <p:cxnSp>
+        <p:nvCxnSpPr>
+          <p:cNvPr id="3" name="直線接點 2">
             <a:extLst>
               <a:ext uri="{FF2B5EF4-FFF2-40B4-BE49-F238E27FC236}">
-                <a16:creationId xmlns:a16="http://schemas.microsoft.com/office/drawing/2014/main" id="{5AA32027-0870-1998-DB02-EF9A7BA7074C}"/>
-              </a:ext>
-            </a:extLst>
-          </p:cNvPr>
-          <p:cNvSpPr/>
-          <p:nvPr/>
-        </p:nvSpPr>
-        <p:spPr>
-          <a:xfrm>
-            <a:off x="431800" y="850900"/>
-            <a:ext cx="1371600" cy="50800"/>
-          </a:xfrm>
-          <a:prstGeom prst="rect">
-            <a:avLst/>
-          </a:prstGeom>
-          <a:solidFill>
-            <a:srgbClr val="1C5CAB"/>
-          </a:solidFill>
-          <a:ln w="9525" cap="flat" cmpd="sng" algn="ctr">
-            <a:noFill/>
-            <a:prstDash val="solid"/>
-          </a:ln>
-          <a:effectLst>
-            <a:outerShdw blurRad="40000" dist="23000" dir="5400000" rotWithShape="0">
-              <a:srgbClr val="000000">
-                <a:alpha val="35000"/>
-              </a:srgbClr>
-            </a:outerShdw>
-          </a:effectLst>
-        </p:spPr>
-        <p:style>
-          <a:lnRef idx="1">
-            <a:schemeClr val="accent1"/>
-          </a:lnRef>
-          <a:fillRef idx="3">
-            <a:schemeClr val="accent1"/>
-          </a:fillRef>
-          <a:effectRef idx="2">
-            <a:schemeClr val="accent1"/>
-          </a:effectRef>
-          <a:fontRef idx="minor">
-            <a:schemeClr val="lt1"/>
-          </a:fontRef>
-        </p:style>
-        <p:txBody>
-          <a:bodyPr rtlCol="0" anchor="ctr"/>
-          <a:lstStyle/>
-          <a:p>
-            <a:pPr algn="ctr"/>
-            <a:endParaRPr lang="zh-TW" altLang="en-US"/>
-          </a:p>
-        </p:txBody>
-      </p:sp>
-      <p:cxnSp>
-        <p:nvCxnSpPr>
-          <p:cNvPr id="4" name="直線接點 3">
-            <a:extLst>
-              <a:ext uri="{FF2B5EF4-FFF2-40B4-BE49-F238E27FC236}">
-                <a16:creationId xmlns:a16="http://schemas.microsoft.com/office/drawing/2014/main" id="{1A01DEF1-7A42-43A2-0FED-2892547A09E1}"/>
+                <a16:creationId xmlns:a16="http://schemas.microsoft.com/office/drawing/2014/main" id="{397A07AD-7EF3-1649-5EC1-B4D087B51E01}"/>
               </a:ext>
             </a:extLst>
           </p:cNvPr>
@@ -13902,17 +14932,31 @@
         </p:nvCxnSpPr>
         <p:spPr>
           <a:xfrm>
-            <a:off x="6096000" y="1231900"/>
-            <a:ext cx="0" cy="4254500"/>
+            <a:off x="533400" y="1041400"/>
+            <a:ext cx="11125200" cy="0"/>
           </a:xfrm>
           <a:prstGeom prst="line">
             <a:avLst/>
           </a:prstGeom>
-          <a:ln w="15875">
+          <a:ln w="8890">
             <a:solidFill>
-              <a:srgbClr val="C6CFDB"/>
+              <a:srgbClr val="C6D5E1"/>
             </a:solidFill>
           </a:ln>
+          <a:effectLst/>
+          <a:extLst>
+            <a:ext uri="{AF507438-7753-43E0-B8FC-AC1667EBCBE1}">
+              <a14:hiddenEffects xmlns:a14="http://schemas.microsoft.com/office/drawing/2010/main">
+                <a:effectLst>
+                  <a:outerShdw blurRad="40000" dist="20000" dir="5400000" rotWithShape="0">
+                    <a:srgbClr val="000000">
+                      <a:alpha val="38000"/>
+                    </a:srgbClr>
+                  </a:outerShdw>
+                </a:effectLst>
+              </a14:hiddenEffects>
+            </a:ext>
+          </a:extLst>
         </p:spPr>
         <p:style>
           <a:lnRef idx="2">
@@ -13929,12 +14973,67 @@
           </a:fontRef>
         </p:style>
       </p:cxnSp>
+      <p:cxnSp>
+        <p:nvCxnSpPr>
+          <p:cNvPr id="4" name="直線接點 3">
+            <a:extLst>
+              <a:ext uri="{FF2B5EF4-FFF2-40B4-BE49-F238E27FC236}">
+                <a16:creationId xmlns:a16="http://schemas.microsoft.com/office/drawing/2014/main" id="{49F6284E-50FF-30AE-4793-687FF127FFC7}"/>
+              </a:ext>
+            </a:extLst>
+          </p:cNvPr>
+          <p:cNvCxnSpPr/>
+          <p:nvPr/>
+        </p:nvCxnSpPr>
+        <p:spPr>
+          <a:xfrm>
+            <a:off x="533400" y="1041400"/>
+            <a:ext cx="1244600" cy="0"/>
+          </a:xfrm>
+          <a:prstGeom prst="line">
+            <a:avLst/>
+          </a:prstGeom>
+          <a:ln w="29210">
+            <a:solidFill>
+              <a:srgbClr val="245B85"/>
+            </a:solidFill>
+          </a:ln>
+          <a:effectLst/>
+          <a:extLst>
+            <a:ext uri="{AF507438-7753-43E0-B8FC-AC1667EBCBE1}">
+              <a14:hiddenEffects xmlns:a14="http://schemas.microsoft.com/office/drawing/2010/main">
+                <a:effectLst>
+                  <a:outerShdw blurRad="40000" dist="20000" dir="5400000" rotWithShape="0">
+                    <a:srgbClr val="000000">
+                      <a:alpha val="38000"/>
+                    </a:srgbClr>
+                  </a:outerShdw>
+                </a:effectLst>
+              </a14:hiddenEffects>
+            </a:ext>
+          </a:extLst>
+        </p:spPr>
+        <p:style>
+          <a:lnRef idx="2">
+            <a:schemeClr val="accent1"/>
+          </a:lnRef>
+          <a:fillRef idx="0">
+            <a:schemeClr val="accent1"/>
+          </a:fillRef>
+          <a:effectRef idx="1">
+            <a:schemeClr val="accent1"/>
+          </a:effectRef>
+          <a:fontRef idx="minor">
+            <a:schemeClr val="tx1"/>
+          </a:fontRef>
+        </p:style>
+      </p:cxnSp>
       <p:sp>
         <p:nvSpPr>
           <p:cNvPr id="5" name="文字方塊 4">
             <a:extLst>
               <a:ext uri="{FF2B5EF4-FFF2-40B4-BE49-F238E27FC236}">
-                <a16:creationId xmlns:a16="http://schemas.microsoft.com/office/drawing/2014/main" id="{F72D79CB-A4EF-95CC-B52E-83BF3B14557F}"/>
+                <a16:creationId xmlns:a16="http://schemas.microsoft.com/office/drawing/2014/main" id="{8E0C1EE8-15CE-69F0-35A4-D48306E168EE}"/>
               </a:ext>
             </a:extLst>
           </p:cNvPr>
@@ -13943,8 +15042,8 @@
         </p:nvSpPr>
         <p:spPr>
           <a:xfrm>
-            <a:off x="736600" y="1193800"/>
-            <a:ext cx="5029200" cy="292388"/>
+            <a:off x="533400" y="1371599"/>
+            <a:ext cx="11125200" cy="406400"/>
           </a:xfrm>
           <a:prstGeom prst="rect">
             <a:avLst/>
@@ -13953,781 +15052,29 @@
         </p:spPr>
         <p:txBody>
           <a:bodyPr vert="horz" wrap="square" lIns="0" tIns="0" rIns="0" bIns="0" rtlCol="0">
-            <a:spAutoFit/>
+            <a:noAutofit/>
           </a:bodyPr>
           <a:lstStyle/>
           <a:p>
             <a:r>
-              <a:rPr lang="en-US" altLang="zh-TW" sz="1900" b="1">
-                <a:solidFill>
-                  <a:srgbClr val="1C5CAB"/>
+              <a:rPr lang="zh-TW" altLang="en-US">
+                <a:solidFill>
+                  <a:srgbClr val="152C3D"/>
                 </a:solidFill>
                 <a:latin typeface="Microsoft JhengHei" panose="020B0604030504040204" pitchFamily="34" charset="-120"/>
                 <a:ea typeface="Microsoft JhengHei" panose="020B0604030504040204" pitchFamily="34" charset="-120"/>
               </a:rPr>
-              <a:t>7 </a:t>
-            </a:r>
-            <a:r>
-              <a:rPr lang="zh-TW" altLang="en-US" sz="1900" b="1">
-                <a:solidFill>
-                  <a:srgbClr val="1C5CAB"/>
-                </a:solidFill>
-                <a:latin typeface="Microsoft JhengHei" panose="020B0604030504040204" pitchFamily="34" charset="-120"/>
-                <a:ea typeface="Microsoft JhengHei" panose="020B0604030504040204" pitchFamily="34" charset="-120"/>
-              </a:rPr>
-              <a:t>月｜架構與單埠線</a:t>
-            </a:r>
-          </a:p>
-        </p:txBody>
-      </p:sp>
-      <p:sp>
-        <p:nvSpPr>
-          <p:cNvPr id="6" name="文字方塊 5">
+              <a:t>把候選決策、真值模擬與代理訓練拆開，讓工作分配可追溯</a:t>
+            </a:r>
+          </a:p>
+        </p:txBody>
+      </p:sp>
+      <p:sp>
+        <p:nvSpPr>
+          <p:cNvPr id="6" name="矩形 5">
             <a:extLst>
               <a:ext uri="{FF2B5EF4-FFF2-40B4-BE49-F238E27FC236}">
-                <a16:creationId xmlns:a16="http://schemas.microsoft.com/office/drawing/2014/main" id="{0255C99D-2ECA-4227-8961-4C3FE2A457DF}"/>
-              </a:ext>
-            </a:extLst>
-          </p:cNvPr>
-          <p:cNvSpPr txBox="1"/>
-          <p:nvPr/>
-        </p:nvSpPr>
-        <p:spPr>
-          <a:xfrm>
-            <a:off x="736600" y="1714500"/>
-            <a:ext cx="5029200" cy="384721"/>
-          </a:xfrm>
-          <a:prstGeom prst="rect">
-            <a:avLst/>
-          </a:prstGeom>
-          <a:noFill/>
-        </p:spPr>
-        <p:txBody>
-          <a:bodyPr vert="horz" wrap="square" lIns="0" tIns="0" rIns="0" bIns="0" rtlCol="0">
-            <a:spAutoFit/>
-          </a:bodyPr>
-          <a:lstStyle/>
-          <a:p>
-            <a:r>
-              <a:rPr lang="zh-TW" altLang="en-US" sz="2500" b="1">
-                <a:solidFill>
-                  <a:srgbClr val="0B0B0B"/>
-                </a:solidFill>
-                <a:latin typeface="Microsoft JhengHei" panose="020B0604030504040204" pitchFamily="34" charset="-120"/>
-                <a:ea typeface="Microsoft JhengHei" panose="020B0604030504040204" pitchFamily="34" charset="-120"/>
-              </a:rPr>
-              <a:t>線上迴圈 </a:t>
-            </a:r>
-            <a:r>
-              <a:rPr lang="en-US" altLang="zh-TW" sz="2500" b="1">
-                <a:solidFill>
-                  <a:srgbClr val="0B0B0B"/>
-                </a:solidFill>
-                <a:latin typeface="Microsoft JhengHei" panose="020B0604030504040204" pitchFamily="34" charset="-120"/>
-                <a:ea typeface="Microsoft JhengHei" panose="020B0604030504040204" pitchFamily="34" charset="-120"/>
-              </a:rPr>
-              <a:t>278 </a:t>
-            </a:r>
-            <a:r>
-              <a:rPr lang="zh-TW" altLang="en-US" sz="2500" b="1">
-                <a:solidFill>
-                  <a:srgbClr val="0B0B0B"/>
-                </a:solidFill>
-                <a:latin typeface="Microsoft JhengHei" panose="020B0604030504040204" pitchFamily="34" charset="-120"/>
-                <a:ea typeface="Microsoft JhengHei" panose="020B0604030504040204" pitchFamily="34" charset="-120"/>
-              </a:rPr>
-              <a:t>秒／輪</a:t>
-            </a:r>
-          </a:p>
-        </p:txBody>
-      </p:sp>
-      <p:sp>
-        <p:nvSpPr>
-          <p:cNvPr id="7" name="文字方塊 6">
-            <a:extLst>
-              <a:ext uri="{FF2B5EF4-FFF2-40B4-BE49-F238E27FC236}">
-                <a16:creationId xmlns:a16="http://schemas.microsoft.com/office/drawing/2014/main" id="{EC82048A-BF8F-25F4-7212-C90CA40F05A6}"/>
-              </a:ext>
-            </a:extLst>
-          </p:cNvPr>
-          <p:cNvSpPr txBox="1"/>
-          <p:nvPr/>
-        </p:nvSpPr>
-        <p:spPr>
-          <a:xfrm>
-            <a:off x="736600" y="2133600"/>
-            <a:ext cx="5029200" cy="276999"/>
-          </a:xfrm>
-          <a:prstGeom prst="rect">
-            <a:avLst/>
-          </a:prstGeom>
-          <a:noFill/>
-        </p:spPr>
-        <p:txBody>
-          <a:bodyPr vert="horz" wrap="square" lIns="0" tIns="0" rIns="0" bIns="0" rtlCol="0">
-            <a:spAutoFit/>
-          </a:bodyPr>
-          <a:lstStyle/>
-          <a:p>
-            <a:r>
-              <a:rPr lang="zh-TW" altLang="en-US" b="1">
-                <a:solidFill>
-                  <a:srgbClr val="1C5CAB"/>
-                </a:solidFill>
-                <a:latin typeface="Microsoft JhengHei" panose="020B0604030504040204" pitchFamily="34" charset="-120"/>
-                <a:ea typeface="Microsoft JhengHei" panose="020B0604030504040204" pitchFamily="34" charset="-120"/>
-              </a:rPr>
-              <a:t>批次驗證中位 </a:t>
-            </a:r>
-            <a:r>
-              <a:rPr lang="en-US" altLang="zh-TW" b="1">
-                <a:solidFill>
-                  <a:srgbClr val="1C5CAB"/>
-                </a:solidFill>
-                <a:latin typeface="Microsoft JhengHei" panose="020B0604030504040204" pitchFamily="34" charset="-120"/>
-                <a:ea typeface="Microsoft JhengHei" panose="020B0604030504040204" pitchFamily="34" charset="-120"/>
-              </a:rPr>
-              <a:t>160 </a:t>
-            </a:r>
-            <a:r>
-              <a:rPr lang="zh-TW" altLang="en-US" b="1">
-                <a:solidFill>
-                  <a:srgbClr val="1C5CAB"/>
-                </a:solidFill>
-                <a:latin typeface="Microsoft JhengHei" panose="020B0604030504040204" pitchFamily="34" charset="-120"/>
-                <a:ea typeface="Microsoft JhengHei" panose="020B0604030504040204" pitchFamily="34" charset="-120"/>
-              </a:rPr>
-              <a:t>秒／筆</a:t>
-            </a:r>
-          </a:p>
-        </p:txBody>
-      </p:sp>
-      <p:sp>
-        <p:nvSpPr>
-          <p:cNvPr id="8" name="文字方塊 7">
-            <a:extLst>
-              <a:ext uri="{FF2B5EF4-FFF2-40B4-BE49-F238E27FC236}">
-                <a16:creationId xmlns:a16="http://schemas.microsoft.com/office/drawing/2014/main" id="{E1FE8583-9B63-5122-CF19-80BEC4C5B5B1}"/>
-              </a:ext>
-            </a:extLst>
-          </p:cNvPr>
-          <p:cNvSpPr txBox="1"/>
-          <p:nvPr/>
-        </p:nvSpPr>
-        <p:spPr>
-          <a:xfrm>
-            <a:off x="736600" y="2857500"/>
-            <a:ext cx="5029200" cy="1333698"/>
-          </a:xfrm>
-          <a:prstGeom prst="rect">
-            <a:avLst/>
-          </a:prstGeom>
-          <a:noFill/>
-        </p:spPr>
-        <p:txBody>
-          <a:bodyPr vert="horz" wrap="square" lIns="0" tIns="0" rIns="0" bIns="0" rtlCol="0">
-            <a:spAutoFit/>
-          </a:bodyPr>
-          <a:lstStyle/>
-          <a:p>
-            <a:pPr>
-              <a:spcAft>
-                <a:spcPts val="200"/>
-              </a:spcAft>
-            </a:pPr>
-            <a:r>
-              <a:rPr lang="en-US" altLang="zh-TW" sz="1600">
-                <a:solidFill>
-                  <a:srgbClr val="0B0B0B"/>
-                </a:solidFill>
-                <a:latin typeface="Microsoft JhengHei" panose="020B0604030504040204" pitchFamily="34" charset="-120"/>
-                <a:ea typeface="Microsoft JhengHei" panose="020B0604030504040204" pitchFamily="34" charset="-120"/>
-              </a:rPr>
-              <a:t>• </a:t>
-            </a:r>
-            <a:r>
-              <a:rPr lang="zh-TW" altLang="en-US" sz="1600">
-                <a:solidFill>
-                  <a:srgbClr val="0B0B0B"/>
-                </a:solidFill>
-                <a:latin typeface="Microsoft JhengHei" panose="020B0604030504040204" pitchFamily="34" charset="-120"/>
-                <a:ea typeface="Microsoft JhengHei" panose="020B0604030504040204" pitchFamily="34" charset="-120"/>
-              </a:rPr>
-              <a:t>解耦 </a:t>
-            </a:r>
-            <a:r>
-              <a:rPr lang="en-US" altLang="zh-TW" sz="1600">
-                <a:solidFill>
-                  <a:srgbClr val="0B0B0B"/>
-                </a:solidFill>
-                <a:latin typeface="Microsoft JhengHei" panose="020B0604030504040204" pitchFamily="34" charset="-120"/>
-                <a:ea typeface="Microsoft JhengHei" panose="020B0604030504040204" pitchFamily="34" charset="-120"/>
-              </a:rPr>
-              <a:t>Agent </a:t>
-            </a:r>
-            <a:r>
-              <a:rPr lang="zh-TW" altLang="en-US" sz="1600">
-                <a:solidFill>
-                  <a:srgbClr val="0B0B0B"/>
-                </a:solidFill>
-                <a:latin typeface="Microsoft JhengHei" panose="020B0604030504040204" pitchFamily="34" charset="-120"/>
-                <a:ea typeface="Microsoft JhengHei" panose="020B0604030504040204" pitchFamily="34" charset="-120"/>
-              </a:rPr>
-              <a:t>決策、</a:t>
-            </a:r>
-            <a:r>
-              <a:rPr lang="en-US" altLang="zh-TW" sz="1600">
-                <a:solidFill>
-                  <a:srgbClr val="0B0B0B"/>
-                </a:solidFill>
-                <a:latin typeface="Microsoft JhengHei" panose="020B0604030504040204" pitchFamily="34" charset="-120"/>
-                <a:ea typeface="Microsoft JhengHei" panose="020B0604030504040204" pitchFamily="34" charset="-120"/>
-              </a:rPr>
-              <a:t>HFSS </a:t>
-            </a:r>
-            <a:r>
-              <a:rPr lang="zh-TW" altLang="en-US" sz="1600">
-                <a:solidFill>
-                  <a:srgbClr val="0B0B0B"/>
-                </a:solidFill>
-                <a:latin typeface="Microsoft JhengHei" panose="020B0604030504040204" pitchFamily="34" charset="-120"/>
-                <a:ea typeface="Microsoft JhengHei" panose="020B0604030504040204" pitchFamily="34" charset="-120"/>
-              </a:rPr>
-              <a:t>真值模擬與分析工具</a:t>
-            </a:r>
-          </a:p>
-          <a:p>
-            <a:pPr>
-              <a:spcAft>
-                <a:spcPts val="200"/>
-              </a:spcAft>
-            </a:pPr>
-            <a:endParaRPr lang="zh-TW" altLang="en-US" sz="1600">
-              <a:solidFill>
-                <a:srgbClr val="0B0B0B"/>
-              </a:solidFill>
-              <a:latin typeface="Microsoft JhengHei" panose="020B0604030504040204" pitchFamily="34" charset="-120"/>
-              <a:ea typeface="Microsoft JhengHei" panose="020B0604030504040204" pitchFamily="34" charset="-120"/>
-            </a:endParaRPr>
-          </a:p>
-          <a:p>
-            <a:pPr>
-              <a:spcAft>
-                <a:spcPts val="200"/>
-              </a:spcAft>
-            </a:pPr>
-            <a:r>
-              <a:rPr lang="en-US" altLang="zh-TW" sz="1600">
-                <a:solidFill>
-                  <a:srgbClr val="0B0B0B"/>
-                </a:solidFill>
-                <a:latin typeface="Microsoft JhengHei" panose="020B0604030504040204" pitchFamily="34" charset="-120"/>
-                <a:ea typeface="Microsoft JhengHei" panose="020B0604030504040204" pitchFamily="34" charset="-120"/>
-              </a:rPr>
-              <a:t>• </a:t>
-            </a:r>
-            <a:r>
-              <a:rPr lang="zh-TW" altLang="en-US" sz="1600">
-                <a:solidFill>
-                  <a:srgbClr val="0B0B0B"/>
-                </a:solidFill>
-                <a:latin typeface="Microsoft JhengHei" panose="020B0604030504040204" pitchFamily="34" charset="-120"/>
-                <a:ea typeface="Microsoft JhengHei" panose="020B0604030504040204" pitchFamily="34" charset="-120"/>
-              </a:rPr>
-              <a:t>建立可追溯的批次驗證流程</a:t>
-            </a:r>
-          </a:p>
-          <a:p>
-            <a:pPr>
-              <a:spcAft>
-                <a:spcPts val="200"/>
-              </a:spcAft>
-            </a:pPr>
-            <a:endParaRPr lang="zh-TW" altLang="en-US" sz="1600">
-              <a:solidFill>
-                <a:srgbClr val="0B0B0B"/>
-              </a:solidFill>
-              <a:latin typeface="Microsoft JhengHei" panose="020B0604030504040204" pitchFamily="34" charset="-120"/>
-              <a:ea typeface="Microsoft JhengHei" panose="020B0604030504040204" pitchFamily="34" charset="-120"/>
-            </a:endParaRPr>
-          </a:p>
-          <a:p>
-            <a:pPr>
-              <a:spcAft>
-                <a:spcPts val="200"/>
-              </a:spcAft>
-            </a:pPr>
-            <a:r>
-              <a:rPr lang="en-US" altLang="zh-TW" sz="1600">
-                <a:solidFill>
-                  <a:srgbClr val="0B0B0B"/>
-                </a:solidFill>
-                <a:latin typeface="Microsoft JhengHei" panose="020B0604030504040204" pitchFamily="34" charset="-120"/>
-                <a:ea typeface="Microsoft JhengHei" panose="020B0604030504040204" pitchFamily="34" charset="-120"/>
-              </a:rPr>
-              <a:t>• </a:t>
-            </a:r>
-            <a:r>
-              <a:rPr lang="zh-TW" altLang="en-US" sz="1600">
-                <a:solidFill>
-                  <a:srgbClr val="0B0B0B"/>
-                </a:solidFill>
-                <a:latin typeface="Microsoft JhengHei" panose="020B0604030504040204" pitchFamily="34" charset="-120"/>
-                <a:ea typeface="Microsoft JhengHei" panose="020B0604030504040204" pitchFamily="34" charset="-120"/>
-              </a:rPr>
-              <a:t>紀錄級結果以同圖三次 </a:t>
-            </a:r>
-            <a:r>
-              <a:rPr lang="en-US" altLang="zh-TW" sz="1600">
-                <a:solidFill>
-                  <a:srgbClr val="0B0B0B"/>
-                </a:solidFill>
-                <a:latin typeface="Microsoft JhengHei" panose="020B0604030504040204" pitchFamily="34" charset="-120"/>
-                <a:ea typeface="Microsoft JhengHei" panose="020B0604030504040204" pitchFamily="34" charset="-120"/>
-              </a:rPr>
-              <a:t>HFSS </a:t>
-            </a:r>
-            <a:r>
-              <a:rPr lang="zh-TW" altLang="en-US" sz="1600">
-                <a:solidFill>
-                  <a:srgbClr val="0B0B0B"/>
-                </a:solidFill>
-                <a:latin typeface="Microsoft JhengHei" panose="020B0604030504040204" pitchFamily="34" charset="-120"/>
-                <a:ea typeface="Microsoft JhengHei" panose="020B0604030504040204" pitchFamily="34" charset="-120"/>
-              </a:rPr>
-              <a:t>重測確認</a:t>
-            </a:r>
-          </a:p>
-        </p:txBody>
-      </p:sp>
-      <p:sp>
-        <p:nvSpPr>
-          <p:cNvPr id="9" name="文字方塊 8">
-            <a:extLst>
-              <a:ext uri="{FF2B5EF4-FFF2-40B4-BE49-F238E27FC236}">
-                <a16:creationId xmlns:a16="http://schemas.microsoft.com/office/drawing/2014/main" id="{9F97FCA6-D3A6-8D2A-4CB3-EEF27C3F5CB9}"/>
-              </a:ext>
-            </a:extLst>
-          </p:cNvPr>
-          <p:cNvSpPr txBox="1"/>
-          <p:nvPr/>
-        </p:nvSpPr>
-        <p:spPr>
-          <a:xfrm>
-            <a:off x="6426200" y="1193800"/>
-            <a:ext cx="5029200" cy="292388"/>
-          </a:xfrm>
-          <a:prstGeom prst="rect">
-            <a:avLst/>
-          </a:prstGeom>
-          <a:noFill/>
-        </p:spPr>
-        <p:txBody>
-          <a:bodyPr vert="horz" wrap="square" lIns="0" tIns="0" rIns="0" bIns="0" rtlCol="0">
-            <a:spAutoFit/>
-          </a:bodyPr>
-          <a:lstStyle/>
-          <a:p>
-            <a:r>
-              <a:rPr lang="en-US" altLang="zh-TW" sz="1900" b="1">
-                <a:solidFill>
-                  <a:srgbClr val="1C5CAB"/>
-                </a:solidFill>
-                <a:latin typeface="Microsoft JhengHei" panose="020B0604030504040204" pitchFamily="34" charset="-120"/>
-                <a:ea typeface="Microsoft JhengHei" panose="020B0604030504040204" pitchFamily="34" charset="-120"/>
-              </a:rPr>
-              <a:t>8 </a:t>
-            </a:r>
-            <a:r>
-              <a:rPr lang="zh-TW" altLang="en-US" sz="1900" b="1">
-                <a:solidFill>
-                  <a:srgbClr val="1C5CAB"/>
-                </a:solidFill>
-                <a:latin typeface="Microsoft JhengHei" panose="020B0604030504040204" pitchFamily="34" charset="-120"/>
-                <a:ea typeface="Microsoft JhengHei" panose="020B0604030504040204" pitchFamily="34" charset="-120"/>
-              </a:rPr>
-              <a:t>月｜資料工具與雙埠線</a:t>
-            </a:r>
-          </a:p>
-        </p:txBody>
-      </p:sp>
-      <p:sp>
-        <p:nvSpPr>
-          <p:cNvPr id="10" name="文字方塊 9">
-            <a:extLst>
-              <a:ext uri="{FF2B5EF4-FFF2-40B4-BE49-F238E27FC236}">
-                <a16:creationId xmlns:a16="http://schemas.microsoft.com/office/drawing/2014/main" id="{224592FA-EDB3-DA7C-0C85-BF24B9951A20}"/>
-              </a:ext>
-            </a:extLst>
-          </p:cNvPr>
-          <p:cNvSpPr txBox="1"/>
-          <p:nvPr/>
-        </p:nvSpPr>
-        <p:spPr>
-          <a:xfrm>
-            <a:off x="6426200" y="1714500"/>
-            <a:ext cx="5029200" cy="384721"/>
-          </a:xfrm>
-          <a:prstGeom prst="rect">
-            <a:avLst/>
-          </a:prstGeom>
-          <a:noFill/>
-        </p:spPr>
-        <p:txBody>
-          <a:bodyPr vert="horz" wrap="square" lIns="0" tIns="0" rIns="0" bIns="0" rtlCol="0">
-            <a:spAutoFit/>
-          </a:bodyPr>
-          <a:lstStyle/>
-          <a:p>
-            <a:r>
-              <a:rPr lang="zh-TW" altLang="en-US" sz="2500" b="1">
-                <a:solidFill>
-                  <a:srgbClr val="0B0B0B"/>
-                </a:solidFill>
-                <a:latin typeface="Microsoft JhengHei" panose="020B0604030504040204" pitchFamily="34" charset="-120"/>
-                <a:ea typeface="Microsoft JhengHei" panose="020B0604030504040204" pitchFamily="34" charset="-120"/>
-              </a:rPr>
-              <a:t>−</a:t>
-            </a:r>
-            <a:r>
-              <a:rPr lang="en-US" altLang="zh-TW" sz="2500" b="1">
-                <a:solidFill>
-                  <a:srgbClr val="0B0B0B"/>
-                </a:solidFill>
-                <a:latin typeface="Microsoft JhengHei" panose="020B0604030504040204" pitchFamily="34" charset="-120"/>
-                <a:ea typeface="Microsoft JhengHei" panose="020B0604030504040204" pitchFamily="34" charset="-120"/>
-              </a:rPr>
-              <a:t>5.90 </a:t>
-            </a:r>
-            <a:r>
-              <a:rPr lang="zh-TW" altLang="en-US" sz="2500" b="1">
-                <a:solidFill>
-                  <a:srgbClr val="0B0B0B"/>
-                </a:solidFill>
-                <a:latin typeface="Microsoft JhengHei" panose="020B0604030504040204" pitchFamily="34" charset="-120"/>
-                <a:ea typeface="Microsoft JhengHei" panose="020B0604030504040204" pitchFamily="34" charset="-120"/>
-              </a:rPr>
-              <a:t>改善至 −</a:t>
-            </a:r>
-            <a:r>
-              <a:rPr lang="en-US" altLang="zh-TW" sz="2500" b="1">
-                <a:solidFill>
-                  <a:srgbClr val="0B0B0B"/>
-                </a:solidFill>
-                <a:latin typeface="Microsoft JhengHei" panose="020B0604030504040204" pitchFamily="34" charset="-120"/>
-                <a:ea typeface="Microsoft JhengHei" panose="020B0604030504040204" pitchFamily="34" charset="-120"/>
-              </a:rPr>
-              <a:t>2.39 dB</a:t>
-            </a:r>
-            <a:endParaRPr lang="zh-TW" altLang="en-US" sz="2500" b="1">
-              <a:solidFill>
-                <a:srgbClr val="0B0B0B"/>
-              </a:solidFill>
-              <a:latin typeface="Microsoft JhengHei" panose="020B0604030504040204" pitchFamily="34" charset="-120"/>
-              <a:ea typeface="Microsoft JhengHei" panose="020B0604030504040204" pitchFamily="34" charset="-120"/>
-            </a:endParaRPr>
-          </a:p>
-        </p:txBody>
-      </p:sp>
-      <p:sp>
-        <p:nvSpPr>
-          <p:cNvPr id="11" name="文字方塊 10">
-            <a:extLst>
-              <a:ext uri="{FF2B5EF4-FFF2-40B4-BE49-F238E27FC236}">
-                <a16:creationId xmlns:a16="http://schemas.microsoft.com/office/drawing/2014/main" id="{42058F35-148E-3A7C-77A6-07834D41FBE9}"/>
-              </a:ext>
-            </a:extLst>
-          </p:cNvPr>
-          <p:cNvSpPr txBox="1"/>
-          <p:nvPr/>
-        </p:nvSpPr>
-        <p:spPr>
-          <a:xfrm>
-            <a:off x="6426200" y="2133600"/>
-            <a:ext cx="5029200" cy="276999"/>
-          </a:xfrm>
-          <a:prstGeom prst="rect">
-            <a:avLst/>
-          </a:prstGeom>
-          <a:noFill/>
-        </p:spPr>
-        <p:txBody>
-          <a:bodyPr vert="horz" wrap="square" lIns="0" tIns="0" rIns="0" bIns="0" rtlCol="0">
-            <a:spAutoFit/>
-          </a:bodyPr>
-          <a:lstStyle/>
-          <a:p>
-            <a:r>
-              <a:rPr lang="zh-TW" altLang="en-US" b="1">
-                <a:solidFill>
-                  <a:srgbClr val="1C5CAB"/>
-                </a:solidFill>
-                <a:latin typeface="Microsoft JhengHei" panose="020B0604030504040204" pitchFamily="34" charset="-120"/>
-                <a:ea typeface="Microsoft JhengHei" panose="020B0604030504040204" pitchFamily="34" charset="-120"/>
-              </a:rPr>
-              <a:t>可製造最差餘裕改善 </a:t>
-            </a:r>
-            <a:r>
-              <a:rPr lang="en-US" altLang="zh-TW" b="1">
-                <a:solidFill>
-                  <a:srgbClr val="1C5CAB"/>
-                </a:solidFill>
-                <a:latin typeface="Microsoft JhengHei" panose="020B0604030504040204" pitchFamily="34" charset="-120"/>
-                <a:ea typeface="Microsoft JhengHei" panose="020B0604030504040204" pitchFamily="34" charset="-120"/>
-              </a:rPr>
-              <a:t>3.51 dB</a:t>
-            </a:r>
-            <a:endParaRPr lang="zh-TW" altLang="en-US" b="1">
-              <a:solidFill>
-                <a:srgbClr val="1C5CAB"/>
-              </a:solidFill>
-              <a:latin typeface="Microsoft JhengHei" panose="020B0604030504040204" pitchFamily="34" charset="-120"/>
-              <a:ea typeface="Microsoft JhengHei" panose="020B0604030504040204" pitchFamily="34" charset="-120"/>
-            </a:endParaRPr>
-          </a:p>
-        </p:txBody>
-      </p:sp>
-      <p:sp>
-        <p:nvSpPr>
-          <p:cNvPr id="12" name="文字方塊 11">
-            <a:extLst>
-              <a:ext uri="{FF2B5EF4-FFF2-40B4-BE49-F238E27FC236}">
-                <a16:creationId xmlns:a16="http://schemas.microsoft.com/office/drawing/2014/main" id="{28D0138C-847E-B3D5-F11B-A302D77DB465}"/>
-              </a:ext>
-            </a:extLst>
-          </p:cNvPr>
-          <p:cNvSpPr txBox="1"/>
-          <p:nvPr/>
-        </p:nvSpPr>
-        <p:spPr>
-          <a:xfrm>
-            <a:off x="6426200" y="2857500"/>
-            <a:ext cx="5029200" cy="1605568"/>
-          </a:xfrm>
-          <a:prstGeom prst="rect">
-            <a:avLst/>
-          </a:prstGeom>
-          <a:noFill/>
-        </p:spPr>
-        <p:txBody>
-          <a:bodyPr vert="horz" wrap="square" lIns="0" tIns="0" rIns="0" bIns="0" rtlCol="0">
-            <a:spAutoFit/>
-          </a:bodyPr>
-          <a:lstStyle/>
-          <a:p>
-            <a:pPr>
-              <a:spcAft>
-                <a:spcPts val="200"/>
-              </a:spcAft>
-            </a:pPr>
-            <a:r>
-              <a:rPr lang="en-US" altLang="zh-TW" sz="1600">
-                <a:solidFill>
-                  <a:srgbClr val="0B0B0B"/>
-                </a:solidFill>
-                <a:latin typeface="Microsoft JhengHei" panose="020B0604030504040204" pitchFamily="34" charset="-120"/>
-                <a:ea typeface="Microsoft JhengHei" panose="020B0604030504040204" pitchFamily="34" charset="-120"/>
-              </a:rPr>
-              <a:t>• </a:t>
-            </a:r>
-            <a:r>
-              <a:rPr lang="zh-TW" altLang="en-US" sz="1600">
-                <a:solidFill>
-                  <a:srgbClr val="0B0B0B"/>
-                </a:solidFill>
-                <a:latin typeface="Microsoft JhengHei" panose="020B0604030504040204" pitchFamily="34" charset="-120"/>
-                <a:ea typeface="Microsoft JhengHei" panose="020B0604030504040204" pitchFamily="34" charset="-120"/>
-              </a:rPr>
-              <a:t>建立 </a:t>
-            </a:r>
-            <a:r>
-              <a:rPr lang="en-US" altLang="zh-TW" sz="1600">
-                <a:solidFill>
-                  <a:srgbClr val="0B0B0B"/>
-                </a:solidFill>
-                <a:latin typeface="Microsoft JhengHei" panose="020B0604030504040204" pitchFamily="34" charset="-120"/>
-                <a:ea typeface="Microsoft JhengHei" panose="020B0604030504040204" pitchFamily="34" charset="-120"/>
-              </a:rPr>
-              <a:t>38,972 </a:t>
-            </a:r>
-            <a:r>
-              <a:rPr lang="zh-TW" altLang="en-US" sz="1600">
-                <a:solidFill>
-                  <a:srgbClr val="0B0B0B"/>
-                </a:solidFill>
-                <a:latin typeface="Microsoft JhengHei" panose="020B0604030504040204" pitchFamily="34" charset="-120"/>
-                <a:ea typeface="Microsoft JhengHei" panose="020B0604030504040204" pitchFamily="34" charset="-120"/>
-              </a:rPr>
-              <a:t>筆模擬資料的離線唯讀瀏覽器</a:t>
-            </a:r>
-          </a:p>
-          <a:p>
-            <a:pPr>
-              <a:spcAft>
-                <a:spcPts val="200"/>
-              </a:spcAft>
-            </a:pPr>
-            <a:endParaRPr lang="zh-TW" altLang="en-US" sz="1600">
-              <a:solidFill>
-                <a:srgbClr val="0B0B0B"/>
-              </a:solidFill>
-              <a:latin typeface="Microsoft JhengHei" panose="020B0604030504040204" pitchFamily="34" charset="-120"/>
-              <a:ea typeface="Microsoft JhengHei" panose="020B0604030504040204" pitchFamily="34" charset="-120"/>
-            </a:endParaRPr>
-          </a:p>
-          <a:p>
-            <a:pPr>
-              <a:spcAft>
-                <a:spcPts val="200"/>
-              </a:spcAft>
-            </a:pPr>
-            <a:r>
-              <a:rPr lang="en-US" altLang="zh-TW" sz="1600">
-                <a:solidFill>
-                  <a:srgbClr val="0B0B0B"/>
-                </a:solidFill>
-                <a:latin typeface="Microsoft JhengHei" panose="020B0604030504040204" pitchFamily="34" charset="-120"/>
-                <a:ea typeface="Microsoft JhengHei" panose="020B0604030504040204" pitchFamily="34" charset="-120"/>
-              </a:rPr>
-              <a:t>• 8/11–8/24 </a:t>
-            </a:r>
-            <a:r>
-              <a:rPr lang="zh-TW" altLang="en-US" sz="1600">
-                <a:solidFill>
-                  <a:srgbClr val="0B0B0B"/>
-                </a:solidFill>
-                <a:latin typeface="Microsoft JhengHei" panose="020B0604030504040204" pitchFamily="34" charset="-120"/>
-                <a:ea typeface="Microsoft JhengHei" panose="020B0604030504040204" pitchFamily="34" charset="-120"/>
-              </a:rPr>
-              <a:t>累積 </a:t>
-            </a:r>
-            <a:r>
-              <a:rPr lang="en-US" altLang="zh-TW" sz="1600">
-                <a:solidFill>
-                  <a:srgbClr val="0B0B0B"/>
-                </a:solidFill>
-                <a:latin typeface="Microsoft JhengHei" panose="020B0604030504040204" pitchFamily="34" charset="-120"/>
-                <a:ea typeface="Microsoft JhengHei" panose="020B0604030504040204" pitchFamily="34" charset="-120"/>
-              </a:rPr>
-              <a:t>R57–R79</a:t>
-            </a:r>
-          </a:p>
-          <a:p>
-            <a:pPr>
-              <a:spcAft>
-                <a:spcPts val="200"/>
-              </a:spcAft>
-            </a:pPr>
-            <a:r>
-              <a:rPr lang="en-US" altLang="zh-TW" sz="1600">
-                <a:solidFill>
-                  <a:srgbClr val="0B0B0B"/>
-                </a:solidFill>
-                <a:latin typeface="Microsoft JhengHei" panose="020B0604030504040204" pitchFamily="34" charset="-120"/>
-                <a:ea typeface="Microsoft JhengHei" panose="020B0604030504040204" pitchFamily="34" charset="-120"/>
-              </a:rPr>
-              <a:t>  </a:t>
-            </a:r>
-            <a:r>
-              <a:rPr lang="zh-TW" altLang="en-US" sz="1600">
-                <a:solidFill>
-                  <a:srgbClr val="0B0B0B"/>
-                </a:solidFill>
-                <a:latin typeface="Microsoft JhengHei" panose="020B0604030504040204" pitchFamily="34" charset="-120"/>
-                <a:ea typeface="Microsoft JhengHei" panose="020B0604030504040204" pitchFamily="34" charset="-120"/>
-              </a:rPr>
-              <a:t>共完成 </a:t>
-            </a:r>
-            <a:r>
-              <a:rPr lang="en-US" altLang="zh-TW" sz="1600">
-                <a:solidFill>
-                  <a:srgbClr val="0B0B0B"/>
-                </a:solidFill>
-                <a:latin typeface="Microsoft JhengHei" panose="020B0604030504040204" pitchFamily="34" charset="-120"/>
-                <a:ea typeface="Microsoft JhengHei" panose="020B0604030504040204" pitchFamily="34" charset="-120"/>
-              </a:rPr>
-              <a:t>23 </a:t>
-            </a:r>
-            <a:r>
-              <a:rPr lang="zh-TW" altLang="en-US" sz="1600">
-                <a:solidFill>
-                  <a:srgbClr val="0B0B0B"/>
-                </a:solidFill>
-                <a:latin typeface="Microsoft JhengHei" panose="020B0604030504040204" pitchFamily="34" charset="-120"/>
-                <a:ea typeface="Microsoft JhengHei" panose="020B0604030504040204" pitchFamily="34" charset="-120"/>
-              </a:rPr>
-              <a:t>輪</a:t>
-            </a:r>
-          </a:p>
-          <a:p>
-            <a:pPr>
-              <a:spcAft>
-                <a:spcPts val="200"/>
-              </a:spcAft>
-            </a:pPr>
-            <a:endParaRPr lang="zh-TW" altLang="en-US" sz="1600">
-              <a:solidFill>
-                <a:srgbClr val="0B0B0B"/>
-              </a:solidFill>
-              <a:latin typeface="Microsoft JhengHei" panose="020B0604030504040204" pitchFamily="34" charset="-120"/>
-              <a:ea typeface="Microsoft JhengHei" panose="020B0604030504040204" pitchFamily="34" charset="-120"/>
-            </a:endParaRPr>
-          </a:p>
-          <a:p>
-            <a:pPr>
-              <a:spcAft>
-                <a:spcPts val="200"/>
-              </a:spcAft>
-            </a:pPr>
-            <a:r>
-              <a:rPr lang="en-US" altLang="zh-TW" sz="1600">
-                <a:solidFill>
-                  <a:srgbClr val="0B0B0B"/>
-                </a:solidFill>
-                <a:latin typeface="Microsoft JhengHei" panose="020B0604030504040204" pitchFamily="34" charset="-120"/>
-                <a:ea typeface="Microsoft JhengHei" panose="020B0604030504040204" pitchFamily="34" charset="-120"/>
-              </a:rPr>
-              <a:t>• </a:t>
-            </a:r>
-            <a:r>
-              <a:rPr lang="zh-TW" altLang="en-US" sz="1600">
-                <a:solidFill>
-                  <a:srgbClr val="0B0B0B"/>
-                </a:solidFill>
-                <a:latin typeface="Microsoft JhengHei" panose="020B0604030504040204" pitchFamily="34" charset="-120"/>
-                <a:ea typeface="Microsoft JhengHei" panose="020B0604030504040204" pitchFamily="34" charset="-120"/>
-              </a:rPr>
-              <a:t>期間 </a:t>
-            </a:r>
-            <a:r>
-              <a:rPr lang="en-US" altLang="zh-TW" sz="1600">
-                <a:solidFill>
-                  <a:srgbClr val="0B0B0B"/>
-                </a:solidFill>
-                <a:latin typeface="Microsoft JhengHei" panose="020B0604030504040204" pitchFamily="34" charset="-120"/>
-                <a:ea typeface="Microsoft JhengHei" panose="020B0604030504040204" pitchFamily="34" charset="-120"/>
-              </a:rPr>
-              <a:t>17 </a:t>
-            </a:r>
-            <a:r>
-              <a:rPr lang="zh-TW" altLang="en-US" sz="1600">
-                <a:solidFill>
-                  <a:srgbClr val="0B0B0B"/>
-                </a:solidFill>
-                <a:latin typeface="Microsoft JhengHei" panose="020B0604030504040204" pitchFamily="34" charset="-120"/>
-                <a:ea typeface="Microsoft JhengHei" panose="020B0604030504040204" pitchFamily="34" charset="-120"/>
-              </a:rPr>
-              <a:t>次刷新紀錄</a:t>
-            </a:r>
-          </a:p>
-        </p:txBody>
-      </p:sp>
-      <p:sp>
-        <p:nvSpPr>
-          <p:cNvPr id="13" name="矩形 12">
-            <a:extLst>
-              <a:ext uri="{FF2B5EF4-FFF2-40B4-BE49-F238E27FC236}">
-                <a16:creationId xmlns:a16="http://schemas.microsoft.com/office/drawing/2014/main" id="{B3CCF6C1-F683-9C82-EE5F-1E2F02E328EC}"/>
+                <a16:creationId xmlns:a16="http://schemas.microsoft.com/office/drawing/2014/main" id="{D77A8403-95CE-8F9A-7FE3-C785F70FF98E}"/>
               </a:ext>
             </a:extLst>
           </p:cNvPr>
@@ -14736,26 +15083,21 @@
         </p:nvSpPr>
         <p:spPr>
           <a:xfrm>
-            <a:off x="0" y="5791200"/>
-            <a:ext cx="12192000" cy="1066800"/>
+            <a:off x="533400" y="2108200"/>
+            <a:ext cx="2438400" cy="1092200"/>
           </a:xfrm>
           <a:prstGeom prst="rect">
             <a:avLst/>
           </a:prstGeom>
           <a:solidFill>
-            <a:srgbClr val="EEF2F8"/>
+            <a:srgbClr val="EEF4F8"/>
           </a:solidFill>
-          <a:ln w="9525" cap="flat" cmpd="sng" algn="ctr">
-            <a:noFill/>
-            <a:prstDash val="solid"/>
-          </a:ln>
-          <a:effectLst>
-            <a:outerShdw blurRad="40000" dist="23000" dir="5400000" rotWithShape="0">
-              <a:srgbClr val="000000">
-                <a:alpha val="35000"/>
-              </a:srgbClr>
-            </a:outerShdw>
-          </a:effectLst>
+          <a:ln w="12700">
+            <a:solidFill>
+              <a:srgbClr val="A6BBCD"/>
+            </a:solidFill>
+          </a:ln>
+          <a:effectLst/>
         </p:spPr>
         <p:style>
           <a:lnRef idx="1">
@@ -14782,10 +15124,10 @@
       </p:sp>
       <p:sp>
         <p:nvSpPr>
-          <p:cNvPr id="14" name="文字方塊 13">
+          <p:cNvPr id="7" name="文字方塊 6">
             <a:extLst>
               <a:ext uri="{FF2B5EF4-FFF2-40B4-BE49-F238E27FC236}">
-                <a16:creationId xmlns:a16="http://schemas.microsoft.com/office/drawing/2014/main" id="{C6EE585D-8678-FEB9-0359-5306D7321BEE}"/>
+                <a16:creationId xmlns:a16="http://schemas.microsoft.com/office/drawing/2014/main" id="{808E4DC0-A9A5-4DDA-7000-F1C575BBA3CD}"/>
               </a:ext>
             </a:extLst>
           </p:cNvPr>
@@ -14794,8 +15136,8 @@
         </p:nvSpPr>
         <p:spPr>
           <a:xfrm>
-            <a:off x="431800" y="5943600"/>
-            <a:ext cx="11328400" cy="215444"/>
+            <a:off x="660400" y="2336799"/>
+            <a:ext cx="2184400" cy="711200"/>
           </a:xfrm>
           <a:prstGeom prst="rect">
             <a:avLst/>
@@ -14804,30 +15146,94 @@
         </p:spPr>
         <p:txBody>
           <a:bodyPr vert="horz" wrap="square" lIns="0" tIns="0" rIns="0" bIns="0" rtlCol="0">
-            <a:spAutoFit/>
+            <a:noAutofit/>
           </a:bodyPr>
           <a:lstStyle/>
           <a:p>
             <a:pPr algn="ctr"/>
             <a:r>
-              <a:rPr lang="zh-TW" altLang="en-US" sz="1400" b="1">
-                <a:solidFill>
-                  <a:srgbClr val="0B0B0B"/>
+              <a:rPr lang="en-US" altLang="zh-TW" sz="1900" b="1">
+                <a:solidFill>
+                  <a:srgbClr val="245B85"/>
                 </a:solidFill>
                 <a:latin typeface="Microsoft JhengHei" panose="020B0604030504040204" pitchFamily="34" charset="-120"/>
                 <a:ea typeface="Microsoft JhengHei" panose="020B0604030504040204" pitchFamily="34" charset="-120"/>
               </a:rPr>
-              <a:t>各月報告當時的成果口徑，九月最新狀態與限制以前文為準</a:t>
-            </a:r>
-          </a:p>
-        </p:txBody>
-      </p:sp>
-      <p:sp>
-        <p:nvSpPr>
-          <p:cNvPr id="15" name="文字方塊 14">
+              <a:t>Agent </a:t>
+            </a:r>
+            <a:r>
+              <a:rPr lang="zh-TW" altLang="en-US" sz="1900" b="1">
+                <a:solidFill>
+                  <a:srgbClr val="245B85"/>
+                </a:solidFill>
+                <a:latin typeface="Microsoft JhengHei" panose="020B0604030504040204" pitchFamily="34" charset="-120"/>
+                <a:ea typeface="Microsoft JhengHei" panose="020B0604030504040204" pitchFamily="34" charset="-120"/>
+              </a:rPr>
+              <a:t>決策
+提出下一輪假設</a:t>
+            </a:r>
+          </a:p>
+        </p:txBody>
+      </p:sp>
+      <p:sp>
+        <p:nvSpPr>
+          <p:cNvPr id="8" name="矩形 7">
             <a:extLst>
               <a:ext uri="{FF2B5EF4-FFF2-40B4-BE49-F238E27FC236}">
-                <a16:creationId xmlns:a16="http://schemas.microsoft.com/office/drawing/2014/main" id="{E2E35814-8821-D3FC-74B9-91820B8C467B}"/>
+                <a16:creationId xmlns:a16="http://schemas.microsoft.com/office/drawing/2014/main" id="{996F6E4F-9238-A157-DDA3-1F3B2C7CD230}"/>
+              </a:ext>
+            </a:extLst>
+          </p:cNvPr>
+          <p:cNvSpPr/>
+          <p:nvPr/>
+        </p:nvSpPr>
+        <p:spPr>
+          <a:xfrm>
+            <a:off x="3429000" y="2108200"/>
+            <a:ext cx="2438400" cy="1092200"/>
+          </a:xfrm>
+          <a:prstGeom prst="rect">
+            <a:avLst/>
+          </a:prstGeom>
+          <a:solidFill>
+            <a:srgbClr val="EEF4F8"/>
+          </a:solidFill>
+          <a:ln w="12700">
+            <a:solidFill>
+              <a:srgbClr val="A6BBCD"/>
+            </a:solidFill>
+          </a:ln>
+          <a:effectLst/>
+        </p:spPr>
+        <p:style>
+          <a:lnRef idx="1">
+            <a:schemeClr val="accent1"/>
+          </a:lnRef>
+          <a:fillRef idx="3">
+            <a:schemeClr val="accent1"/>
+          </a:fillRef>
+          <a:effectRef idx="2">
+            <a:schemeClr val="accent1"/>
+          </a:effectRef>
+          <a:fontRef idx="minor">
+            <a:schemeClr val="lt1"/>
+          </a:fontRef>
+        </p:style>
+        <p:txBody>
+          <a:bodyPr rtlCol="0" anchor="ctr"/>
+          <a:lstStyle/>
+          <a:p>
+            <a:pPr algn="ctr"/>
+            <a:endParaRPr lang="zh-TW" altLang="en-US"/>
+          </a:p>
+        </p:txBody>
+      </p:sp>
+      <p:sp>
+        <p:nvSpPr>
+          <p:cNvPr id="9" name="文字方塊 8">
+            <a:extLst>
+              <a:ext uri="{FF2B5EF4-FFF2-40B4-BE49-F238E27FC236}">
+                <a16:creationId xmlns:a16="http://schemas.microsoft.com/office/drawing/2014/main" id="{FC7194E9-379D-8FEE-D6CB-FC40DB5B8BCC}"/>
               </a:ext>
             </a:extLst>
           </p:cNvPr>
@@ -14836,8 +15242,8 @@
         </p:nvSpPr>
         <p:spPr>
           <a:xfrm>
-            <a:off x="431800" y="6362700"/>
-            <a:ext cx="11023600" cy="161583"/>
+            <a:off x="3556000" y="2336799"/>
+            <a:ext cx="2184400" cy="711200"/>
           </a:xfrm>
           <a:prstGeom prst="rect">
             <a:avLst/>
@@ -14846,94 +15252,709 @@
         </p:spPr>
         <p:txBody>
           <a:bodyPr vert="horz" wrap="square" lIns="0" tIns="0" rIns="0" bIns="0" rtlCol="0">
-            <a:spAutoFit/>
+            <a:noAutofit/>
           </a:bodyPr>
           <a:lstStyle/>
           <a:p>
             <a:pPr algn="ctr"/>
             <a:r>
-              <a:rPr lang="zh-TW" altLang="en-US" sz="1050">
-                <a:solidFill>
-                  <a:srgbClr val="52514E"/>
+              <a:rPr lang="zh-TW" altLang="en-US" sz="1900" b="1">
+                <a:solidFill>
+                  <a:srgbClr val="245B85"/>
                 </a:solidFill>
                 <a:latin typeface="Microsoft JhengHei" panose="020B0604030504040204" pitchFamily="34" charset="-120"/>
                 <a:ea typeface="Microsoft JhengHei" panose="020B0604030504040204" pitchFamily="34" charset="-120"/>
               </a:rPr>
-              <a:t>來源：</a:t>
-            </a:r>
-            <a:r>
-              <a:rPr lang="en-US" altLang="zh-TW" sz="1050">
-                <a:solidFill>
-                  <a:srgbClr val="52514E"/>
+              <a:t>工具箱
+產生候選圖樣</a:t>
+            </a:r>
+          </a:p>
+        </p:txBody>
+      </p:sp>
+      <p:sp>
+        <p:nvSpPr>
+          <p:cNvPr id="10" name="矩形 9">
+            <a:extLst>
+              <a:ext uri="{FF2B5EF4-FFF2-40B4-BE49-F238E27FC236}">
+                <a16:creationId xmlns:a16="http://schemas.microsoft.com/office/drawing/2014/main" id="{4AFB7D08-F2E7-52BC-94B6-52E79B22EA04}"/>
+              </a:ext>
+            </a:extLst>
+          </p:cNvPr>
+          <p:cNvSpPr/>
+          <p:nvPr/>
+        </p:nvSpPr>
+        <p:spPr>
+          <a:xfrm>
+            <a:off x="6324600" y="2108200"/>
+            <a:ext cx="2438400" cy="1092200"/>
+          </a:xfrm>
+          <a:prstGeom prst="rect">
+            <a:avLst/>
+          </a:prstGeom>
+          <a:solidFill>
+            <a:srgbClr val="EEF4F8"/>
+          </a:solidFill>
+          <a:ln w="12700">
+            <a:solidFill>
+              <a:srgbClr val="A6BBCD"/>
+            </a:solidFill>
+          </a:ln>
+          <a:effectLst/>
+        </p:spPr>
+        <p:style>
+          <a:lnRef idx="1">
+            <a:schemeClr val="accent1"/>
+          </a:lnRef>
+          <a:fillRef idx="3">
+            <a:schemeClr val="accent1"/>
+          </a:fillRef>
+          <a:effectRef idx="2">
+            <a:schemeClr val="accent1"/>
+          </a:effectRef>
+          <a:fontRef idx="minor">
+            <a:schemeClr val="lt1"/>
+          </a:fontRef>
+        </p:style>
+        <p:txBody>
+          <a:bodyPr rtlCol="0" anchor="ctr"/>
+          <a:lstStyle/>
+          <a:p>
+            <a:pPr algn="ctr"/>
+            <a:endParaRPr lang="zh-TW" altLang="en-US"/>
+          </a:p>
+        </p:txBody>
+      </p:sp>
+      <p:sp>
+        <p:nvSpPr>
+          <p:cNvPr id="11" name="文字方塊 10">
+            <a:extLst>
+              <a:ext uri="{FF2B5EF4-FFF2-40B4-BE49-F238E27FC236}">
+                <a16:creationId xmlns:a16="http://schemas.microsoft.com/office/drawing/2014/main" id="{F4688290-D2F9-598B-544F-C55A1B4EC786}"/>
+              </a:ext>
+            </a:extLst>
+          </p:cNvPr>
+          <p:cNvSpPr txBox="1"/>
+          <p:nvPr/>
+        </p:nvSpPr>
+        <p:spPr>
+          <a:xfrm>
+            <a:off x="6451600" y="2336799"/>
+            <a:ext cx="2184400" cy="711200"/>
+          </a:xfrm>
+          <a:prstGeom prst="rect">
+            <a:avLst/>
+          </a:prstGeom>
+          <a:noFill/>
+        </p:spPr>
+        <p:txBody>
+          <a:bodyPr vert="horz" wrap="square" lIns="0" tIns="0" rIns="0" bIns="0" rtlCol="0">
+            <a:noAutofit/>
+          </a:bodyPr>
+          <a:lstStyle/>
+          <a:p>
+            <a:pPr algn="ctr"/>
+            <a:r>
+              <a:rPr lang="en-US" altLang="zh-TW" sz="1900" b="1">
+                <a:solidFill>
+                  <a:srgbClr val="245B85"/>
                 </a:solidFill>
                 <a:latin typeface="Microsoft JhengHei" panose="020B0604030504040204" pitchFamily="34" charset="-120"/>
                 <a:ea typeface="Microsoft JhengHei" panose="020B0604030504040204" pitchFamily="34" charset="-120"/>
               </a:rPr>
-              <a:t>07</a:t>
-            </a:r>
-            <a:r>
-              <a:rPr lang="zh-TW" altLang="en-US" sz="1050">
-                <a:solidFill>
-                  <a:srgbClr val="52514E"/>
+              <a:t>HFSS
+</a:t>
+            </a:r>
+            <a:r>
+              <a:rPr lang="zh-TW" altLang="en-US" sz="1900" b="1">
+                <a:solidFill>
+                  <a:srgbClr val="245B85"/>
                 </a:solidFill>
                 <a:latin typeface="Microsoft JhengHei" panose="020B0604030504040204" pitchFamily="34" charset="-120"/>
                 <a:ea typeface="Microsoft JhengHei" panose="020B0604030504040204" pitchFamily="34" charset="-120"/>
               </a:rPr>
-              <a:t>月／進度報告</a:t>
-            </a:r>
-            <a:r>
-              <a:rPr lang="en-US" altLang="zh-TW" sz="1050">
-                <a:solidFill>
-                  <a:srgbClr val="52514E"/>
+              <a:t>批次驗證真值</a:t>
+            </a:r>
+          </a:p>
+        </p:txBody>
+      </p:sp>
+      <p:sp>
+        <p:nvSpPr>
+          <p:cNvPr id="12" name="矩形 11">
+            <a:extLst>
+              <a:ext uri="{FF2B5EF4-FFF2-40B4-BE49-F238E27FC236}">
+                <a16:creationId xmlns:a16="http://schemas.microsoft.com/office/drawing/2014/main" id="{449F7C8D-AF55-34BF-847F-4FBC39475D2E}"/>
+              </a:ext>
+            </a:extLst>
+          </p:cNvPr>
+          <p:cNvSpPr/>
+          <p:nvPr/>
+        </p:nvSpPr>
+        <p:spPr>
+          <a:xfrm>
+            <a:off x="9220200" y="2108200"/>
+            <a:ext cx="2438400" cy="1092200"/>
+          </a:xfrm>
+          <a:prstGeom prst="rect">
+            <a:avLst/>
+          </a:prstGeom>
+          <a:solidFill>
+            <a:srgbClr val="EEF4F8"/>
+          </a:solidFill>
+          <a:ln w="12700">
+            <a:solidFill>
+              <a:srgbClr val="A6BBCD"/>
+            </a:solidFill>
+          </a:ln>
+          <a:effectLst/>
+        </p:spPr>
+        <p:style>
+          <a:lnRef idx="1">
+            <a:schemeClr val="accent1"/>
+          </a:lnRef>
+          <a:fillRef idx="3">
+            <a:schemeClr val="accent1"/>
+          </a:fillRef>
+          <a:effectRef idx="2">
+            <a:schemeClr val="accent1"/>
+          </a:effectRef>
+          <a:fontRef idx="minor">
+            <a:schemeClr val="lt1"/>
+          </a:fontRef>
+        </p:style>
+        <p:txBody>
+          <a:bodyPr rtlCol="0" anchor="ctr"/>
+          <a:lstStyle/>
+          <a:p>
+            <a:pPr algn="ctr"/>
+            <a:endParaRPr lang="zh-TW" altLang="en-US"/>
+          </a:p>
+        </p:txBody>
+      </p:sp>
+      <p:sp>
+        <p:nvSpPr>
+          <p:cNvPr id="13" name="文字方塊 12">
+            <a:extLst>
+              <a:ext uri="{FF2B5EF4-FFF2-40B4-BE49-F238E27FC236}">
+                <a16:creationId xmlns:a16="http://schemas.microsoft.com/office/drawing/2014/main" id="{E719F4FE-7F8D-DA45-8894-D33146171B96}"/>
+              </a:ext>
+            </a:extLst>
+          </p:cNvPr>
+          <p:cNvSpPr txBox="1"/>
+          <p:nvPr/>
+        </p:nvSpPr>
+        <p:spPr>
+          <a:xfrm>
+            <a:off x="9347200" y="2336799"/>
+            <a:ext cx="2184400" cy="711200"/>
+          </a:xfrm>
+          <a:prstGeom prst="rect">
+            <a:avLst/>
+          </a:prstGeom>
+          <a:noFill/>
+        </p:spPr>
+        <p:txBody>
+          <a:bodyPr vert="horz" wrap="square" lIns="0" tIns="0" rIns="0" bIns="0" rtlCol="0">
+            <a:noAutofit/>
+          </a:bodyPr>
+          <a:lstStyle/>
+          <a:p>
+            <a:pPr algn="ctr"/>
+            <a:r>
+              <a:rPr lang="zh-TW" altLang="en-US" sz="1900" b="1">
+                <a:solidFill>
+                  <a:srgbClr val="245B85"/>
                 </a:solidFill>
                 <a:latin typeface="Microsoft JhengHei" panose="020B0604030504040204" pitchFamily="34" charset="-120"/>
                 <a:ea typeface="Microsoft JhengHei" panose="020B0604030504040204" pitchFamily="34" charset="-120"/>
               </a:rPr>
-              <a:t>_2026-07.md</a:t>
-            </a:r>
-            <a:r>
-              <a:rPr lang="zh-TW" altLang="en-US" sz="1050">
-                <a:solidFill>
-                  <a:srgbClr val="52514E"/>
+              <a:t>資料池與分析
+回饋研究判斷</a:t>
+            </a:r>
+          </a:p>
+        </p:txBody>
+      </p:sp>
+      <p:cxnSp>
+        <p:nvCxnSpPr>
+          <p:cNvPr id="14" name="直線接點 13">
+            <a:extLst>
+              <a:ext uri="{FF2B5EF4-FFF2-40B4-BE49-F238E27FC236}">
+                <a16:creationId xmlns:a16="http://schemas.microsoft.com/office/drawing/2014/main" id="{AF3B897C-8FF5-00BE-BD63-1B7C02A4C753}"/>
+              </a:ext>
+            </a:extLst>
+          </p:cNvPr>
+          <p:cNvCxnSpPr/>
+          <p:nvPr/>
+        </p:nvCxnSpPr>
+        <p:spPr>
+          <a:xfrm>
+            <a:off x="3022600" y="2654300"/>
+            <a:ext cx="355600" cy="0"/>
+          </a:xfrm>
+          <a:prstGeom prst="line">
+            <a:avLst/>
+          </a:prstGeom>
+          <a:ln w="19050">
+            <a:solidFill>
+              <a:srgbClr val="245B85"/>
+            </a:solidFill>
+            <a:tailEnd type="arrow"/>
+          </a:ln>
+          <a:effectLst/>
+          <a:extLst>
+            <a:ext uri="{AF507438-7753-43E0-B8FC-AC1667EBCBE1}">
+              <a14:hiddenEffects xmlns:a14="http://schemas.microsoft.com/office/drawing/2010/main">
+                <a:effectLst>
+                  <a:outerShdw blurRad="40000" dist="20000" dir="5400000" rotWithShape="0">
+                    <a:srgbClr val="000000">
+                      <a:alpha val="38000"/>
+                    </a:srgbClr>
+                  </a:outerShdw>
+                </a:effectLst>
+              </a14:hiddenEffects>
+            </a:ext>
+          </a:extLst>
+        </p:spPr>
+        <p:style>
+          <a:lnRef idx="2">
+            <a:schemeClr val="accent1"/>
+          </a:lnRef>
+          <a:fillRef idx="0">
+            <a:schemeClr val="accent1"/>
+          </a:fillRef>
+          <a:effectRef idx="1">
+            <a:schemeClr val="accent1"/>
+          </a:effectRef>
+          <a:fontRef idx="minor">
+            <a:schemeClr val="tx1"/>
+          </a:fontRef>
+        </p:style>
+      </p:cxnSp>
+      <p:cxnSp>
+        <p:nvCxnSpPr>
+          <p:cNvPr id="15" name="直線接點 14">
+            <a:extLst>
+              <a:ext uri="{FF2B5EF4-FFF2-40B4-BE49-F238E27FC236}">
+                <a16:creationId xmlns:a16="http://schemas.microsoft.com/office/drawing/2014/main" id="{09D3BE66-7634-0EC2-9608-E34671265F7D}"/>
+              </a:ext>
+            </a:extLst>
+          </p:cNvPr>
+          <p:cNvCxnSpPr/>
+          <p:nvPr/>
+        </p:nvCxnSpPr>
+        <p:spPr>
+          <a:xfrm>
+            <a:off x="5918200" y="2654300"/>
+            <a:ext cx="355600" cy="0"/>
+          </a:xfrm>
+          <a:prstGeom prst="line">
+            <a:avLst/>
+          </a:prstGeom>
+          <a:ln w="19050">
+            <a:solidFill>
+              <a:srgbClr val="245B85"/>
+            </a:solidFill>
+            <a:tailEnd type="arrow"/>
+          </a:ln>
+          <a:effectLst/>
+          <a:extLst>
+            <a:ext uri="{AF507438-7753-43E0-B8FC-AC1667EBCBE1}">
+              <a14:hiddenEffects xmlns:a14="http://schemas.microsoft.com/office/drawing/2010/main">
+                <a:effectLst>
+                  <a:outerShdw blurRad="40000" dist="20000" dir="5400000" rotWithShape="0">
+                    <a:srgbClr val="000000">
+                      <a:alpha val="38000"/>
+                    </a:srgbClr>
+                  </a:outerShdw>
+                </a:effectLst>
+              </a14:hiddenEffects>
+            </a:ext>
+          </a:extLst>
+        </p:spPr>
+        <p:style>
+          <a:lnRef idx="2">
+            <a:schemeClr val="accent1"/>
+          </a:lnRef>
+          <a:fillRef idx="0">
+            <a:schemeClr val="accent1"/>
+          </a:fillRef>
+          <a:effectRef idx="1">
+            <a:schemeClr val="accent1"/>
+          </a:effectRef>
+          <a:fontRef idx="minor">
+            <a:schemeClr val="tx1"/>
+          </a:fontRef>
+        </p:style>
+      </p:cxnSp>
+      <p:cxnSp>
+        <p:nvCxnSpPr>
+          <p:cNvPr id="16" name="直線接點 15">
+            <a:extLst>
+              <a:ext uri="{FF2B5EF4-FFF2-40B4-BE49-F238E27FC236}">
+                <a16:creationId xmlns:a16="http://schemas.microsoft.com/office/drawing/2014/main" id="{0CD1F204-ADF7-EE55-4598-5D3DF41B58CA}"/>
+              </a:ext>
+            </a:extLst>
+          </p:cNvPr>
+          <p:cNvCxnSpPr/>
+          <p:nvPr/>
+        </p:nvCxnSpPr>
+        <p:spPr>
+          <a:xfrm>
+            <a:off x="8813800" y="2654300"/>
+            <a:ext cx="355600" cy="0"/>
+          </a:xfrm>
+          <a:prstGeom prst="line">
+            <a:avLst/>
+          </a:prstGeom>
+          <a:ln w="19050">
+            <a:solidFill>
+              <a:srgbClr val="245B85"/>
+            </a:solidFill>
+            <a:tailEnd type="arrow"/>
+          </a:ln>
+          <a:effectLst/>
+          <a:extLst>
+            <a:ext uri="{AF507438-7753-43E0-B8FC-AC1667EBCBE1}">
+              <a14:hiddenEffects xmlns:a14="http://schemas.microsoft.com/office/drawing/2010/main">
+                <a:effectLst>
+                  <a:outerShdw blurRad="40000" dist="20000" dir="5400000" rotWithShape="0">
+                    <a:srgbClr val="000000">
+                      <a:alpha val="38000"/>
+                    </a:srgbClr>
+                  </a:outerShdw>
+                </a:effectLst>
+              </a14:hiddenEffects>
+            </a:ext>
+          </a:extLst>
+        </p:spPr>
+        <p:style>
+          <a:lnRef idx="2">
+            <a:schemeClr val="accent1"/>
+          </a:lnRef>
+          <a:fillRef idx="0">
+            <a:schemeClr val="accent1"/>
+          </a:fillRef>
+          <a:effectRef idx="1">
+            <a:schemeClr val="accent1"/>
+          </a:effectRef>
+          <a:fontRef idx="minor">
+            <a:schemeClr val="tx1"/>
+          </a:fontRef>
+        </p:style>
+      </p:cxnSp>
+      <p:cxnSp>
+        <p:nvCxnSpPr>
+          <p:cNvPr id="17" name="直線接點 16">
+            <a:extLst>
+              <a:ext uri="{FF2B5EF4-FFF2-40B4-BE49-F238E27FC236}">
+                <a16:creationId xmlns:a16="http://schemas.microsoft.com/office/drawing/2014/main" id="{D7D47DDC-94FB-6FAA-1FEF-89E37990C333}"/>
+              </a:ext>
+            </a:extLst>
+          </p:cNvPr>
+          <p:cNvCxnSpPr/>
+          <p:nvPr/>
+        </p:nvCxnSpPr>
+        <p:spPr>
+          <a:xfrm>
+            <a:off x="10439400" y="3200400"/>
+            <a:ext cx="0" cy="419100"/>
+          </a:xfrm>
+          <a:prstGeom prst="line">
+            <a:avLst/>
+          </a:prstGeom>
+          <a:ln w="19050">
+            <a:solidFill>
+              <a:srgbClr val="245B85"/>
+            </a:solidFill>
+          </a:ln>
+          <a:effectLst/>
+          <a:extLst>
+            <a:ext uri="{AF507438-7753-43E0-B8FC-AC1667EBCBE1}">
+              <a14:hiddenEffects xmlns:a14="http://schemas.microsoft.com/office/drawing/2010/main">
+                <a:effectLst>
+                  <a:outerShdw blurRad="40000" dist="20000" dir="5400000" rotWithShape="0">
+                    <a:srgbClr val="000000">
+                      <a:alpha val="38000"/>
+                    </a:srgbClr>
+                  </a:outerShdw>
+                </a:effectLst>
+              </a14:hiddenEffects>
+            </a:ext>
+          </a:extLst>
+        </p:spPr>
+        <p:style>
+          <a:lnRef idx="2">
+            <a:schemeClr val="accent1"/>
+          </a:lnRef>
+          <a:fillRef idx="0">
+            <a:schemeClr val="accent1"/>
+          </a:fillRef>
+          <a:effectRef idx="1">
+            <a:schemeClr val="accent1"/>
+          </a:effectRef>
+          <a:fontRef idx="minor">
+            <a:schemeClr val="tx1"/>
+          </a:fontRef>
+        </p:style>
+      </p:cxnSp>
+      <p:cxnSp>
+        <p:nvCxnSpPr>
+          <p:cNvPr id="18" name="直線接點 17">
+            <a:extLst>
+              <a:ext uri="{FF2B5EF4-FFF2-40B4-BE49-F238E27FC236}">
+                <a16:creationId xmlns:a16="http://schemas.microsoft.com/office/drawing/2014/main" id="{F007E55A-C4FC-1FB6-EC48-393C79B7ABE5}"/>
+              </a:ext>
+            </a:extLst>
+          </p:cNvPr>
+          <p:cNvCxnSpPr/>
+          <p:nvPr/>
+        </p:nvCxnSpPr>
+        <p:spPr>
+          <a:xfrm flipH="1">
+            <a:off x="1752600" y="3619500"/>
+            <a:ext cx="8686800" cy="0"/>
+          </a:xfrm>
+          <a:prstGeom prst="line">
+            <a:avLst/>
+          </a:prstGeom>
+          <a:ln w="19050">
+            <a:solidFill>
+              <a:srgbClr val="245B85"/>
+            </a:solidFill>
+          </a:ln>
+          <a:effectLst/>
+          <a:extLst>
+            <a:ext uri="{AF507438-7753-43E0-B8FC-AC1667EBCBE1}">
+              <a14:hiddenEffects xmlns:a14="http://schemas.microsoft.com/office/drawing/2010/main">
+                <a:effectLst>
+                  <a:outerShdw blurRad="40000" dist="20000" dir="5400000" rotWithShape="0">
+                    <a:srgbClr val="000000">
+                      <a:alpha val="38000"/>
+                    </a:srgbClr>
+                  </a:outerShdw>
+                </a:effectLst>
+              </a14:hiddenEffects>
+            </a:ext>
+          </a:extLst>
+        </p:spPr>
+        <p:style>
+          <a:lnRef idx="2">
+            <a:schemeClr val="accent1"/>
+          </a:lnRef>
+          <a:fillRef idx="0">
+            <a:schemeClr val="accent1"/>
+          </a:fillRef>
+          <a:effectRef idx="1">
+            <a:schemeClr val="accent1"/>
+          </a:effectRef>
+          <a:fontRef idx="minor">
+            <a:schemeClr val="tx1"/>
+          </a:fontRef>
+        </p:style>
+      </p:cxnSp>
+      <p:cxnSp>
+        <p:nvCxnSpPr>
+          <p:cNvPr id="19" name="直線接點 18">
+            <a:extLst>
+              <a:ext uri="{FF2B5EF4-FFF2-40B4-BE49-F238E27FC236}">
+                <a16:creationId xmlns:a16="http://schemas.microsoft.com/office/drawing/2014/main" id="{E612A429-804F-6DA4-4674-C10105CB8A55}"/>
+              </a:ext>
+            </a:extLst>
+          </p:cNvPr>
+          <p:cNvCxnSpPr/>
+          <p:nvPr/>
+        </p:nvCxnSpPr>
+        <p:spPr>
+          <a:xfrm flipV="1">
+            <a:off x="1752600" y="3200400"/>
+            <a:ext cx="0" cy="419100"/>
+          </a:xfrm>
+          <a:prstGeom prst="line">
+            <a:avLst/>
+          </a:prstGeom>
+          <a:ln w="19050">
+            <a:solidFill>
+              <a:srgbClr val="245B85"/>
+            </a:solidFill>
+            <a:tailEnd type="arrow"/>
+          </a:ln>
+          <a:effectLst/>
+          <a:extLst>
+            <a:ext uri="{AF507438-7753-43E0-B8FC-AC1667EBCBE1}">
+              <a14:hiddenEffects xmlns:a14="http://schemas.microsoft.com/office/drawing/2010/main">
+                <a:effectLst>
+                  <a:outerShdw blurRad="40000" dist="20000" dir="5400000" rotWithShape="0">
+                    <a:srgbClr val="000000">
+                      <a:alpha val="38000"/>
+                    </a:srgbClr>
+                  </a:outerShdw>
+                </a:effectLst>
+              </a14:hiddenEffects>
+            </a:ext>
+          </a:extLst>
+        </p:spPr>
+        <p:style>
+          <a:lnRef idx="2">
+            <a:schemeClr val="accent1"/>
+          </a:lnRef>
+          <a:fillRef idx="0">
+            <a:schemeClr val="accent1"/>
+          </a:fillRef>
+          <a:effectRef idx="1">
+            <a:schemeClr val="accent1"/>
+          </a:effectRef>
+          <a:fontRef idx="minor">
+            <a:schemeClr val="tx1"/>
+          </a:fontRef>
+        </p:style>
+      </p:cxnSp>
+      <p:sp>
+        <p:nvSpPr>
+          <p:cNvPr id="20" name="文字方塊 19">
+            <a:extLst>
+              <a:ext uri="{FF2B5EF4-FFF2-40B4-BE49-F238E27FC236}">
+                <a16:creationId xmlns:a16="http://schemas.microsoft.com/office/drawing/2014/main" id="{1BB74519-6B84-052E-2EB0-28FC1300F08C}"/>
+              </a:ext>
+            </a:extLst>
+          </p:cNvPr>
+          <p:cNvSpPr txBox="1"/>
+          <p:nvPr/>
+        </p:nvSpPr>
+        <p:spPr>
+          <a:xfrm>
+            <a:off x="2717800" y="3835399"/>
+            <a:ext cx="7239000" cy="368300"/>
+          </a:xfrm>
+          <a:prstGeom prst="rect">
+            <a:avLst/>
+          </a:prstGeom>
+          <a:noFill/>
+        </p:spPr>
+        <p:txBody>
+          <a:bodyPr vert="horz" wrap="square" lIns="0" tIns="0" rIns="0" bIns="0" rtlCol="0">
+            <a:noAutofit/>
+          </a:bodyPr>
+          <a:lstStyle/>
+          <a:p>
+            <a:pPr algn="ctr"/>
+            <a:r>
+              <a:rPr lang="zh-TW" altLang="en-US" sz="1600">
+                <a:solidFill>
+                  <a:srgbClr val="526A7D"/>
                 </a:solidFill>
                 <a:latin typeface="Microsoft JhengHei" panose="020B0604030504040204" pitchFamily="34" charset="-120"/>
                 <a:ea typeface="Microsoft JhengHei" panose="020B0604030504040204" pitchFamily="34" charset="-120"/>
               </a:rPr>
-              <a:t>；</a:t>
-            </a:r>
-            <a:r>
-              <a:rPr lang="en-US" altLang="zh-TW" sz="1050">
-                <a:solidFill>
-                  <a:srgbClr val="52514E"/>
+              <a:t>代理模型在事後批次重錨，分析結果用於下一輪決策</a:t>
+            </a:r>
+          </a:p>
+        </p:txBody>
+      </p:sp>
+      <p:cxnSp>
+        <p:nvCxnSpPr>
+          <p:cNvPr id="21" name="直線接點 20">
+            <a:extLst>
+              <a:ext uri="{FF2B5EF4-FFF2-40B4-BE49-F238E27FC236}">
+                <a16:creationId xmlns:a16="http://schemas.microsoft.com/office/drawing/2014/main" id="{A175941A-F604-9A27-EA76-E3926F2627CF}"/>
+              </a:ext>
+            </a:extLst>
+          </p:cNvPr>
+          <p:cNvCxnSpPr/>
+          <p:nvPr/>
+        </p:nvCxnSpPr>
+        <p:spPr>
+          <a:xfrm>
+            <a:off x="533400" y="4368800"/>
+            <a:ext cx="11125200" cy="0"/>
+          </a:xfrm>
+          <a:prstGeom prst="line">
+            <a:avLst/>
+          </a:prstGeom>
+          <a:ln w="8890">
+            <a:solidFill>
+              <a:srgbClr val="C6D5E1"/>
+            </a:solidFill>
+          </a:ln>
+          <a:effectLst/>
+          <a:extLst>
+            <a:ext uri="{AF507438-7753-43E0-B8FC-AC1667EBCBE1}">
+              <a14:hiddenEffects xmlns:a14="http://schemas.microsoft.com/office/drawing/2010/main">
+                <a:effectLst>
+                  <a:outerShdw blurRad="40000" dist="20000" dir="5400000" rotWithShape="0">
+                    <a:srgbClr val="000000">
+                      <a:alpha val="38000"/>
+                    </a:srgbClr>
+                  </a:outerShdw>
+                </a:effectLst>
+              </a14:hiddenEffects>
+            </a:ext>
+          </a:extLst>
+        </p:spPr>
+        <p:style>
+          <a:lnRef idx="2">
+            <a:schemeClr val="accent1"/>
+          </a:lnRef>
+          <a:fillRef idx="0">
+            <a:schemeClr val="accent1"/>
+          </a:fillRef>
+          <a:effectRef idx="1">
+            <a:schemeClr val="accent1"/>
+          </a:effectRef>
+          <a:fontRef idx="minor">
+            <a:schemeClr val="tx1"/>
+          </a:fontRef>
+        </p:style>
+      </p:cxnSp>
+      <p:sp>
+        <p:nvSpPr>
+          <p:cNvPr id="22" name="文字方塊 21">
+            <a:extLst>
+              <a:ext uri="{FF2B5EF4-FFF2-40B4-BE49-F238E27FC236}">
+                <a16:creationId xmlns:a16="http://schemas.microsoft.com/office/drawing/2014/main" id="{50BFE35A-73E5-3F45-0B6B-F13A98220765}"/>
+              </a:ext>
+            </a:extLst>
+          </p:cNvPr>
+          <p:cNvSpPr txBox="1"/>
+          <p:nvPr/>
+        </p:nvSpPr>
+        <p:spPr>
+          <a:xfrm>
+            <a:off x="762000" y="4521199"/>
+            <a:ext cx="4953000" cy="342900"/>
+          </a:xfrm>
+          <a:prstGeom prst="rect">
+            <a:avLst/>
+          </a:prstGeom>
+          <a:noFill/>
+        </p:spPr>
+        <p:txBody>
+          <a:bodyPr vert="horz" wrap="square" lIns="0" tIns="0" rIns="0" bIns="0" rtlCol="0">
+            <a:noAutofit/>
+          </a:bodyPr>
+          <a:lstStyle/>
+          <a:p>
+            <a:r>
+              <a:rPr lang="zh-TW" altLang="en-US" sz="1700" b="1">
+                <a:solidFill>
+                  <a:srgbClr val="152C3D"/>
                 </a:solidFill>
                 <a:latin typeface="Microsoft JhengHei" panose="020B0604030504040204" pitchFamily="34" charset="-120"/>
                 <a:ea typeface="Microsoft JhengHei" panose="020B0604030504040204" pitchFamily="34" charset="-120"/>
               </a:rPr>
-              <a:t>08</a:t>
-            </a:r>
-            <a:r>
-              <a:rPr lang="zh-TW" altLang="en-US" sz="1050">
-                <a:solidFill>
-                  <a:srgbClr val="52514E"/>
+              <a:t>原線上迴圈：單次 </a:t>
+            </a:r>
+            <a:r>
+              <a:rPr lang="en-US" altLang="zh-TW" sz="1700" b="1">
+                <a:solidFill>
+                  <a:srgbClr val="152C3D"/>
                 </a:solidFill>
                 <a:latin typeface="Microsoft JhengHei" panose="020B0604030504040204" pitchFamily="34" charset="-120"/>
                 <a:ea typeface="Microsoft JhengHei" panose="020B0604030504040204" pitchFamily="34" charset="-120"/>
               </a:rPr>
-              <a:t>月／八月份進度報告</a:t>
-            </a:r>
-            <a:r>
-              <a:rPr lang="en-US" altLang="zh-TW" sz="1050">
-                <a:solidFill>
-                  <a:srgbClr val="52514E"/>
-                </a:solidFill>
-                <a:latin typeface="Microsoft JhengHei" panose="020B0604030504040204" pitchFamily="34" charset="-120"/>
-                <a:ea typeface="Microsoft JhengHei" panose="020B0604030504040204" pitchFamily="34" charset="-120"/>
-              </a:rPr>
-              <a:t>.md</a:t>
-            </a:r>
-            <a:endParaRPr lang="zh-TW" altLang="en-US" sz="1050">
+              <a:t>profiling</a:t>
+            </a:r>
+            <a:endParaRPr lang="zh-TW" altLang="en-US" sz="1700" b="1">
               <a:solidFill>
-                <a:srgbClr val="52514E"/>
+                <a:srgbClr val="152C3D"/>
               </a:solidFill>
               <a:latin typeface="Microsoft JhengHei" panose="020B0604030504040204" pitchFamily="34" charset="-120"/>
               <a:ea typeface="Microsoft JhengHei" panose="020B0604030504040204" pitchFamily="34" charset="-120"/>
@@ -14943,10 +15964,10 @@
       </p:sp>
       <p:sp>
         <p:nvSpPr>
-          <p:cNvPr id="16" name="文字方塊 15">
+          <p:cNvPr id="23" name="文字方塊 22">
             <a:extLst>
               <a:ext uri="{FF2B5EF4-FFF2-40B4-BE49-F238E27FC236}">
-                <a16:creationId xmlns:a16="http://schemas.microsoft.com/office/drawing/2014/main" id="{E81A131F-9CD3-84A5-0C5A-4AA49377F870}"/>
+                <a16:creationId xmlns:a16="http://schemas.microsoft.com/office/drawing/2014/main" id="{050DE0D1-191C-3FCA-2639-8D2C6E6A24E8}"/>
               </a:ext>
             </a:extLst>
           </p:cNvPr>
@@ -14955,8 +15976,8 @@
         </p:nvSpPr>
         <p:spPr>
           <a:xfrm>
-            <a:off x="11379200" y="6464300"/>
-            <a:ext cx="508000" cy="169277"/>
+            <a:off x="762000" y="4940299"/>
+            <a:ext cx="4953000" cy="584200"/>
           </a:xfrm>
           <a:prstGeom prst="rect">
             <a:avLst/>
@@ -14965,24 +15986,114 @@
         </p:spPr>
         <p:txBody>
           <a:bodyPr vert="horz" wrap="square" lIns="0" tIns="0" rIns="0" bIns="0" rtlCol="0">
-            <a:spAutoFit/>
+            <a:noAutofit/>
           </a:bodyPr>
           <a:lstStyle/>
           <a:p>
-            <a:pPr algn="r"/>
-            <a:r>
-              <a:rPr lang="en-US" altLang="zh-TW" sz="1100">
-                <a:solidFill>
-                  <a:srgbClr val="52514E"/>
+            <a:r>
+              <a:rPr lang="en-US" altLang="zh-TW" sz="2900" b="1">
+                <a:solidFill>
+                  <a:srgbClr val="245B85"/>
                 </a:solidFill>
                 <a:latin typeface="Microsoft JhengHei" panose="020B0604030504040204" pitchFamily="34" charset="-120"/>
                 <a:ea typeface="Microsoft JhengHei" panose="020B0604030504040204" pitchFamily="34" charset="-120"/>
               </a:rPr>
-              <a:t>18</a:t>
-            </a:r>
-            <a:endParaRPr lang="zh-TW" altLang="en-US" sz="1100">
+              <a:t>278 </a:t>
+            </a:r>
+            <a:r>
+              <a:rPr lang="zh-TW" altLang="en-US" sz="2900" b="1">
+                <a:solidFill>
+                  <a:srgbClr val="245B85"/>
+                </a:solidFill>
+                <a:latin typeface="Microsoft JhengHei" panose="020B0604030504040204" pitchFamily="34" charset="-120"/>
+                <a:ea typeface="Microsoft JhengHei" panose="020B0604030504040204" pitchFamily="34" charset="-120"/>
+              </a:rPr>
+              <a:t>秒／輪</a:t>
+            </a:r>
+          </a:p>
+        </p:txBody>
+      </p:sp>
+      <p:sp>
+        <p:nvSpPr>
+          <p:cNvPr id="24" name="文字方塊 23">
+            <a:extLst>
+              <a:ext uri="{FF2B5EF4-FFF2-40B4-BE49-F238E27FC236}">
+                <a16:creationId xmlns:a16="http://schemas.microsoft.com/office/drawing/2014/main" id="{512EA3DD-449C-71B8-A0DA-934FB8F9B6FE}"/>
+              </a:ext>
+            </a:extLst>
+          </p:cNvPr>
+          <p:cNvSpPr txBox="1"/>
+          <p:nvPr/>
+        </p:nvSpPr>
+        <p:spPr>
+          <a:xfrm>
+            <a:off x="762000" y="5575299"/>
+            <a:ext cx="4953000" cy="368300"/>
+          </a:xfrm>
+          <a:prstGeom prst="rect">
+            <a:avLst/>
+          </a:prstGeom>
+          <a:noFill/>
+        </p:spPr>
+        <p:txBody>
+          <a:bodyPr vert="horz" wrap="square" lIns="0" tIns="0" rIns="0" bIns="0" rtlCol="0">
+            <a:noAutofit/>
+          </a:bodyPr>
+          <a:lstStyle/>
+          <a:p>
+            <a:r>
+              <a:rPr lang="en-US" altLang="zh-TW" sz="1600">
+                <a:solidFill>
+                  <a:srgbClr val="152C3D"/>
+                </a:solidFill>
+                <a:latin typeface="Microsoft JhengHei" panose="020B0604030504040204" pitchFamily="34" charset="-120"/>
+                <a:ea typeface="Microsoft JhengHei" panose="020B0604030504040204" pitchFamily="34" charset="-120"/>
+              </a:rPr>
+              <a:t>HFSS </a:t>
+            </a:r>
+            <a:r>
+              <a:rPr lang="zh-TW" altLang="en-US" sz="1600">
+                <a:solidFill>
+                  <a:srgbClr val="152C3D"/>
+                </a:solidFill>
+                <a:latin typeface="Microsoft JhengHei" panose="020B0604030504040204" pitchFamily="34" charset="-120"/>
+                <a:ea typeface="Microsoft JhengHei" panose="020B0604030504040204" pitchFamily="34" charset="-120"/>
+              </a:rPr>
+              <a:t>約 </a:t>
+            </a:r>
+            <a:r>
+              <a:rPr lang="en-US" altLang="zh-TW" sz="1600">
+                <a:solidFill>
+                  <a:srgbClr val="152C3D"/>
+                </a:solidFill>
+                <a:latin typeface="Microsoft JhengHei" panose="020B0604030504040204" pitchFamily="34" charset="-120"/>
+                <a:ea typeface="Microsoft JhengHei" panose="020B0604030504040204" pitchFamily="34" charset="-120"/>
+              </a:rPr>
+              <a:t>170 </a:t>
+            </a:r>
+            <a:r>
+              <a:rPr lang="zh-TW" altLang="en-US" sz="1600">
+                <a:solidFill>
+                  <a:srgbClr val="152C3D"/>
+                </a:solidFill>
+                <a:latin typeface="Microsoft JhengHei" panose="020B0604030504040204" pitchFamily="34" charset="-120"/>
+                <a:ea typeface="Microsoft JhengHei" panose="020B0604030504040204" pitchFamily="34" charset="-120"/>
+              </a:rPr>
+              <a:t>秒，占 </a:t>
+            </a:r>
+            <a:r>
+              <a:rPr lang="en-US" altLang="zh-TW" sz="1600">
+                <a:solidFill>
+                  <a:srgbClr val="152C3D"/>
+                </a:solidFill>
+                <a:latin typeface="Microsoft JhengHei" panose="020B0604030504040204" pitchFamily="34" charset="-120"/>
+                <a:ea typeface="Microsoft JhengHei" panose="020B0604030504040204" pitchFamily="34" charset="-120"/>
+              </a:rPr>
+              <a:t>61%</a:t>
+            </a:r>
+            <a:endParaRPr lang="zh-TW" altLang="en-US" sz="1600">
               <a:solidFill>
-                <a:srgbClr val="52514E"/>
+                <a:srgbClr val="152C3D"/>
               </a:solidFill>
               <a:latin typeface="Microsoft JhengHei" panose="020B0604030504040204" pitchFamily="34" charset="-120"/>
               <a:ea typeface="Microsoft JhengHei" panose="020B0604030504040204" pitchFamily="34" charset="-120"/>
@@ -14990,10 +16101,1230 @@
           </a:p>
         </p:txBody>
       </p:sp>
+      <p:sp>
+        <p:nvSpPr>
+          <p:cNvPr id="25" name="文字方塊 24">
+            <a:extLst>
+              <a:ext uri="{FF2B5EF4-FFF2-40B4-BE49-F238E27FC236}">
+                <a16:creationId xmlns:a16="http://schemas.microsoft.com/office/drawing/2014/main" id="{28F5D49B-7543-761E-4240-ED7B89712BE0}"/>
+              </a:ext>
+            </a:extLst>
+          </p:cNvPr>
+          <p:cNvSpPr txBox="1"/>
+          <p:nvPr/>
+        </p:nvSpPr>
+        <p:spPr>
+          <a:xfrm>
+            <a:off x="6604000" y="4521199"/>
+            <a:ext cx="4826000" cy="342900"/>
+          </a:xfrm>
+          <a:prstGeom prst="rect">
+            <a:avLst/>
+          </a:prstGeom>
+          <a:noFill/>
+        </p:spPr>
+        <p:txBody>
+          <a:bodyPr vert="horz" wrap="square" lIns="0" tIns="0" rIns="0" bIns="0" rtlCol="0">
+            <a:noAutofit/>
+          </a:bodyPr>
+          <a:lstStyle/>
+          <a:p>
+            <a:r>
+              <a:rPr lang="zh-TW" altLang="en-US" sz="1700" b="1">
+                <a:solidFill>
+                  <a:srgbClr val="152C3D"/>
+                </a:solidFill>
+                <a:latin typeface="Microsoft JhengHei" panose="020B0604030504040204" pitchFamily="34" charset="-120"/>
+                <a:ea typeface="Microsoft JhengHei" panose="020B0604030504040204" pitchFamily="34" charset="-120"/>
+              </a:rPr>
+              <a:t>批次線：模擬資料產出</a:t>
+            </a:r>
+          </a:p>
+        </p:txBody>
+      </p:sp>
+      <p:sp>
+        <p:nvSpPr>
+          <p:cNvPr id="26" name="文字方塊 25">
+            <a:extLst>
+              <a:ext uri="{FF2B5EF4-FFF2-40B4-BE49-F238E27FC236}">
+                <a16:creationId xmlns:a16="http://schemas.microsoft.com/office/drawing/2014/main" id="{3B6C32E9-85AA-C383-4077-F2C85E8BB655}"/>
+              </a:ext>
+            </a:extLst>
+          </p:cNvPr>
+          <p:cNvSpPr txBox="1"/>
+          <p:nvPr/>
+        </p:nvSpPr>
+        <p:spPr>
+          <a:xfrm>
+            <a:off x="6604000" y="4940299"/>
+            <a:ext cx="4826000" cy="584200"/>
+          </a:xfrm>
+          <a:prstGeom prst="rect">
+            <a:avLst/>
+          </a:prstGeom>
+          <a:noFill/>
+        </p:spPr>
+        <p:txBody>
+          <a:bodyPr vert="horz" wrap="square" lIns="0" tIns="0" rIns="0" bIns="0" rtlCol="0">
+            <a:noAutofit/>
+          </a:bodyPr>
+          <a:lstStyle/>
+          <a:p>
+            <a:r>
+              <a:rPr lang="zh-TW" altLang="en-US" sz="2900" b="1">
+                <a:solidFill>
+                  <a:srgbClr val="245B85"/>
+                </a:solidFill>
+                <a:latin typeface="Microsoft JhengHei" panose="020B0604030504040204" pitchFamily="34" charset="-120"/>
+                <a:ea typeface="Microsoft JhengHei" panose="020B0604030504040204" pitchFamily="34" charset="-120"/>
+              </a:rPr>
+              <a:t>中位 </a:t>
+            </a:r>
+            <a:r>
+              <a:rPr lang="en-US" altLang="zh-TW" sz="2900" b="1">
+                <a:solidFill>
+                  <a:srgbClr val="245B85"/>
+                </a:solidFill>
+                <a:latin typeface="Microsoft JhengHei" panose="020B0604030504040204" pitchFamily="34" charset="-120"/>
+                <a:ea typeface="Microsoft JhengHei" panose="020B0604030504040204" pitchFamily="34" charset="-120"/>
+              </a:rPr>
+              <a:t>160 </a:t>
+            </a:r>
+            <a:r>
+              <a:rPr lang="zh-TW" altLang="en-US" sz="2900" b="1">
+                <a:solidFill>
+                  <a:srgbClr val="245B85"/>
+                </a:solidFill>
+                <a:latin typeface="Microsoft JhengHei" panose="020B0604030504040204" pitchFamily="34" charset="-120"/>
+                <a:ea typeface="Microsoft JhengHei" panose="020B0604030504040204" pitchFamily="34" charset="-120"/>
+              </a:rPr>
+              <a:t>秒／筆</a:t>
+            </a:r>
+          </a:p>
+        </p:txBody>
+      </p:sp>
+      <p:sp>
+        <p:nvSpPr>
+          <p:cNvPr id="27" name="文字方塊 26">
+            <a:extLst>
+              <a:ext uri="{FF2B5EF4-FFF2-40B4-BE49-F238E27FC236}">
+                <a16:creationId xmlns:a16="http://schemas.microsoft.com/office/drawing/2014/main" id="{63DD15B0-E903-5AE4-F88B-5842F0DF79D6}"/>
+              </a:ext>
+            </a:extLst>
+          </p:cNvPr>
+          <p:cNvSpPr txBox="1"/>
+          <p:nvPr/>
+        </p:nvSpPr>
+        <p:spPr>
+          <a:xfrm>
+            <a:off x="6604000" y="5575299"/>
+            <a:ext cx="4826000" cy="368300"/>
+          </a:xfrm>
+          <a:prstGeom prst="rect">
+            <a:avLst/>
+          </a:prstGeom>
+          <a:noFill/>
+        </p:spPr>
+        <p:txBody>
+          <a:bodyPr vert="horz" wrap="square" lIns="0" tIns="0" rIns="0" bIns="0" rtlCol="0">
+            <a:noAutofit/>
+          </a:bodyPr>
+          <a:lstStyle/>
+          <a:p>
+            <a:r>
+              <a:rPr lang="zh-TW" altLang="en-US" sz="1600">
+                <a:solidFill>
+                  <a:srgbClr val="152C3D"/>
+                </a:solidFill>
+                <a:latin typeface="Microsoft JhengHei" panose="020B0604030504040204" pitchFamily="34" charset="-120"/>
+                <a:ea typeface="Microsoft JhengHei" panose="020B0604030504040204" pitchFamily="34" charset="-120"/>
+              </a:rPr>
+              <a:t>代理訓練移出模擬機迴圈</a:t>
+            </a:r>
+          </a:p>
+        </p:txBody>
+      </p:sp>
+      <p:sp>
+        <p:nvSpPr>
+          <p:cNvPr id="28" name="文字方塊 27">
+            <a:extLst>
+              <a:ext uri="{FF2B5EF4-FFF2-40B4-BE49-F238E27FC236}">
+                <a16:creationId xmlns:a16="http://schemas.microsoft.com/office/drawing/2014/main" id="{164E903F-726C-0243-B732-F957B6E03BF8}"/>
+              </a:ext>
+            </a:extLst>
+          </p:cNvPr>
+          <p:cNvSpPr txBox="1"/>
+          <p:nvPr/>
+        </p:nvSpPr>
+        <p:spPr>
+          <a:xfrm>
+            <a:off x="533400" y="6070600"/>
+            <a:ext cx="11125200" cy="241300"/>
+          </a:xfrm>
+          <a:prstGeom prst="rect">
+            <a:avLst/>
+          </a:prstGeom>
+          <a:noFill/>
+        </p:spPr>
+        <p:txBody>
+          <a:bodyPr vert="horz" wrap="square" lIns="0" tIns="0" rIns="0" bIns="0" rtlCol="0">
+            <a:noAutofit/>
+          </a:bodyPr>
+          <a:lstStyle/>
+          <a:p>
+            <a:r>
+              <a:rPr lang="zh-TW" altLang="en-US" sz="1200">
+                <a:solidFill>
+                  <a:srgbClr val="526A7D"/>
+                </a:solidFill>
+                <a:latin typeface="Microsoft JhengHei" panose="020B0604030504040204" pitchFamily="34" charset="-120"/>
+                <a:ea typeface="Microsoft JhengHei" panose="020B0604030504040204" pitchFamily="34" charset="-120"/>
+              </a:rPr>
+              <a:t>兩者為不同運作情境的快照，用於說明時間分配，不換算同條件加速倍率。</a:t>
+            </a:r>
+          </a:p>
+        </p:txBody>
+      </p:sp>
+      <p:sp>
+        <p:nvSpPr>
+          <p:cNvPr id="29" name="文字方塊 28">
+            <a:extLst>
+              <a:ext uri="{FF2B5EF4-FFF2-40B4-BE49-F238E27FC236}">
+                <a16:creationId xmlns:a16="http://schemas.microsoft.com/office/drawing/2014/main" id="{3E0BEBCB-C884-249F-0169-E473B3E61838}"/>
+              </a:ext>
+            </a:extLst>
+          </p:cNvPr>
+          <p:cNvSpPr txBox="1"/>
+          <p:nvPr/>
+        </p:nvSpPr>
+        <p:spPr>
+          <a:xfrm>
+            <a:off x="533400" y="6400800"/>
+            <a:ext cx="10541000" cy="241300"/>
+          </a:xfrm>
+          <a:prstGeom prst="rect">
+            <a:avLst/>
+          </a:prstGeom>
+          <a:noFill/>
+        </p:spPr>
+        <p:txBody>
+          <a:bodyPr vert="horz" wrap="square" lIns="0" tIns="0" rIns="0" bIns="0" rtlCol="0">
+            <a:noAutofit/>
+          </a:bodyPr>
+          <a:lstStyle/>
+          <a:p>
+            <a:r>
+              <a:rPr lang="zh-TW" altLang="en-US" sz="900">
+                <a:solidFill>
+                  <a:srgbClr val="526A7D"/>
+                </a:solidFill>
+                <a:latin typeface="Microsoft JhengHei" panose="020B0604030504040204" pitchFamily="34" charset="-120"/>
+                <a:ea typeface="Microsoft JhengHei" panose="020B0604030504040204" pitchFamily="34" charset="-120"/>
+              </a:rPr>
+              <a:t>來源：七月進度報告 </a:t>
+            </a:r>
+            <a:r>
+              <a:rPr lang="en-US" altLang="zh-TW" sz="900">
+                <a:solidFill>
+                  <a:srgbClr val="526A7D"/>
+                </a:solidFill>
+                <a:latin typeface="Microsoft JhengHei" panose="020B0604030504040204" pitchFamily="34" charset="-120"/>
+                <a:ea typeface="Microsoft JhengHei" panose="020B0604030504040204" pitchFamily="34" charset="-120"/>
+              </a:rPr>
+              <a:t>v2 §1–2</a:t>
+            </a:r>
+            <a:r>
+              <a:rPr lang="zh-TW" altLang="en-US" sz="900">
+                <a:solidFill>
+                  <a:srgbClr val="526A7D"/>
+                </a:solidFill>
+                <a:latin typeface="Microsoft JhengHei" panose="020B0604030504040204" pitchFamily="34" charset="-120"/>
+                <a:ea typeface="Microsoft JhengHei" panose="020B0604030504040204" pitchFamily="34" charset="-120"/>
+              </a:rPr>
+              <a:t>；</a:t>
+            </a:r>
+            <a:r>
+              <a:rPr lang="en-US" altLang="zh-TW" sz="900">
+                <a:solidFill>
+                  <a:srgbClr val="526A7D"/>
+                </a:solidFill>
+                <a:latin typeface="Microsoft JhengHei" panose="020B0604030504040204" pitchFamily="34" charset="-120"/>
+                <a:ea typeface="Microsoft JhengHei" panose="020B0604030504040204" pitchFamily="34" charset="-120"/>
+              </a:rPr>
+              <a:t>methodology-divergences.md D22</a:t>
+            </a:r>
+            <a:r>
+              <a:rPr lang="zh-TW" altLang="en-US" sz="900">
+                <a:solidFill>
+                  <a:srgbClr val="526A7D"/>
+                </a:solidFill>
+                <a:latin typeface="Microsoft JhengHei" panose="020B0604030504040204" pitchFamily="34" charset="-120"/>
+                <a:ea typeface="Microsoft JhengHei" panose="020B0604030504040204" pitchFamily="34" charset="-120"/>
+              </a:rPr>
+              <a:t>。</a:t>
+            </a:r>
+          </a:p>
+        </p:txBody>
+      </p:sp>
+      <p:sp>
+        <p:nvSpPr>
+          <p:cNvPr id="30" name="文字方塊 29">
+            <a:extLst>
+              <a:ext uri="{FF2B5EF4-FFF2-40B4-BE49-F238E27FC236}">
+                <a16:creationId xmlns:a16="http://schemas.microsoft.com/office/drawing/2014/main" id="{561307E0-A4D2-E2FD-2B66-A2449D177160}"/>
+              </a:ext>
+            </a:extLst>
+          </p:cNvPr>
+          <p:cNvSpPr txBox="1"/>
+          <p:nvPr/>
+        </p:nvSpPr>
+        <p:spPr>
+          <a:xfrm>
+            <a:off x="11341100" y="6438900"/>
+            <a:ext cx="317500" cy="228600"/>
+          </a:xfrm>
+          <a:prstGeom prst="rect">
+            <a:avLst/>
+          </a:prstGeom>
+          <a:noFill/>
+        </p:spPr>
+        <p:txBody>
+          <a:bodyPr vert="horz" wrap="square" lIns="0" tIns="0" rIns="0" bIns="0" rtlCol="0">
+            <a:noAutofit/>
+          </a:bodyPr>
+          <a:lstStyle/>
+          <a:p>
+            <a:pPr algn="r"/>
+            <a:r>
+              <a:rPr lang="en-US" altLang="zh-TW" sz="1100">
+                <a:solidFill>
+                  <a:srgbClr val="526A7D"/>
+                </a:solidFill>
+                <a:latin typeface="Microsoft JhengHei" panose="020B0604030504040204" pitchFamily="34" charset="-120"/>
+                <a:ea typeface="Microsoft JhengHei" panose="020B0604030504040204" pitchFamily="34" charset="-120"/>
+              </a:rPr>
+              <a:t>18</a:t>
+            </a:r>
+            <a:endParaRPr lang="zh-TW" altLang="en-US" sz="1100">
+              <a:solidFill>
+                <a:srgbClr val="526A7D"/>
+              </a:solidFill>
+              <a:latin typeface="Microsoft JhengHei" panose="020B0604030504040204" pitchFamily="34" charset="-120"/>
+              <a:ea typeface="Microsoft JhengHei" panose="020B0604030504040204" pitchFamily="34" charset="-120"/>
+            </a:endParaRPr>
+          </a:p>
+        </p:txBody>
+      </p:sp>
     </p:spTree>
     <p:extLst>
       <p:ext uri="{BB962C8B-B14F-4D97-AF65-F5344CB8AC3E}">
-        <p14:creationId xmlns:p14="http://schemas.microsoft.com/office/powerpoint/2010/main" val="2857572442"/>
+        <p14:creationId xmlns:p14="http://schemas.microsoft.com/office/powerpoint/2010/main" val="3345822909"/>
+      </p:ext>
+    </p:extLst>
+  </p:cSld>
+  <p:clrMapOvr>
+    <a:masterClrMapping/>
+  </p:clrMapOvr>
+</p:sld>
+</file>
+
+<file path=ppt/slides/slide19.xml><?xml version="1.0" encoding="utf-8"?>
+<p:sld xmlns:a="http://schemas.openxmlformats.org/drawingml/2006/main" xmlns:r="http://schemas.openxmlformats.org/officeDocument/2006/relationships" xmlns:p="http://schemas.openxmlformats.org/presentationml/2006/main">
+  <p:cSld>
+    <p:spTree>
+      <p:nvGrpSpPr>
+        <p:cNvPr id="1" name=""/>
+        <p:cNvGrpSpPr/>
+        <p:nvPr/>
+      </p:nvGrpSpPr>
+      <p:grpSpPr>
+        <a:xfrm>
+          <a:off x="0" y="0"/>
+          <a:ext cx="0" cy="0"/>
+          <a:chOff x="0" y="0"/>
+          <a:chExt cx="0" cy="0"/>
+        </a:xfrm>
+      </p:grpSpPr>
+      <p:sp>
+        <p:nvSpPr>
+          <p:cNvPr id="2" name="recap_title">
+            <a:extLst>
+              <a:ext uri="{FF2B5EF4-FFF2-40B4-BE49-F238E27FC236}">
+                <a16:creationId xmlns:a16="http://schemas.microsoft.com/office/drawing/2014/main" id="{AC20D022-A613-EE2E-4423-E2DC64DF9276}"/>
+              </a:ext>
+            </a:extLst>
+          </p:cNvPr>
+          <p:cNvSpPr txBox="1"/>
+          <p:nvPr/>
+        </p:nvSpPr>
+        <p:spPr>
+          <a:xfrm>
+            <a:off x="533400" y="279399"/>
+            <a:ext cx="11112500" cy="584200"/>
+          </a:xfrm>
+          <a:prstGeom prst="rect">
+            <a:avLst/>
+          </a:prstGeom>
+          <a:noFill/>
+        </p:spPr>
+        <p:txBody>
+          <a:bodyPr vert="horz" wrap="square" lIns="0" tIns="0" rIns="0" bIns="0" rtlCol="0">
+            <a:noAutofit/>
+          </a:bodyPr>
+          <a:lstStyle/>
+          <a:p>
+            <a:r>
+              <a:rPr lang="zh-TW" altLang="en-US" sz="3000" b="1">
+                <a:solidFill>
+                  <a:srgbClr val="152C3D"/>
+                </a:solidFill>
+                <a:latin typeface="Microsoft JhengHei" panose="020B0604030504040204" pitchFamily="34" charset="-120"/>
+                <a:ea typeface="Microsoft JhengHei" panose="020B0604030504040204" pitchFamily="34" charset="-120"/>
+              </a:rPr>
+              <a:t>七月：生成約束與可製造性</a:t>
+            </a:r>
+          </a:p>
+        </p:txBody>
+      </p:sp>
+      <p:cxnSp>
+        <p:nvCxnSpPr>
+          <p:cNvPr id="3" name="直線接點 2">
+            <a:extLst>
+              <a:ext uri="{FF2B5EF4-FFF2-40B4-BE49-F238E27FC236}">
+                <a16:creationId xmlns:a16="http://schemas.microsoft.com/office/drawing/2014/main" id="{D3E5207B-909A-02EA-2078-F45653BFD80A}"/>
+              </a:ext>
+            </a:extLst>
+          </p:cNvPr>
+          <p:cNvCxnSpPr/>
+          <p:nvPr/>
+        </p:nvCxnSpPr>
+        <p:spPr>
+          <a:xfrm>
+            <a:off x="533400" y="1041400"/>
+            <a:ext cx="11125200" cy="0"/>
+          </a:xfrm>
+          <a:prstGeom prst="line">
+            <a:avLst/>
+          </a:prstGeom>
+          <a:ln w="8890">
+            <a:solidFill>
+              <a:srgbClr val="C6D5E1"/>
+            </a:solidFill>
+          </a:ln>
+          <a:effectLst/>
+          <a:extLst>
+            <a:ext uri="{AF507438-7753-43E0-B8FC-AC1667EBCBE1}">
+              <a14:hiddenEffects xmlns:a14="http://schemas.microsoft.com/office/drawing/2010/main">
+                <a:effectLst>
+                  <a:outerShdw blurRad="40000" dist="20000" dir="5400000" rotWithShape="0">
+                    <a:srgbClr val="000000">
+                      <a:alpha val="38000"/>
+                    </a:srgbClr>
+                  </a:outerShdw>
+                </a:effectLst>
+              </a14:hiddenEffects>
+            </a:ext>
+          </a:extLst>
+        </p:spPr>
+        <p:style>
+          <a:lnRef idx="2">
+            <a:schemeClr val="accent1"/>
+          </a:lnRef>
+          <a:fillRef idx="0">
+            <a:schemeClr val="accent1"/>
+          </a:fillRef>
+          <a:effectRef idx="1">
+            <a:schemeClr val="accent1"/>
+          </a:effectRef>
+          <a:fontRef idx="minor">
+            <a:schemeClr val="tx1"/>
+          </a:fontRef>
+        </p:style>
+      </p:cxnSp>
+      <p:cxnSp>
+        <p:nvCxnSpPr>
+          <p:cNvPr id="4" name="直線接點 3">
+            <a:extLst>
+              <a:ext uri="{FF2B5EF4-FFF2-40B4-BE49-F238E27FC236}">
+                <a16:creationId xmlns:a16="http://schemas.microsoft.com/office/drawing/2014/main" id="{7C8CF21C-64C2-79EC-0358-8F8D92D887C7}"/>
+              </a:ext>
+            </a:extLst>
+          </p:cNvPr>
+          <p:cNvCxnSpPr/>
+          <p:nvPr/>
+        </p:nvCxnSpPr>
+        <p:spPr>
+          <a:xfrm>
+            <a:off x="533400" y="1041400"/>
+            <a:ext cx="1244600" cy="0"/>
+          </a:xfrm>
+          <a:prstGeom prst="line">
+            <a:avLst/>
+          </a:prstGeom>
+          <a:ln w="29210">
+            <a:solidFill>
+              <a:srgbClr val="245B85"/>
+            </a:solidFill>
+          </a:ln>
+          <a:effectLst/>
+          <a:extLst>
+            <a:ext uri="{AF507438-7753-43E0-B8FC-AC1667EBCBE1}">
+              <a14:hiddenEffects xmlns:a14="http://schemas.microsoft.com/office/drawing/2010/main">
+                <a:effectLst>
+                  <a:outerShdw blurRad="40000" dist="20000" dir="5400000" rotWithShape="0">
+                    <a:srgbClr val="000000">
+                      <a:alpha val="38000"/>
+                    </a:srgbClr>
+                  </a:outerShdw>
+                </a:effectLst>
+              </a14:hiddenEffects>
+            </a:ext>
+          </a:extLst>
+        </p:spPr>
+        <p:style>
+          <a:lnRef idx="2">
+            <a:schemeClr val="accent1"/>
+          </a:lnRef>
+          <a:fillRef idx="0">
+            <a:schemeClr val="accent1"/>
+          </a:fillRef>
+          <a:effectRef idx="1">
+            <a:schemeClr val="accent1"/>
+          </a:effectRef>
+          <a:fontRef idx="minor">
+            <a:schemeClr val="tx1"/>
+          </a:fontRef>
+        </p:style>
+      </p:cxnSp>
+      <p:sp>
+        <p:nvSpPr>
+          <p:cNvPr id="5" name="文字方塊 4">
+            <a:extLst>
+              <a:ext uri="{FF2B5EF4-FFF2-40B4-BE49-F238E27FC236}">
+                <a16:creationId xmlns:a16="http://schemas.microsoft.com/office/drawing/2014/main" id="{D7235963-E47F-6609-D8DE-E31379B5A1A8}"/>
+              </a:ext>
+            </a:extLst>
+          </p:cNvPr>
+          <p:cNvSpPr txBox="1"/>
+          <p:nvPr/>
+        </p:nvSpPr>
+        <p:spPr>
+          <a:xfrm>
+            <a:off x="533400" y="1371599"/>
+            <a:ext cx="11125200" cy="393700"/>
+          </a:xfrm>
+          <a:prstGeom prst="rect">
+            <a:avLst/>
+          </a:prstGeom>
+          <a:noFill/>
+        </p:spPr>
+        <p:txBody>
+          <a:bodyPr vert="horz" wrap="square" lIns="0" tIns="0" rIns="0" bIns="0" rtlCol="0">
+            <a:noAutofit/>
+          </a:bodyPr>
+          <a:lstStyle/>
+          <a:p>
+            <a:r>
+              <a:rPr lang="zh-TW" altLang="en-US">
+                <a:solidFill>
+                  <a:srgbClr val="152C3D"/>
+                </a:solidFill>
+                <a:latin typeface="Microsoft JhengHei" panose="020B0604030504040204" pitchFamily="34" charset="-120"/>
+                <a:ea typeface="Microsoft JhengHei" panose="020B0604030504040204" pitchFamily="34" charset="-120"/>
+              </a:rPr>
+              <a:t>先把幾何規則放進生成條件，再驗證電性是否維持</a:t>
+            </a:r>
+          </a:p>
+        </p:txBody>
+      </p:sp>
+      <p:sp>
+        <p:nvSpPr>
+          <p:cNvPr id="6" name="文字方塊 5">
+            <a:extLst>
+              <a:ext uri="{FF2B5EF4-FFF2-40B4-BE49-F238E27FC236}">
+                <a16:creationId xmlns:a16="http://schemas.microsoft.com/office/drawing/2014/main" id="{E2ABF239-9C48-676F-D1C9-EA2E7B800207}"/>
+              </a:ext>
+            </a:extLst>
+          </p:cNvPr>
+          <p:cNvSpPr txBox="1"/>
+          <p:nvPr/>
+        </p:nvSpPr>
+        <p:spPr>
+          <a:xfrm>
+            <a:off x="660400" y="1904999"/>
+            <a:ext cx="3238500" cy="393700"/>
+          </a:xfrm>
+          <a:prstGeom prst="rect">
+            <a:avLst/>
+          </a:prstGeom>
+          <a:noFill/>
+        </p:spPr>
+        <p:txBody>
+          <a:bodyPr vert="horz" wrap="square" lIns="0" tIns="0" rIns="0" bIns="0" rtlCol="0">
+            <a:noAutofit/>
+          </a:bodyPr>
+          <a:lstStyle/>
+          <a:p>
+            <a:r>
+              <a:rPr lang="zh-TW" altLang="en-US" b="1">
+                <a:solidFill>
+                  <a:srgbClr val="526A7D"/>
+                </a:solidFill>
+                <a:latin typeface="Microsoft JhengHei" panose="020B0604030504040204" pitchFamily="34" charset="-120"/>
+                <a:ea typeface="Microsoft JhengHei" panose="020B0604030504040204" pitchFamily="34" charset="-120"/>
+              </a:rPr>
+              <a:t>原圖：含碎片</a:t>
+            </a:r>
+          </a:p>
+        </p:txBody>
+      </p:sp>
+      <p:sp>
+        <p:nvSpPr>
+          <p:cNvPr id="7" name="文字方塊 6">
+            <a:extLst>
+              <a:ext uri="{FF2B5EF4-FFF2-40B4-BE49-F238E27FC236}">
+                <a16:creationId xmlns:a16="http://schemas.microsoft.com/office/drawing/2014/main" id="{CEA1560F-096B-F049-8814-C626DE033308}"/>
+              </a:ext>
+            </a:extLst>
+          </p:cNvPr>
+          <p:cNvSpPr txBox="1"/>
+          <p:nvPr/>
+        </p:nvSpPr>
+        <p:spPr>
+          <a:xfrm>
+            <a:off x="4381500" y="1904999"/>
+            <a:ext cx="3479800" cy="393700"/>
+          </a:xfrm>
+          <a:prstGeom prst="rect">
+            <a:avLst/>
+          </a:prstGeom>
+          <a:noFill/>
+        </p:spPr>
+        <p:txBody>
+          <a:bodyPr vert="horz" wrap="square" lIns="0" tIns="0" rIns="0" bIns="0" rtlCol="0">
+            <a:noAutofit/>
+          </a:bodyPr>
+          <a:lstStyle/>
+          <a:p>
+            <a:r>
+              <a:rPr lang="en-US" altLang="zh-TW" b="1">
+                <a:solidFill>
+                  <a:srgbClr val="245B85"/>
+                </a:solidFill>
+                <a:latin typeface="Microsoft JhengHei" panose="020B0604030504040204" pitchFamily="34" charset="-120"/>
+                <a:ea typeface="Microsoft JhengHei" panose="020B0604030504040204" pitchFamily="34" charset="-120"/>
+              </a:rPr>
+              <a:t>10–5–10 </a:t>
+            </a:r>
+            <a:r>
+              <a:rPr lang="zh-TW" altLang="en-US" b="1">
+                <a:solidFill>
+                  <a:srgbClr val="245B85"/>
+                </a:solidFill>
+                <a:latin typeface="Microsoft JhengHei" panose="020B0604030504040204" pitchFamily="34" charset="-120"/>
+                <a:ea typeface="Microsoft JhengHei" panose="020B0604030504040204" pitchFamily="34" charset="-120"/>
+              </a:rPr>
+              <a:t>部分對稱</a:t>
+            </a:r>
+          </a:p>
+        </p:txBody>
+      </p:sp>
+      <p:pic>
+        <p:nvPicPr>
+          <p:cNvPr id="9" name="圖片 8">
+            <a:extLst>
+              <a:ext uri="{FF2B5EF4-FFF2-40B4-BE49-F238E27FC236}">
+                <a16:creationId xmlns:a16="http://schemas.microsoft.com/office/drawing/2014/main" id="{9A38D87D-95C7-80B0-2FA8-3E7117920D59}"/>
+              </a:ext>
+            </a:extLst>
+          </p:cNvPr>
+          <p:cNvPicPr>
+            <a:picLocks noChangeAspect="1"/>
+          </p:cNvPicPr>
+          <p:nvPr/>
+        </p:nvPicPr>
+        <p:blipFill>
+          <a:blip r:embed="rId3"/>
+          <a:srcRect l="3770" t="33810" r="56699" b="36000"/>
+          <a:stretch>
+            <a:fillRect/>
+          </a:stretch>
+        </p:blipFill>
+        <p:spPr>
+          <a:xfrm>
+            <a:off x="533400" y="2369791"/>
+            <a:ext cx="7175500" cy="2931217"/>
+          </a:xfrm>
+          <a:prstGeom prst="rect">
+            <a:avLst/>
+          </a:prstGeom>
+        </p:spPr>
+      </p:pic>
+      <p:sp>
+        <p:nvSpPr>
+          <p:cNvPr id="10" name="文字方塊 9">
+            <a:extLst>
+              <a:ext uri="{FF2B5EF4-FFF2-40B4-BE49-F238E27FC236}">
+                <a16:creationId xmlns:a16="http://schemas.microsoft.com/office/drawing/2014/main" id="{FB70834C-701E-BB56-25CD-BAF6C388640C}"/>
+              </a:ext>
+            </a:extLst>
+          </p:cNvPr>
+          <p:cNvSpPr txBox="1"/>
+          <p:nvPr/>
+        </p:nvSpPr>
+        <p:spPr>
+          <a:xfrm>
+            <a:off x="533400" y="5486399"/>
+            <a:ext cx="7175500" cy="546100"/>
+          </a:xfrm>
+          <a:prstGeom prst="rect">
+            <a:avLst/>
+          </a:prstGeom>
+          <a:noFill/>
+        </p:spPr>
+        <p:txBody>
+          <a:bodyPr vert="horz" wrap="square" lIns="0" tIns="0" rIns="0" bIns="0" rtlCol="0">
+            <a:noAutofit/>
+          </a:bodyPr>
+          <a:lstStyle/>
+          <a:p>
+            <a:r>
+              <a:rPr lang="en-US" altLang="zh-TW" sz="1500">
+                <a:solidFill>
+                  <a:srgbClr val="152C3D"/>
+                </a:solidFill>
+                <a:latin typeface="Microsoft JhengHei" panose="020B0604030504040204" pitchFamily="34" charset="-120"/>
+                <a:ea typeface="Microsoft JhengHei" panose="020B0604030504040204" pitchFamily="34" charset="-120"/>
+              </a:rPr>
+              <a:t>F2 → s05</a:t>
+            </a:r>
+            <a:r>
+              <a:rPr lang="zh-TW" altLang="en-US" sz="1500">
+                <a:solidFill>
+                  <a:srgbClr val="152C3D"/>
+                </a:solidFill>
+                <a:latin typeface="Microsoft JhengHei" panose="020B0604030504040204" pitchFamily="34" charset="-120"/>
+                <a:ea typeface="Microsoft JhengHei" panose="020B0604030504040204" pitchFamily="34" charset="-120"/>
+              </a:rPr>
+              <a:t>：</a:t>
+            </a:r>
+            <a:r>
+              <a:rPr lang="en-US" altLang="zh-TW" sz="1500">
+                <a:solidFill>
+                  <a:srgbClr val="152C3D"/>
+                </a:solidFill>
+                <a:latin typeface="Microsoft JhengHei" panose="020B0604030504040204" pitchFamily="34" charset="-120"/>
+                <a:ea typeface="Microsoft JhengHei" panose="020B0604030504040204" pitchFamily="34" charset="-120"/>
+              </a:rPr>
+              <a:t>wm −1.42 → −0.29 dB
+s05 </a:t>
+            </a:r>
+            <a:r>
+              <a:rPr lang="zh-TW" altLang="en-US" sz="1500">
+                <a:solidFill>
+                  <a:srgbClr val="152C3D"/>
+                </a:solidFill>
+                <a:latin typeface="Microsoft JhengHei" panose="020B0604030504040204" pitchFamily="34" charset="-120"/>
+                <a:ea typeface="Microsoft JhengHei" panose="020B0604030504040204" pitchFamily="34" charset="-120"/>
+              </a:rPr>
+              <a:t>經 </a:t>
+            </a:r>
+            <a:r>
+              <a:rPr lang="en-US" altLang="zh-TW" sz="1500">
+                <a:solidFill>
+                  <a:srgbClr val="152C3D"/>
+                </a:solidFill>
+                <a:latin typeface="Microsoft JhengHei" panose="020B0604030504040204" pitchFamily="34" charset="-120"/>
+                <a:ea typeface="Microsoft JhengHei" panose="020B0604030504040204" pitchFamily="34" charset="-120"/>
+              </a:rPr>
+              <a:t>41 </a:t>
+            </a:r>
+            <a:r>
+              <a:rPr lang="zh-TW" altLang="en-US" sz="1500">
+                <a:solidFill>
+                  <a:srgbClr val="152C3D"/>
+                </a:solidFill>
+                <a:latin typeface="Microsoft JhengHei" panose="020B0604030504040204" pitchFamily="34" charset="-120"/>
+                <a:ea typeface="Microsoft JhengHei" panose="020B0604030504040204" pitchFamily="34" charset="-120"/>
+              </a:rPr>
+              <a:t>次重複模擬確認</a:t>
+            </a:r>
+          </a:p>
+        </p:txBody>
+      </p:sp>
+      <p:sp>
+        <p:nvSpPr>
+          <p:cNvPr id="11" name="文字方塊 10">
+            <a:extLst>
+              <a:ext uri="{FF2B5EF4-FFF2-40B4-BE49-F238E27FC236}">
+                <a16:creationId xmlns:a16="http://schemas.microsoft.com/office/drawing/2014/main" id="{BD4EE59A-C96E-6CBC-D310-70EEB9AB2588}"/>
+              </a:ext>
+            </a:extLst>
+          </p:cNvPr>
+          <p:cNvSpPr txBox="1"/>
+          <p:nvPr/>
+        </p:nvSpPr>
+        <p:spPr>
+          <a:xfrm>
+            <a:off x="8191500" y="2070099"/>
+            <a:ext cx="3467100" cy="419100"/>
+          </a:xfrm>
+          <a:prstGeom prst="rect">
+            <a:avLst/>
+          </a:prstGeom>
+          <a:noFill/>
+        </p:spPr>
+        <p:txBody>
+          <a:bodyPr vert="horz" wrap="square" lIns="0" tIns="0" rIns="0" bIns="0" rtlCol="0">
+            <a:noAutofit/>
+          </a:bodyPr>
+          <a:lstStyle/>
+          <a:p>
+            <a:r>
+              <a:rPr lang="zh-TW" altLang="en-US" sz="2100" b="1">
+                <a:solidFill>
+                  <a:srgbClr val="245B85"/>
+                </a:solidFill>
+                <a:latin typeface="Microsoft JhengHei" panose="020B0604030504040204" pitchFamily="34" charset="-120"/>
+                <a:ea typeface="Microsoft JhengHei" panose="020B0604030504040204" pitchFamily="34" charset="-120"/>
+              </a:rPr>
+              <a:t>事後除塵的代價</a:t>
+            </a:r>
+          </a:p>
+        </p:txBody>
+      </p:sp>
+      <p:sp>
+        <p:nvSpPr>
+          <p:cNvPr id="12" name="文字方塊 11">
+            <a:extLst>
+              <a:ext uri="{FF2B5EF4-FFF2-40B4-BE49-F238E27FC236}">
+                <a16:creationId xmlns:a16="http://schemas.microsoft.com/office/drawing/2014/main" id="{3120A218-069B-9824-7BBF-ACB2093A3782}"/>
+              </a:ext>
+            </a:extLst>
+          </p:cNvPr>
+          <p:cNvSpPr txBox="1"/>
+          <p:nvPr/>
+        </p:nvSpPr>
+        <p:spPr>
+          <a:xfrm>
+            <a:off x="8191500" y="2603499"/>
+            <a:ext cx="3467100" cy="1282700"/>
+          </a:xfrm>
+          <a:prstGeom prst="rect">
+            <a:avLst/>
+          </a:prstGeom>
+          <a:noFill/>
+        </p:spPr>
+        <p:txBody>
+          <a:bodyPr vert="horz" wrap="square" lIns="0" tIns="0" rIns="0" bIns="0" rtlCol="0">
+            <a:noAutofit/>
+          </a:bodyPr>
+          <a:lstStyle/>
+          <a:p>
+            <a:r>
+              <a:rPr lang="en-US" altLang="zh-TW">
+                <a:solidFill>
+                  <a:srgbClr val="152C3D"/>
+                </a:solidFill>
+                <a:latin typeface="Microsoft JhengHei" panose="020B0604030504040204" pitchFamily="34" charset="-120"/>
+                <a:ea typeface="Microsoft JhengHei" panose="020B0604030504040204" pitchFamily="34" charset="-120"/>
+              </a:rPr>
+              <a:t>R7 </a:t>
+            </a:r>
+            <a:r>
+              <a:rPr lang="zh-TW" altLang="en-US">
+                <a:solidFill>
+                  <a:srgbClr val="152C3D"/>
+                </a:solidFill>
+                <a:latin typeface="Microsoft JhengHei" panose="020B0604030504040204" pitchFamily="34" charset="-120"/>
+                <a:ea typeface="Microsoft JhengHei" panose="020B0604030504040204" pitchFamily="34" charset="-120"/>
+              </a:rPr>
+              <a:t>的 </a:t>
+            </a:r>
+            <a:r>
+              <a:rPr lang="en-US" altLang="zh-TW">
+                <a:solidFill>
+                  <a:srgbClr val="152C3D"/>
+                </a:solidFill>
+                <a:latin typeface="Microsoft JhengHei" panose="020B0604030504040204" pitchFamily="34" charset="-120"/>
+                <a:ea typeface="Microsoft JhengHei" panose="020B0604030504040204" pitchFamily="34" charset="-120"/>
+              </a:rPr>
+              <a:t>5 </a:t>
+            </a:r>
+            <a:r>
+              <a:rPr lang="zh-TW" altLang="en-US">
+                <a:solidFill>
+                  <a:srgbClr val="152C3D"/>
+                </a:solidFill>
+                <a:latin typeface="Microsoft JhengHei" panose="020B0604030504040204" pitchFamily="34" charset="-120"/>
+                <a:ea typeface="Microsoft JhengHei" panose="020B0604030504040204" pitchFamily="34" charset="-120"/>
+              </a:rPr>
+              <a:t>個案例中，</a:t>
+            </a:r>
+            <a:r>
+              <a:rPr lang="en-US" altLang="zh-TW">
+                <a:solidFill>
+                  <a:srgbClr val="152C3D"/>
+                </a:solidFill>
+                <a:latin typeface="Microsoft JhengHei" panose="020B0604030504040204" pitchFamily="34" charset="-120"/>
+                <a:ea typeface="Microsoft JhengHei" panose="020B0604030504040204" pitchFamily="34" charset="-120"/>
+              </a:rPr>
+              <a:t>4 </a:t>
+            </a:r>
+            <a:r>
+              <a:rPr lang="zh-TW" altLang="en-US">
+                <a:solidFill>
+                  <a:srgbClr val="152C3D"/>
+                </a:solidFill>
+                <a:latin typeface="Microsoft JhengHei" panose="020B0604030504040204" pitchFamily="34" charset="-120"/>
+                <a:ea typeface="Microsoft JhengHei" panose="020B0604030504040204" pitchFamily="34" charset="-120"/>
+              </a:rPr>
+              <a:t>個
+</a:t>
+            </a:r>
+            <a:r>
+              <a:rPr lang="en-US" altLang="zh-TW">
+                <a:solidFill>
+                  <a:srgbClr val="152C3D"/>
+                </a:solidFill>
+                <a:latin typeface="Microsoft JhengHei" panose="020B0604030504040204" pitchFamily="34" charset="-120"/>
+                <a:ea typeface="Microsoft JhengHei" panose="020B0604030504040204" pitchFamily="34" charset="-120"/>
+              </a:rPr>
+              <a:t>worst-margin </a:t>
+            </a:r>
+            <a:r>
+              <a:rPr lang="zh-TW" altLang="en-US">
+                <a:solidFill>
+                  <a:srgbClr val="152C3D"/>
+                </a:solidFill>
+                <a:latin typeface="Microsoft JhengHei" panose="020B0604030504040204" pitchFamily="34" charset="-120"/>
+                <a:ea typeface="Microsoft JhengHei" panose="020B0604030504040204" pitchFamily="34" charset="-120"/>
+              </a:rPr>
+              <a:t>下降
+</a:t>
+            </a:r>
+            <a:r>
+              <a:rPr lang="en-US" altLang="zh-TW">
+                <a:solidFill>
+                  <a:srgbClr val="152C3D"/>
+                </a:solidFill>
+                <a:latin typeface="Microsoft JhengHei" panose="020B0604030504040204" pitchFamily="34" charset="-120"/>
+                <a:ea typeface="Microsoft JhengHei" panose="020B0604030504040204" pitchFamily="34" charset="-120"/>
+              </a:rPr>
+              <a:t>4.7–16.9 dB</a:t>
+            </a:r>
+            <a:r>
+              <a:rPr lang="zh-TW" altLang="en-US">
+                <a:solidFill>
+                  <a:srgbClr val="152C3D"/>
+                </a:solidFill>
+                <a:latin typeface="Microsoft JhengHei" panose="020B0604030504040204" pitchFamily="34" charset="-120"/>
+                <a:ea typeface="Microsoft JhengHei" panose="020B0604030504040204" pitchFamily="34" charset="-120"/>
+              </a:rPr>
+              <a:t>。</a:t>
+            </a:r>
+          </a:p>
+        </p:txBody>
+      </p:sp>
+      <p:sp>
+        <p:nvSpPr>
+          <p:cNvPr id="13" name="文字方塊 12">
+            <a:extLst>
+              <a:ext uri="{FF2B5EF4-FFF2-40B4-BE49-F238E27FC236}">
+                <a16:creationId xmlns:a16="http://schemas.microsoft.com/office/drawing/2014/main" id="{5831836F-DE1B-8846-8D36-C7B92CDDA190}"/>
+              </a:ext>
+            </a:extLst>
+          </p:cNvPr>
+          <p:cNvSpPr txBox="1"/>
+          <p:nvPr/>
+        </p:nvSpPr>
+        <p:spPr>
+          <a:xfrm>
+            <a:off x="8191500" y="4089399"/>
+            <a:ext cx="3467100" cy="419100"/>
+          </a:xfrm>
+          <a:prstGeom prst="rect">
+            <a:avLst/>
+          </a:prstGeom>
+          <a:noFill/>
+        </p:spPr>
+        <p:txBody>
+          <a:bodyPr vert="horz" wrap="square" lIns="0" tIns="0" rIns="0" bIns="0" rtlCol="0">
+            <a:noAutofit/>
+          </a:bodyPr>
+          <a:lstStyle/>
+          <a:p>
+            <a:r>
+              <a:rPr lang="zh-TW" altLang="en-US" sz="2100" b="1">
+                <a:solidFill>
+                  <a:srgbClr val="245B85"/>
+                </a:solidFill>
+                <a:latin typeface="Microsoft JhengHei" panose="020B0604030504040204" pitchFamily="34" charset="-120"/>
+                <a:ea typeface="Microsoft JhengHei" panose="020B0604030504040204" pitchFamily="34" charset="-120"/>
+              </a:rPr>
+              <a:t>幾何規則是第一關</a:t>
+            </a:r>
+          </a:p>
+        </p:txBody>
+      </p:sp>
+      <p:sp>
+        <p:nvSpPr>
+          <p:cNvPr id="14" name="文字方塊 13">
+            <a:extLst>
+              <a:ext uri="{FF2B5EF4-FFF2-40B4-BE49-F238E27FC236}">
+                <a16:creationId xmlns:a16="http://schemas.microsoft.com/office/drawing/2014/main" id="{E7DECB80-7DF5-D9A2-1786-C23B282DEA09}"/>
+              </a:ext>
+            </a:extLst>
+          </p:cNvPr>
+          <p:cNvSpPr txBox="1"/>
+          <p:nvPr/>
+        </p:nvSpPr>
+        <p:spPr>
+          <a:xfrm>
+            <a:off x="8191500" y="4597399"/>
+            <a:ext cx="3467100" cy="1130300"/>
+          </a:xfrm>
+          <a:prstGeom prst="rect">
+            <a:avLst/>
+          </a:prstGeom>
+          <a:noFill/>
+        </p:spPr>
+        <p:txBody>
+          <a:bodyPr vert="horz" wrap="square" lIns="0" tIns="0" rIns="0" bIns="0" rtlCol="0">
+            <a:noAutofit/>
+          </a:bodyPr>
+          <a:lstStyle/>
+          <a:p>
+            <a:r>
+              <a:rPr lang="zh-TW" altLang="en-US" sz="1700">
+                <a:solidFill>
+                  <a:srgbClr val="152C3D"/>
+                </a:solidFill>
+                <a:latin typeface="Microsoft JhengHei" panose="020B0604030504040204" pitchFamily="34" charset="-120"/>
+                <a:ea typeface="Microsoft JhengHei" panose="020B0604030504040204" pitchFamily="34" charset="-120"/>
+              </a:rPr>
+              <a:t>零粉塵、金屬碎片 ≥ </a:t>
+            </a:r>
+            <a:r>
+              <a:rPr lang="en-US" altLang="zh-TW" sz="1700">
+                <a:solidFill>
+                  <a:srgbClr val="152C3D"/>
+                </a:solidFill>
+                <a:latin typeface="Microsoft JhengHei" panose="020B0604030504040204" pitchFamily="34" charset="-120"/>
+                <a:ea typeface="Microsoft JhengHei" panose="020B0604030504040204" pitchFamily="34" charset="-120"/>
+              </a:rPr>
+              <a:t>4 px</a:t>
+            </a:r>
+            <a:r>
+              <a:rPr lang="zh-TW" altLang="en-US" sz="1700">
+                <a:solidFill>
+                  <a:srgbClr val="152C3D"/>
+                </a:solidFill>
+                <a:latin typeface="Microsoft JhengHei" panose="020B0604030504040204" pitchFamily="34" charset="-120"/>
+                <a:ea typeface="Microsoft JhengHei" panose="020B0604030504040204" pitchFamily="34" charset="-120"/>
+              </a:rPr>
+              <a:t>、
+饋墊完整；實體製程
+公差仍需另行驗證。</a:t>
+            </a:r>
+          </a:p>
+        </p:txBody>
+      </p:sp>
+      <p:sp>
+        <p:nvSpPr>
+          <p:cNvPr id="15" name="文字方塊 14">
+            <a:extLst>
+              <a:ext uri="{FF2B5EF4-FFF2-40B4-BE49-F238E27FC236}">
+                <a16:creationId xmlns:a16="http://schemas.microsoft.com/office/drawing/2014/main" id="{667A84B3-25E3-2FB1-C298-13EB4023A36A}"/>
+              </a:ext>
+            </a:extLst>
+          </p:cNvPr>
+          <p:cNvSpPr txBox="1"/>
+          <p:nvPr/>
+        </p:nvSpPr>
+        <p:spPr>
+          <a:xfrm>
+            <a:off x="533400" y="6083300"/>
+            <a:ext cx="11125200" cy="228600"/>
+          </a:xfrm>
+          <a:prstGeom prst="rect">
+            <a:avLst/>
+          </a:prstGeom>
+          <a:noFill/>
+        </p:spPr>
+        <p:txBody>
+          <a:bodyPr vert="horz" wrap="square" lIns="0" tIns="0" rIns="0" bIns="0" rtlCol="0">
+            <a:noAutofit/>
+          </a:bodyPr>
+          <a:lstStyle/>
+          <a:p>
+            <a:r>
+              <a:rPr lang="zh-TW" altLang="en-US" sz="1200">
+                <a:solidFill>
+                  <a:srgbClr val="526A7D"/>
+                </a:solidFill>
+                <a:latin typeface="Microsoft JhengHei" panose="020B0604030504040204" pitchFamily="34" charset="-120"/>
+                <a:ea typeface="Microsoft JhengHei" panose="020B0604030504040204" pitchFamily="34" charset="-120"/>
+              </a:rPr>
+              <a:t>此處為像素幾何條件與 </a:t>
+            </a:r>
+            <a:r>
+              <a:rPr lang="en-US" altLang="zh-TW" sz="1200">
+                <a:solidFill>
+                  <a:srgbClr val="526A7D"/>
+                </a:solidFill>
+                <a:latin typeface="Microsoft JhengHei" panose="020B0604030504040204" pitchFamily="34" charset="-120"/>
+                <a:ea typeface="Microsoft JhengHei" panose="020B0604030504040204" pitchFamily="34" charset="-120"/>
+              </a:rPr>
+              <a:t>HFSS </a:t>
+            </a:r>
+            <a:r>
+              <a:rPr lang="zh-TW" altLang="en-US" sz="1200">
+                <a:solidFill>
+                  <a:srgbClr val="526A7D"/>
+                </a:solidFill>
+                <a:latin typeface="Microsoft JhengHei" panose="020B0604030504040204" pitchFamily="34" charset="-120"/>
+                <a:ea typeface="Microsoft JhengHei" panose="020B0604030504040204" pitchFamily="34" charset="-120"/>
+              </a:rPr>
+              <a:t>模擬驗證；製程公差及實體量測尚待驗證。</a:t>
+            </a:r>
+          </a:p>
+        </p:txBody>
+      </p:sp>
+      <p:sp>
+        <p:nvSpPr>
+          <p:cNvPr id="16" name="文字方塊 15">
+            <a:extLst>
+              <a:ext uri="{FF2B5EF4-FFF2-40B4-BE49-F238E27FC236}">
+                <a16:creationId xmlns:a16="http://schemas.microsoft.com/office/drawing/2014/main" id="{ED5A099F-2F04-02CC-9C38-BF5B5DA246E1}"/>
+              </a:ext>
+            </a:extLst>
+          </p:cNvPr>
+          <p:cNvSpPr txBox="1"/>
+          <p:nvPr/>
+        </p:nvSpPr>
+        <p:spPr>
+          <a:xfrm>
+            <a:off x="533400" y="6400800"/>
+            <a:ext cx="10541000" cy="241300"/>
+          </a:xfrm>
+          <a:prstGeom prst="rect">
+            <a:avLst/>
+          </a:prstGeom>
+          <a:noFill/>
+        </p:spPr>
+        <p:txBody>
+          <a:bodyPr vert="horz" wrap="square" lIns="0" tIns="0" rIns="0" bIns="0" rtlCol="0">
+            <a:noAutofit/>
+          </a:bodyPr>
+          <a:lstStyle/>
+          <a:p>
+            <a:r>
+              <a:rPr lang="zh-TW" altLang="en-US" sz="900">
+                <a:solidFill>
+                  <a:srgbClr val="526A7D"/>
+                </a:solidFill>
+                <a:latin typeface="Microsoft JhengHei" panose="020B0604030504040204" pitchFamily="34" charset="-120"/>
+                <a:ea typeface="Microsoft JhengHei" panose="020B0604030504040204" pitchFamily="34" charset="-120"/>
+              </a:rPr>
+              <a:t>來源：七月月報；</a:t>
+            </a:r>
+            <a:r>
+              <a:rPr lang="en-US" altLang="zh-TW" sz="900">
+                <a:solidFill>
+                  <a:srgbClr val="526A7D"/>
+                </a:solidFill>
+                <a:latin typeface="Microsoft JhengHei" panose="020B0604030504040204" pitchFamily="34" charset="-120"/>
+                <a:ea typeface="Microsoft JhengHei" panose="020B0604030504040204" pitchFamily="34" charset="-120"/>
+              </a:rPr>
+              <a:t>R7</a:t>
+            </a:r>
+            <a:r>
+              <a:rPr lang="zh-TW" altLang="en-US" sz="900">
+                <a:solidFill>
+                  <a:srgbClr val="526A7D"/>
+                </a:solidFill>
+                <a:latin typeface="Microsoft JhengHei" panose="020B0604030504040204" pitchFamily="34" charset="-120"/>
+                <a:ea typeface="Microsoft JhengHei" panose="020B0604030504040204" pitchFamily="34" charset="-120"/>
+              </a:rPr>
+              <a:t>（除塵）、</a:t>
+            </a:r>
+            <a:r>
+              <a:rPr lang="en-US" altLang="zh-TW" sz="900">
+                <a:solidFill>
+                  <a:srgbClr val="526A7D"/>
+                </a:solidFill>
+                <a:latin typeface="Microsoft JhengHei" panose="020B0604030504040204" pitchFamily="34" charset="-120"/>
+                <a:ea typeface="Microsoft JhengHei" panose="020B0604030504040204" pitchFamily="34" charset="-120"/>
+              </a:rPr>
+              <a:t>R9–R10</a:t>
+            </a:r>
+            <a:r>
+              <a:rPr lang="zh-TW" altLang="en-US" sz="900">
+                <a:solidFill>
+                  <a:srgbClr val="526A7D"/>
+                </a:solidFill>
+                <a:latin typeface="Microsoft JhengHei" panose="020B0604030504040204" pitchFamily="34" charset="-120"/>
+                <a:ea typeface="Microsoft JhengHei" panose="020B0604030504040204" pitchFamily="34" charset="-120"/>
+              </a:rPr>
+              <a:t>（部分對稱與重測）。圖為原圖樣局部，饋線朝下。</a:t>
+            </a:r>
+          </a:p>
+        </p:txBody>
+      </p:sp>
+      <p:sp>
+        <p:nvSpPr>
+          <p:cNvPr id="17" name="文字方塊 16">
+            <a:extLst>
+              <a:ext uri="{FF2B5EF4-FFF2-40B4-BE49-F238E27FC236}">
+                <a16:creationId xmlns:a16="http://schemas.microsoft.com/office/drawing/2014/main" id="{91237F0D-9D95-16D8-6DA4-2653931DBB8D}"/>
+              </a:ext>
+            </a:extLst>
+          </p:cNvPr>
+          <p:cNvSpPr txBox="1"/>
+          <p:nvPr/>
+        </p:nvSpPr>
+        <p:spPr>
+          <a:xfrm>
+            <a:off x="11341100" y="6438900"/>
+            <a:ext cx="317500" cy="228600"/>
+          </a:xfrm>
+          <a:prstGeom prst="rect">
+            <a:avLst/>
+          </a:prstGeom>
+          <a:noFill/>
+        </p:spPr>
+        <p:txBody>
+          <a:bodyPr vert="horz" wrap="square" lIns="0" tIns="0" rIns="0" bIns="0" rtlCol="0">
+            <a:noAutofit/>
+          </a:bodyPr>
+          <a:lstStyle/>
+          <a:p>
+            <a:pPr algn="r"/>
+            <a:r>
+              <a:rPr lang="en-US" altLang="zh-TW" sz="1100">
+                <a:solidFill>
+                  <a:srgbClr val="526A7D"/>
+                </a:solidFill>
+                <a:latin typeface="Microsoft JhengHei" panose="020B0604030504040204" pitchFamily="34" charset="-120"/>
+                <a:ea typeface="Microsoft JhengHei" panose="020B0604030504040204" pitchFamily="34" charset="-120"/>
+              </a:rPr>
+              <a:t>19</a:t>
+            </a:r>
+            <a:endParaRPr lang="zh-TW" altLang="en-US" sz="1100">
+              <a:solidFill>
+                <a:srgbClr val="526A7D"/>
+              </a:solidFill>
+              <a:latin typeface="Microsoft JhengHei" panose="020B0604030504040204" pitchFamily="34" charset="-120"/>
+              <a:ea typeface="Microsoft JhengHei" panose="020B0604030504040204" pitchFamily="34" charset="-120"/>
+            </a:endParaRPr>
+          </a:p>
+        </p:txBody>
+      </p:sp>
+    </p:spTree>
+    <p:extLst>
+      <p:ext uri="{BB962C8B-B14F-4D97-AF65-F5344CB8AC3E}">
+        <p14:creationId xmlns:p14="http://schemas.microsoft.com/office/powerpoint/2010/main" val="1682443980"/>
       </p:ext>
     </p:extLst>
   </p:cSld>
@@ -15715,6 +18046,2892 @@
         </p:txBody>
       </p:sp>
     </p:spTree>
+  </p:cSld>
+  <p:clrMapOvr>
+    <a:masterClrMapping/>
+  </p:clrMapOvr>
+</p:sld>
+</file>
+
+<file path=ppt/slides/slide20.xml><?xml version="1.0" encoding="utf-8"?>
+<p:sld xmlns:a="http://schemas.openxmlformats.org/drawingml/2006/main" xmlns:r="http://schemas.openxmlformats.org/officeDocument/2006/relationships" xmlns:p="http://schemas.openxmlformats.org/presentationml/2006/main">
+  <p:cSld>
+    <p:spTree>
+      <p:nvGrpSpPr>
+        <p:cNvPr id="1" name=""/>
+        <p:cNvGrpSpPr/>
+        <p:nvPr/>
+      </p:nvGrpSpPr>
+      <p:grpSpPr>
+        <a:xfrm>
+          <a:off x="0" y="0"/>
+          <a:ext cx="0" cy="0"/>
+          <a:chOff x="0" y="0"/>
+          <a:chExt cx="0" cy="0"/>
+        </a:xfrm>
+      </p:grpSpPr>
+      <p:sp>
+        <p:nvSpPr>
+          <p:cNvPr id="2" name="recap_title">
+            <a:extLst>
+              <a:ext uri="{FF2B5EF4-FFF2-40B4-BE49-F238E27FC236}">
+                <a16:creationId xmlns:a16="http://schemas.microsoft.com/office/drawing/2014/main" id="{71B1E2CF-813C-5B53-A4B0-7A7256044B42}"/>
+              </a:ext>
+            </a:extLst>
+          </p:cNvPr>
+          <p:cNvSpPr txBox="1"/>
+          <p:nvPr/>
+        </p:nvSpPr>
+        <p:spPr>
+          <a:xfrm>
+            <a:off x="533400" y="279399"/>
+            <a:ext cx="11112500" cy="584200"/>
+          </a:xfrm>
+          <a:prstGeom prst="rect">
+            <a:avLst/>
+          </a:prstGeom>
+          <a:noFill/>
+        </p:spPr>
+        <p:txBody>
+          <a:bodyPr vert="horz" wrap="square" lIns="0" tIns="0" rIns="0" bIns="0" rtlCol="0">
+            <a:noAutofit/>
+          </a:bodyPr>
+          <a:lstStyle/>
+          <a:p>
+            <a:r>
+              <a:rPr lang="zh-TW" altLang="en-US" sz="3000" b="1">
+                <a:solidFill>
+                  <a:srgbClr val="152C3D"/>
+                </a:solidFill>
+                <a:latin typeface="Microsoft JhengHei" panose="020B0604030504040204" pitchFamily="34" charset="-120"/>
+                <a:ea typeface="Microsoft JhengHei" panose="020B0604030504040204" pitchFamily="34" charset="-120"/>
+              </a:rPr>
+              <a:t>七月：合格設計的款式多樣性</a:t>
+            </a:r>
+          </a:p>
+        </p:txBody>
+      </p:sp>
+      <p:cxnSp>
+        <p:nvCxnSpPr>
+          <p:cNvPr id="3" name="直線接點 2">
+            <a:extLst>
+              <a:ext uri="{FF2B5EF4-FFF2-40B4-BE49-F238E27FC236}">
+                <a16:creationId xmlns:a16="http://schemas.microsoft.com/office/drawing/2014/main" id="{43326402-19DD-9179-463C-3865E4B5CB6D}"/>
+              </a:ext>
+            </a:extLst>
+          </p:cNvPr>
+          <p:cNvCxnSpPr/>
+          <p:nvPr/>
+        </p:nvCxnSpPr>
+        <p:spPr>
+          <a:xfrm>
+            <a:off x="533400" y="1041400"/>
+            <a:ext cx="11125200" cy="0"/>
+          </a:xfrm>
+          <a:prstGeom prst="line">
+            <a:avLst/>
+          </a:prstGeom>
+          <a:ln w="8890">
+            <a:solidFill>
+              <a:srgbClr val="C6D5E1"/>
+            </a:solidFill>
+          </a:ln>
+          <a:effectLst/>
+          <a:extLst>
+            <a:ext uri="{AF507438-7753-43E0-B8FC-AC1667EBCBE1}">
+              <a14:hiddenEffects xmlns:a14="http://schemas.microsoft.com/office/drawing/2010/main">
+                <a:effectLst>
+                  <a:outerShdw blurRad="40000" dist="20000" dir="5400000" rotWithShape="0">
+                    <a:srgbClr val="000000">
+                      <a:alpha val="38000"/>
+                    </a:srgbClr>
+                  </a:outerShdw>
+                </a:effectLst>
+              </a14:hiddenEffects>
+            </a:ext>
+          </a:extLst>
+        </p:spPr>
+        <p:style>
+          <a:lnRef idx="2">
+            <a:schemeClr val="accent1"/>
+          </a:lnRef>
+          <a:fillRef idx="0">
+            <a:schemeClr val="accent1"/>
+          </a:fillRef>
+          <a:effectRef idx="1">
+            <a:schemeClr val="accent1"/>
+          </a:effectRef>
+          <a:fontRef idx="minor">
+            <a:schemeClr val="tx1"/>
+          </a:fontRef>
+        </p:style>
+      </p:cxnSp>
+      <p:cxnSp>
+        <p:nvCxnSpPr>
+          <p:cNvPr id="4" name="直線接點 3">
+            <a:extLst>
+              <a:ext uri="{FF2B5EF4-FFF2-40B4-BE49-F238E27FC236}">
+                <a16:creationId xmlns:a16="http://schemas.microsoft.com/office/drawing/2014/main" id="{6FBB6574-791C-A898-F5A6-41D8113BE7CC}"/>
+              </a:ext>
+            </a:extLst>
+          </p:cNvPr>
+          <p:cNvCxnSpPr/>
+          <p:nvPr/>
+        </p:nvCxnSpPr>
+        <p:spPr>
+          <a:xfrm>
+            <a:off x="533400" y="1041400"/>
+            <a:ext cx="1244600" cy="0"/>
+          </a:xfrm>
+          <a:prstGeom prst="line">
+            <a:avLst/>
+          </a:prstGeom>
+          <a:ln w="29210">
+            <a:solidFill>
+              <a:srgbClr val="245B85"/>
+            </a:solidFill>
+          </a:ln>
+          <a:effectLst/>
+          <a:extLst>
+            <a:ext uri="{AF507438-7753-43E0-B8FC-AC1667EBCBE1}">
+              <a14:hiddenEffects xmlns:a14="http://schemas.microsoft.com/office/drawing/2010/main">
+                <a:effectLst>
+                  <a:outerShdw blurRad="40000" dist="20000" dir="5400000" rotWithShape="0">
+                    <a:srgbClr val="000000">
+                      <a:alpha val="38000"/>
+                    </a:srgbClr>
+                  </a:outerShdw>
+                </a:effectLst>
+              </a14:hiddenEffects>
+            </a:ext>
+          </a:extLst>
+        </p:spPr>
+        <p:style>
+          <a:lnRef idx="2">
+            <a:schemeClr val="accent1"/>
+          </a:lnRef>
+          <a:fillRef idx="0">
+            <a:schemeClr val="accent1"/>
+          </a:fillRef>
+          <a:effectRef idx="1">
+            <a:schemeClr val="accent1"/>
+          </a:effectRef>
+          <a:fontRef idx="minor">
+            <a:schemeClr val="tx1"/>
+          </a:fontRef>
+        </p:style>
+      </p:cxnSp>
+      <p:sp>
+        <p:nvSpPr>
+          <p:cNvPr id="5" name="文字方塊 4">
+            <a:extLst>
+              <a:ext uri="{FF2B5EF4-FFF2-40B4-BE49-F238E27FC236}">
+                <a16:creationId xmlns:a16="http://schemas.microsoft.com/office/drawing/2014/main" id="{1FEA98D1-5B29-A623-6560-69D3C456C903}"/>
+              </a:ext>
+            </a:extLst>
+          </p:cNvPr>
+          <p:cNvSpPr txBox="1"/>
+          <p:nvPr/>
+        </p:nvSpPr>
+        <p:spPr>
+          <a:xfrm>
+            <a:off x="533400" y="1371599"/>
+            <a:ext cx="11125200" cy="393700"/>
+          </a:xfrm>
+          <a:prstGeom prst="rect">
+            <a:avLst/>
+          </a:prstGeom>
+          <a:noFill/>
+        </p:spPr>
+        <p:txBody>
+          <a:bodyPr vert="horz" wrap="square" lIns="0" tIns="0" rIns="0" bIns="0" rtlCol="0">
+            <a:noAutofit/>
+          </a:bodyPr>
+          <a:lstStyle/>
+          <a:p>
+            <a:r>
+              <a:rPr lang="zh-TW" altLang="en-US">
+                <a:solidFill>
+                  <a:srgbClr val="152C3D"/>
+                </a:solidFill>
+                <a:latin typeface="Microsoft JhengHei" panose="020B0604030504040204" pitchFamily="34" charset="-120"/>
+                <a:ea typeface="Microsoft JhengHei" panose="020B0604030504040204" pitchFamily="34" charset="-120"/>
+              </a:rPr>
+              <a:t>七月報告快照：</a:t>
+            </a:r>
+            <a:r>
+              <a:rPr lang="en-US" altLang="zh-TW">
+                <a:solidFill>
+                  <a:srgbClr val="152C3D"/>
+                </a:solidFill>
+                <a:latin typeface="Microsoft JhengHei" panose="020B0604030504040204" pitchFamily="34" charset="-120"/>
+                <a:ea typeface="Microsoft JhengHei" panose="020B0604030504040204" pitchFamily="34" charset="-120"/>
+              </a:rPr>
+              <a:t>1,575 </a:t>
+            </a:r>
+            <a:r>
+              <a:rPr lang="zh-TW" altLang="en-US">
+                <a:solidFill>
+                  <a:srgbClr val="152C3D"/>
+                </a:solidFill>
+                <a:latin typeface="Microsoft JhengHei" panose="020B0604030504040204" pitchFamily="34" charset="-120"/>
+                <a:ea typeface="Microsoft JhengHei" panose="020B0604030504040204" pitchFamily="34" charset="-120"/>
+              </a:rPr>
+              <a:t>筆帶內與方向圖合格解，整理為 </a:t>
+            </a:r>
+            <a:r>
+              <a:rPr lang="en-US" altLang="zh-TW">
+                <a:solidFill>
+                  <a:srgbClr val="152C3D"/>
+                </a:solidFill>
+                <a:latin typeface="Microsoft JhengHei" panose="020B0604030504040204" pitchFamily="34" charset="-120"/>
+                <a:ea typeface="Microsoft JhengHei" panose="020B0604030504040204" pitchFamily="34" charset="-120"/>
+              </a:rPr>
+              <a:t>66 </a:t>
+            </a:r>
+            <a:r>
+              <a:rPr lang="zh-TW" altLang="en-US">
+                <a:solidFill>
+                  <a:srgbClr val="152C3D"/>
+                </a:solidFill>
+                <a:latin typeface="Microsoft JhengHei" panose="020B0604030504040204" pitchFamily="34" charset="-120"/>
+                <a:ea typeface="Microsoft JhengHei" panose="020B0604030504040204" pitchFamily="34" charset="-120"/>
+              </a:rPr>
+              <a:t>種款式</a:t>
+            </a:r>
+          </a:p>
+        </p:txBody>
+      </p:sp>
+      <p:sp>
+        <p:nvSpPr>
+          <p:cNvPr id="6" name="文字方塊 5">
+            <a:extLst>
+              <a:ext uri="{FF2B5EF4-FFF2-40B4-BE49-F238E27FC236}">
+                <a16:creationId xmlns:a16="http://schemas.microsoft.com/office/drawing/2014/main" id="{3D25494C-FC91-FFE1-D20B-26CDD4CBC549}"/>
+              </a:ext>
+            </a:extLst>
+          </p:cNvPr>
+          <p:cNvSpPr txBox="1"/>
+          <p:nvPr/>
+        </p:nvSpPr>
+        <p:spPr>
+          <a:xfrm>
+            <a:off x="533400" y="1879599"/>
+            <a:ext cx="5384800" cy="393700"/>
+          </a:xfrm>
+          <a:prstGeom prst="rect">
+            <a:avLst/>
+          </a:prstGeom>
+          <a:noFill/>
+        </p:spPr>
+        <p:txBody>
+          <a:bodyPr vert="horz" wrap="square" lIns="0" tIns="0" rIns="0" bIns="0" rtlCol="0">
+            <a:noAutofit/>
+          </a:bodyPr>
+          <a:lstStyle/>
+          <a:p>
+            <a:r>
+              <a:rPr lang="zh-TW" altLang="en-US" sz="2000" b="1">
+                <a:solidFill>
+                  <a:srgbClr val="245B85"/>
+                </a:solidFill>
+                <a:latin typeface="Microsoft JhengHei" panose="020B0604030504040204" pitchFamily="34" charset="-120"/>
+                <a:ea typeface="Microsoft JhengHei" panose="020B0604030504040204" pitchFamily="34" charset="-120"/>
+              </a:rPr>
+              <a:t>款式 </a:t>
+            </a:r>
+            <a:r>
+              <a:rPr lang="en-US" altLang="zh-TW" sz="2000" b="1">
+                <a:solidFill>
+                  <a:srgbClr val="245B85"/>
+                </a:solidFill>
+                <a:latin typeface="Microsoft JhengHei" panose="020B0604030504040204" pitchFamily="34" charset="-120"/>
+                <a:ea typeface="Microsoft JhengHei" panose="020B0604030504040204" pitchFamily="34" charset="-120"/>
+              </a:rPr>
+              <a:t>1</a:t>
+            </a:r>
+            <a:r>
+              <a:rPr lang="zh-TW" altLang="en-US" sz="2000" b="1">
+                <a:solidFill>
+                  <a:srgbClr val="245B85"/>
+                </a:solidFill>
+                <a:latin typeface="Microsoft JhengHei" panose="020B0604030504040204" pitchFamily="34" charset="-120"/>
+                <a:ea typeface="Microsoft JhengHei" panose="020B0604030504040204" pitchFamily="34" charset="-120"/>
+              </a:rPr>
+              <a:t>｜</a:t>
+            </a:r>
+            <a:r>
+              <a:rPr lang="en-US" altLang="zh-TW" sz="2000" b="1">
+                <a:solidFill>
+                  <a:srgbClr val="245B85"/>
+                </a:solidFill>
+                <a:latin typeface="Microsoft JhengHei" panose="020B0604030504040204" pitchFamily="34" charset="-120"/>
+                <a:ea typeface="Microsoft JhengHei" panose="020B0604030504040204" pitchFamily="34" charset="-120"/>
+              </a:rPr>
+              <a:t>607 </a:t>
+            </a:r>
+            <a:r>
+              <a:rPr lang="zh-TW" altLang="en-US" sz="2000" b="1">
+                <a:solidFill>
+                  <a:srgbClr val="245B85"/>
+                </a:solidFill>
+                <a:latin typeface="Microsoft JhengHei" panose="020B0604030504040204" pitchFamily="34" charset="-120"/>
+                <a:ea typeface="Microsoft JhengHei" panose="020B0604030504040204" pitchFamily="34" charset="-120"/>
+              </a:rPr>
+              <a:t>個變體</a:t>
+            </a:r>
+          </a:p>
+        </p:txBody>
+      </p:sp>
+      <p:sp>
+        <p:nvSpPr>
+          <p:cNvPr id="7" name="文字方塊 6">
+            <a:extLst>
+              <a:ext uri="{FF2B5EF4-FFF2-40B4-BE49-F238E27FC236}">
+                <a16:creationId xmlns:a16="http://schemas.microsoft.com/office/drawing/2014/main" id="{D8842C07-21CA-5977-580E-C3959F8F9440}"/>
+              </a:ext>
+            </a:extLst>
+          </p:cNvPr>
+          <p:cNvSpPr txBox="1"/>
+          <p:nvPr/>
+        </p:nvSpPr>
+        <p:spPr>
+          <a:xfrm>
+            <a:off x="6286500" y="1879599"/>
+            <a:ext cx="5372100" cy="393700"/>
+          </a:xfrm>
+          <a:prstGeom prst="rect">
+            <a:avLst/>
+          </a:prstGeom>
+          <a:noFill/>
+        </p:spPr>
+        <p:txBody>
+          <a:bodyPr vert="horz" wrap="square" lIns="0" tIns="0" rIns="0" bIns="0" rtlCol="0">
+            <a:noAutofit/>
+          </a:bodyPr>
+          <a:lstStyle/>
+          <a:p>
+            <a:r>
+              <a:rPr lang="zh-TW" altLang="en-US" sz="2000" b="1">
+                <a:solidFill>
+                  <a:srgbClr val="245B85"/>
+                </a:solidFill>
+                <a:latin typeface="Microsoft JhengHei" panose="020B0604030504040204" pitchFamily="34" charset="-120"/>
+                <a:ea typeface="Microsoft JhengHei" panose="020B0604030504040204" pitchFamily="34" charset="-120"/>
+              </a:rPr>
+              <a:t>款式 </a:t>
+            </a:r>
+            <a:r>
+              <a:rPr lang="en-US" altLang="zh-TW" sz="2000" b="1">
+                <a:solidFill>
+                  <a:srgbClr val="245B85"/>
+                </a:solidFill>
+                <a:latin typeface="Microsoft JhengHei" panose="020B0604030504040204" pitchFamily="34" charset="-120"/>
+                <a:ea typeface="Microsoft JhengHei" panose="020B0604030504040204" pitchFamily="34" charset="-120"/>
+              </a:rPr>
+              <a:t>2</a:t>
+            </a:r>
+            <a:r>
+              <a:rPr lang="zh-TW" altLang="en-US" sz="2000" b="1">
+                <a:solidFill>
+                  <a:srgbClr val="245B85"/>
+                </a:solidFill>
+                <a:latin typeface="Microsoft JhengHei" panose="020B0604030504040204" pitchFamily="34" charset="-120"/>
+                <a:ea typeface="Microsoft JhengHei" panose="020B0604030504040204" pitchFamily="34" charset="-120"/>
+              </a:rPr>
+              <a:t>｜</a:t>
+            </a:r>
+            <a:r>
+              <a:rPr lang="en-US" altLang="zh-TW" sz="2000" b="1">
+                <a:solidFill>
+                  <a:srgbClr val="245B85"/>
+                </a:solidFill>
+                <a:latin typeface="Microsoft JhengHei" panose="020B0604030504040204" pitchFamily="34" charset="-120"/>
+                <a:ea typeface="Microsoft JhengHei" panose="020B0604030504040204" pitchFamily="34" charset="-120"/>
+              </a:rPr>
+              <a:t>412 </a:t>
+            </a:r>
+            <a:r>
+              <a:rPr lang="zh-TW" altLang="en-US" sz="2000" b="1">
+                <a:solidFill>
+                  <a:srgbClr val="245B85"/>
+                </a:solidFill>
+                <a:latin typeface="Microsoft JhengHei" panose="020B0604030504040204" pitchFamily="34" charset="-120"/>
+                <a:ea typeface="Microsoft JhengHei" panose="020B0604030504040204" pitchFamily="34" charset="-120"/>
+              </a:rPr>
+              <a:t>個變體</a:t>
+            </a:r>
+          </a:p>
+        </p:txBody>
+      </p:sp>
+      <p:pic>
+        <p:nvPicPr>
+          <p:cNvPr id="9" name="圖片 8">
+            <a:extLst>
+              <a:ext uri="{FF2B5EF4-FFF2-40B4-BE49-F238E27FC236}">
+                <a16:creationId xmlns:a16="http://schemas.microsoft.com/office/drawing/2014/main" id="{79533D78-0C36-104E-C2C9-674ED37D7F02}"/>
+              </a:ext>
+            </a:extLst>
+          </p:cNvPr>
+          <p:cNvPicPr>
+            <a:picLocks noChangeAspect="1"/>
+          </p:cNvPicPr>
+          <p:nvPr/>
+        </p:nvPicPr>
+        <p:blipFill>
+          <a:blip r:embed="rId3"/>
+          <a:srcRect l="3361" t="8163" r="80567" b="56803"/>
+          <a:stretch>
+            <a:fillRect/>
+          </a:stretch>
+        </p:blipFill>
+        <p:spPr>
+          <a:xfrm>
+            <a:off x="546577" y="2362200"/>
+            <a:ext cx="2691447" cy="2717800"/>
+          </a:xfrm>
+          <a:prstGeom prst="rect">
+            <a:avLst/>
+          </a:prstGeom>
+        </p:spPr>
+      </p:pic>
+      <p:pic>
+        <p:nvPicPr>
+          <p:cNvPr id="11" name="圖片 10">
+            <a:extLst>
+              <a:ext uri="{FF2B5EF4-FFF2-40B4-BE49-F238E27FC236}">
+                <a16:creationId xmlns:a16="http://schemas.microsoft.com/office/drawing/2014/main" id="{C4FD156B-6830-EBBC-81F0-1D519D50B833}"/>
+              </a:ext>
+            </a:extLst>
+          </p:cNvPr>
+          <p:cNvPicPr>
+            <a:picLocks noChangeAspect="1"/>
+          </p:cNvPicPr>
+          <p:nvPr/>
+        </p:nvPicPr>
+        <p:blipFill>
+          <a:blip r:embed="rId3"/>
+          <a:srcRect l="3361" t="59864" r="80567" b="5215"/>
+          <a:stretch>
+            <a:fillRect/>
+          </a:stretch>
+        </p:blipFill>
+        <p:spPr>
+          <a:xfrm>
+            <a:off x="6295300" y="2362200"/>
+            <a:ext cx="2700200" cy="2717800"/>
+          </a:xfrm>
+          <a:prstGeom prst="rect">
+            <a:avLst/>
+          </a:prstGeom>
+        </p:spPr>
+      </p:pic>
+      <p:sp>
+        <p:nvSpPr>
+          <p:cNvPr id="12" name="文字方塊 11">
+            <a:extLst>
+              <a:ext uri="{FF2B5EF4-FFF2-40B4-BE49-F238E27FC236}">
+                <a16:creationId xmlns:a16="http://schemas.microsoft.com/office/drawing/2014/main" id="{8FA3278D-81CE-64DD-C8C0-75C42AB33E32}"/>
+              </a:ext>
+            </a:extLst>
+          </p:cNvPr>
+          <p:cNvSpPr txBox="1"/>
+          <p:nvPr/>
+        </p:nvSpPr>
+        <p:spPr>
+          <a:xfrm>
+            <a:off x="3606800" y="2311399"/>
+            <a:ext cx="2336800" cy="317500"/>
+          </a:xfrm>
+          <a:prstGeom prst="rect">
+            <a:avLst/>
+          </a:prstGeom>
+          <a:noFill/>
+        </p:spPr>
+        <p:txBody>
+          <a:bodyPr vert="horz" wrap="square" lIns="0" tIns="0" rIns="0" bIns="0" rtlCol="0">
+            <a:noAutofit/>
+          </a:bodyPr>
+          <a:lstStyle/>
+          <a:p>
+            <a:r>
+              <a:rPr lang="zh-TW" altLang="en-US" sz="1400">
+                <a:solidFill>
+                  <a:srgbClr val="526A7D"/>
+                </a:solidFill>
+                <a:latin typeface="Microsoft JhengHei" panose="020B0604030504040204" pitchFamily="34" charset="-120"/>
+                <a:ea typeface="Microsoft JhengHei" panose="020B0604030504040204" pitchFamily="34" charset="-120"/>
+              </a:rPr>
+              <a:t>代表設計的電性餘裕</a:t>
+            </a:r>
+          </a:p>
+        </p:txBody>
+      </p:sp>
+      <p:sp>
+        <p:nvSpPr>
+          <p:cNvPr id="13" name="文字方塊 12">
+            <a:extLst>
+              <a:ext uri="{FF2B5EF4-FFF2-40B4-BE49-F238E27FC236}">
+                <a16:creationId xmlns:a16="http://schemas.microsoft.com/office/drawing/2014/main" id="{7BB191DE-43ED-5839-5CF1-89ECFEA8E677}"/>
+              </a:ext>
+            </a:extLst>
+          </p:cNvPr>
+          <p:cNvSpPr txBox="1"/>
+          <p:nvPr/>
+        </p:nvSpPr>
+        <p:spPr>
+          <a:xfrm>
+            <a:off x="9359900" y="2311399"/>
+            <a:ext cx="2311400" cy="317500"/>
+          </a:xfrm>
+          <a:prstGeom prst="rect">
+            <a:avLst/>
+          </a:prstGeom>
+          <a:noFill/>
+        </p:spPr>
+        <p:txBody>
+          <a:bodyPr vert="horz" wrap="square" lIns="0" tIns="0" rIns="0" bIns="0" rtlCol="0">
+            <a:noAutofit/>
+          </a:bodyPr>
+          <a:lstStyle/>
+          <a:p>
+            <a:r>
+              <a:rPr lang="zh-TW" altLang="en-US" sz="1400">
+                <a:solidFill>
+                  <a:srgbClr val="526A7D"/>
+                </a:solidFill>
+                <a:latin typeface="Microsoft JhengHei" panose="020B0604030504040204" pitchFamily="34" charset="-120"/>
+                <a:ea typeface="Microsoft JhengHei" panose="020B0604030504040204" pitchFamily="34" charset="-120"/>
+              </a:rPr>
+              <a:t>代表設計的電性餘裕</a:t>
+            </a:r>
+          </a:p>
+        </p:txBody>
+      </p:sp>
+      <p:sp>
+        <p:nvSpPr>
+          <p:cNvPr id="14" name="文字方塊 13">
+            <a:extLst>
+              <a:ext uri="{FF2B5EF4-FFF2-40B4-BE49-F238E27FC236}">
+                <a16:creationId xmlns:a16="http://schemas.microsoft.com/office/drawing/2014/main" id="{80C3237C-82F0-DCE5-B222-B4A0EA7E9D9E}"/>
+              </a:ext>
+            </a:extLst>
+          </p:cNvPr>
+          <p:cNvSpPr txBox="1"/>
+          <p:nvPr/>
+        </p:nvSpPr>
+        <p:spPr>
+          <a:xfrm>
+            <a:off x="3606800" y="2844799"/>
+            <a:ext cx="2336800" cy="419100"/>
+          </a:xfrm>
+          <a:prstGeom prst="rect">
+            <a:avLst/>
+          </a:prstGeom>
+          <a:noFill/>
+        </p:spPr>
+        <p:txBody>
+          <a:bodyPr vert="horz" wrap="square" lIns="0" tIns="0" rIns="0" bIns="0" rtlCol="0">
+            <a:noAutofit/>
+          </a:bodyPr>
+          <a:lstStyle/>
+          <a:p>
+            <a:r>
+              <a:rPr lang="en-US" altLang="zh-TW" b="1">
+                <a:solidFill>
+                  <a:srgbClr val="152C3D"/>
+                </a:solidFill>
+                <a:latin typeface="Microsoft JhengHei" panose="020B0604030504040204" pitchFamily="34" charset="-120"/>
+                <a:ea typeface="Microsoft JhengHei" panose="020B0604030504040204" pitchFamily="34" charset="-120"/>
+              </a:rPr>
+              <a:t>S11   +1.11 dB</a:t>
+            </a:r>
+            <a:endParaRPr lang="zh-TW" altLang="en-US" b="1">
+              <a:solidFill>
+                <a:srgbClr val="152C3D"/>
+              </a:solidFill>
+              <a:latin typeface="Microsoft JhengHei" panose="020B0604030504040204" pitchFamily="34" charset="-120"/>
+              <a:ea typeface="Microsoft JhengHei" panose="020B0604030504040204" pitchFamily="34" charset="-120"/>
+            </a:endParaRPr>
+          </a:p>
+        </p:txBody>
+      </p:sp>
+      <p:sp>
+        <p:nvSpPr>
+          <p:cNvPr id="15" name="文字方塊 14">
+            <a:extLst>
+              <a:ext uri="{FF2B5EF4-FFF2-40B4-BE49-F238E27FC236}">
+                <a16:creationId xmlns:a16="http://schemas.microsoft.com/office/drawing/2014/main" id="{C680AE8E-2F7D-A2B3-F868-4FDBE8739091}"/>
+              </a:ext>
+            </a:extLst>
+          </p:cNvPr>
+          <p:cNvSpPr txBox="1"/>
+          <p:nvPr/>
+        </p:nvSpPr>
+        <p:spPr>
+          <a:xfrm>
+            <a:off x="3606800" y="3467099"/>
+            <a:ext cx="2336800" cy="419100"/>
+          </a:xfrm>
+          <a:prstGeom prst="rect">
+            <a:avLst/>
+          </a:prstGeom>
+          <a:noFill/>
+        </p:spPr>
+        <p:txBody>
+          <a:bodyPr vert="horz" wrap="square" lIns="0" tIns="0" rIns="0" bIns="0" rtlCol="0">
+            <a:noAutofit/>
+          </a:bodyPr>
+          <a:lstStyle/>
+          <a:p>
+            <a:r>
+              <a:rPr lang="en-US" altLang="zh-TW" b="1">
+                <a:solidFill>
+                  <a:srgbClr val="152C3D"/>
+                </a:solidFill>
+                <a:latin typeface="Microsoft JhengHei" panose="020B0604030504040204" pitchFamily="34" charset="-120"/>
+                <a:ea typeface="Microsoft JhengHei" panose="020B0604030504040204" pitchFamily="34" charset="-120"/>
+              </a:rPr>
+              <a:t>Gain  +0.05 dB</a:t>
+            </a:r>
+            <a:endParaRPr lang="zh-TW" altLang="en-US" b="1">
+              <a:solidFill>
+                <a:srgbClr val="152C3D"/>
+              </a:solidFill>
+              <a:latin typeface="Microsoft JhengHei" panose="020B0604030504040204" pitchFamily="34" charset="-120"/>
+              <a:ea typeface="Microsoft JhengHei" panose="020B0604030504040204" pitchFamily="34" charset="-120"/>
+            </a:endParaRPr>
+          </a:p>
+        </p:txBody>
+      </p:sp>
+      <p:sp>
+        <p:nvSpPr>
+          <p:cNvPr id="16" name="文字方塊 15">
+            <a:extLst>
+              <a:ext uri="{FF2B5EF4-FFF2-40B4-BE49-F238E27FC236}">
+                <a16:creationId xmlns:a16="http://schemas.microsoft.com/office/drawing/2014/main" id="{710D2DA8-5329-7F62-1B21-D3392B662A38}"/>
+              </a:ext>
+            </a:extLst>
+          </p:cNvPr>
+          <p:cNvSpPr txBox="1"/>
+          <p:nvPr/>
+        </p:nvSpPr>
+        <p:spPr>
+          <a:xfrm>
+            <a:off x="3606800" y="4089399"/>
+            <a:ext cx="2336800" cy="419100"/>
+          </a:xfrm>
+          <a:prstGeom prst="rect">
+            <a:avLst/>
+          </a:prstGeom>
+          <a:noFill/>
+        </p:spPr>
+        <p:txBody>
+          <a:bodyPr vert="horz" wrap="square" lIns="0" tIns="0" rIns="0" bIns="0" rtlCol="0">
+            <a:noAutofit/>
+          </a:bodyPr>
+          <a:lstStyle/>
+          <a:p>
+            <a:r>
+              <a:rPr lang="en-US" altLang="zh-TW" b="1">
+                <a:solidFill>
+                  <a:srgbClr val="152C3D"/>
+                </a:solidFill>
+                <a:latin typeface="Microsoft JhengHei" panose="020B0604030504040204" pitchFamily="34" charset="-120"/>
+                <a:ea typeface="Microsoft JhengHei" panose="020B0604030504040204" pitchFamily="34" charset="-120"/>
+              </a:rPr>
+              <a:t>Rad   +0.36 dB</a:t>
+            </a:r>
+            <a:endParaRPr lang="zh-TW" altLang="en-US" b="1">
+              <a:solidFill>
+                <a:srgbClr val="152C3D"/>
+              </a:solidFill>
+              <a:latin typeface="Microsoft JhengHei" panose="020B0604030504040204" pitchFamily="34" charset="-120"/>
+              <a:ea typeface="Microsoft JhengHei" panose="020B0604030504040204" pitchFamily="34" charset="-120"/>
+            </a:endParaRPr>
+          </a:p>
+        </p:txBody>
+      </p:sp>
+      <p:sp>
+        <p:nvSpPr>
+          <p:cNvPr id="17" name="文字方塊 16">
+            <a:extLst>
+              <a:ext uri="{FF2B5EF4-FFF2-40B4-BE49-F238E27FC236}">
+                <a16:creationId xmlns:a16="http://schemas.microsoft.com/office/drawing/2014/main" id="{7DA16DED-A230-65E5-579B-CAB52FD9C97A}"/>
+              </a:ext>
+            </a:extLst>
+          </p:cNvPr>
+          <p:cNvSpPr txBox="1"/>
+          <p:nvPr/>
+        </p:nvSpPr>
+        <p:spPr>
+          <a:xfrm>
+            <a:off x="9359900" y="2844799"/>
+            <a:ext cx="2336800" cy="419100"/>
+          </a:xfrm>
+          <a:prstGeom prst="rect">
+            <a:avLst/>
+          </a:prstGeom>
+          <a:noFill/>
+        </p:spPr>
+        <p:txBody>
+          <a:bodyPr vert="horz" wrap="square" lIns="0" tIns="0" rIns="0" bIns="0" rtlCol="0">
+            <a:noAutofit/>
+          </a:bodyPr>
+          <a:lstStyle/>
+          <a:p>
+            <a:r>
+              <a:rPr lang="en-US" altLang="zh-TW" b="1">
+                <a:solidFill>
+                  <a:srgbClr val="152C3D"/>
+                </a:solidFill>
+                <a:latin typeface="Microsoft JhengHei" panose="020B0604030504040204" pitchFamily="34" charset="-120"/>
+                <a:ea typeface="Microsoft JhengHei" panose="020B0604030504040204" pitchFamily="34" charset="-120"/>
+              </a:rPr>
+              <a:t>S11   +1.19 dB</a:t>
+            </a:r>
+            <a:endParaRPr lang="zh-TW" altLang="en-US" b="1">
+              <a:solidFill>
+                <a:srgbClr val="152C3D"/>
+              </a:solidFill>
+              <a:latin typeface="Microsoft JhengHei" panose="020B0604030504040204" pitchFamily="34" charset="-120"/>
+              <a:ea typeface="Microsoft JhengHei" panose="020B0604030504040204" pitchFamily="34" charset="-120"/>
+            </a:endParaRPr>
+          </a:p>
+        </p:txBody>
+      </p:sp>
+      <p:sp>
+        <p:nvSpPr>
+          <p:cNvPr id="18" name="文字方塊 17">
+            <a:extLst>
+              <a:ext uri="{FF2B5EF4-FFF2-40B4-BE49-F238E27FC236}">
+                <a16:creationId xmlns:a16="http://schemas.microsoft.com/office/drawing/2014/main" id="{B653F149-9D20-AD84-D54B-478FBBCC93D3}"/>
+              </a:ext>
+            </a:extLst>
+          </p:cNvPr>
+          <p:cNvSpPr txBox="1"/>
+          <p:nvPr/>
+        </p:nvSpPr>
+        <p:spPr>
+          <a:xfrm>
+            <a:off x="9359900" y="3467099"/>
+            <a:ext cx="2336800" cy="419100"/>
+          </a:xfrm>
+          <a:prstGeom prst="rect">
+            <a:avLst/>
+          </a:prstGeom>
+          <a:noFill/>
+        </p:spPr>
+        <p:txBody>
+          <a:bodyPr vert="horz" wrap="square" lIns="0" tIns="0" rIns="0" bIns="0" rtlCol="0">
+            <a:noAutofit/>
+          </a:bodyPr>
+          <a:lstStyle/>
+          <a:p>
+            <a:r>
+              <a:rPr lang="en-US" altLang="zh-TW" b="1">
+                <a:solidFill>
+                  <a:srgbClr val="152C3D"/>
+                </a:solidFill>
+                <a:latin typeface="Microsoft JhengHei" panose="020B0604030504040204" pitchFamily="34" charset="-120"/>
+                <a:ea typeface="Microsoft JhengHei" panose="020B0604030504040204" pitchFamily="34" charset="-120"/>
+              </a:rPr>
+              <a:t>Gain  +0.15 dB</a:t>
+            </a:r>
+            <a:endParaRPr lang="zh-TW" altLang="en-US" b="1">
+              <a:solidFill>
+                <a:srgbClr val="152C3D"/>
+              </a:solidFill>
+              <a:latin typeface="Microsoft JhengHei" panose="020B0604030504040204" pitchFamily="34" charset="-120"/>
+              <a:ea typeface="Microsoft JhengHei" panose="020B0604030504040204" pitchFamily="34" charset="-120"/>
+            </a:endParaRPr>
+          </a:p>
+        </p:txBody>
+      </p:sp>
+      <p:sp>
+        <p:nvSpPr>
+          <p:cNvPr id="19" name="文字方塊 18">
+            <a:extLst>
+              <a:ext uri="{FF2B5EF4-FFF2-40B4-BE49-F238E27FC236}">
+                <a16:creationId xmlns:a16="http://schemas.microsoft.com/office/drawing/2014/main" id="{9A115F2E-1570-53C2-78C6-12C4B12FBCB5}"/>
+              </a:ext>
+            </a:extLst>
+          </p:cNvPr>
+          <p:cNvSpPr txBox="1"/>
+          <p:nvPr/>
+        </p:nvSpPr>
+        <p:spPr>
+          <a:xfrm>
+            <a:off x="9359900" y="4089399"/>
+            <a:ext cx="2336800" cy="419100"/>
+          </a:xfrm>
+          <a:prstGeom prst="rect">
+            <a:avLst/>
+          </a:prstGeom>
+          <a:noFill/>
+        </p:spPr>
+        <p:txBody>
+          <a:bodyPr vert="horz" wrap="square" lIns="0" tIns="0" rIns="0" bIns="0" rtlCol="0">
+            <a:noAutofit/>
+          </a:bodyPr>
+          <a:lstStyle/>
+          <a:p>
+            <a:r>
+              <a:rPr lang="en-US" altLang="zh-TW" b="1">
+                <a:solidFill>
+                  <a:srgbClr val="152C3D"/>
+                </a:solidFill>
+                <a:latin typeface="Microsoft JhengHei" panose="020B0604030504040204" pitchFamily="34" charset="-120"/>
+                <a:ea typeface="Microsoft JhengHei" panose="020B0604030504040204" pitchFamily="34" charset="-120"/>
+              </a:rPr>
+              <a:t>Rad   +0.13 dB</a:t>
+            </a:r>
+            <a:endParaRPr lang="zh-TW" altLang="en-US" b="1">
+              <a:solidFill>
+                <a:srgbClr val="152C3D"/>
+              </a:solidFill>
+              <a:latin typeface="Microsoft JhengHei" panose="020B0604030504040204" pitchFamily="34" charset="-120"/>
+              <a:ea typeface="Microsoft JhengHei" panose="020B0604030504040204" pitchFamily="34" charset="-120"/>
+            </a:endParaRPr>
+          </a:p>
+        </p:txBody>
+      </p:sp>
+      <p:sp>
+        <p:nvSpPr>
+          <p:cNvPr id="20" name="文字方塊 19">
+            <a:extLst>
+              <a:ext uri="{FF2B5EF4-FFF2-40B4-BE49-F238E27FC236}">
+                <a16:creationId xmlns:a16="http://schemas.microsoft.com/office/drawing/2014/main" id="{8C1F8E3C-1952-0D52-091B-86917D06DF2E}"/>
+              </a:ext>
+            </a:extLst>
+          </p:cNvPr>
+          <p:cNvSpPr txBox="1"/>
+          <p:nvPr/>
+        </p:nvSpPr>
+        <p:spPr>
+          <a:xfrm>
+            <a:off x="533400" y="5410199"/>
+            <a:ext cx="11125200" cy="571500"/>
+          </a:xfrm>
+          <a:prstGeom prst="rect">
+            <a:avLst/>
+          </a:prstGeom>
+          <a:noFill/>
+        </p:spPr>
+        <p:txBody>
+          <a:bodyPr vert="horz" wrap="square" lIns="0" tIns="0" rIns="0" bIns="0" rtlCol="0">
+            <a:noAutofit/>
+          </a:bodyPr>
+          <a:lstStyle/>
+          <a:p>
+            <a:r>
+              <a:rPr lang="zh-TW" altLang="en-US">
+                <a:solidFill>
+                  <a:srgbClr val="152C3D"/>
+                </a:solidFill>
+                <a:latin typeface="Microsoft JhengHei" panose="020B0604030504040204" pitchFamily="34" charset="-120"/>
+                <a:ea typeface="Microsoft JhengHei" panose="020B0604030504040204" pitchFamily="34" charset="-120"/>
+              </a:rPr>
+              <a:t>同款變體用局部微調檢查可動區；不同款式保留結構差異，作為後續驗證備選。</a:t>
+            </a:r>
+          </a:p>
+        </p:txBody>
+      </p:sp>
+      <p:sp>
+        <p:nvSpPr>
+          <p:cNvPr id="21" name="文字方塊 20">
+            <a:extLst>
+              <a:ext uri="{FF2B5EF4-FFF2-40B4-BE49-F238E27FC236}">
+                <a16:creationId xmlns:a16="http://schemas.microsoft.com/office/drawing/2014/main" id="{4814F8D8-30C0-679E-1697-98F43D138287}"/>
+              </a:ext>
+            </a:extLst>
+          </p:cNvPr>
+          <p:cNvSpPr txBox="1"/>
+          <p:nvPr/>
+        </p:nvSpPr>
+        <p:spPr>
+          <a:xfrm>
+            <a:off x="533400" y="6083300"/>
+            <a:ext cx="11125200" cy="228600"/>
+          </a:xfrm>
+          <a:prstGeom prst="rect">
+            <a:avLst/>
+          </a:prstGeom>
+          <a:noFill/>
+        </p:spPr>
+        <p:txBody>
+          <a:bodyPr vert="horz" wrap="square" lIns="0" tIns="0" rIns="0" bIns="0" rtlCol="0">
+            <a:noAutofit/>
+          </a:bodyPr>
+          <a:lstStyle/>
+          <a:p>
+            <a:r>
+              <a:rPr lang="zh-TW" altLang="en-US" sz="1200">
+                <a:solidFill>
+                  <a:srgbClr val="526A7D"/>
+                </a:solidFill>
+                <a:latin typeface="Microsoft JhengHei" panose="020B0604030504040204" pitchFamily="34" charset="-120"/>
+                <a:ea typeface="Microsoft JhengHei" panose="020B0604030504040204" pitchFamily="34" charset="-120"/>
+              </a:rPr>
+              <a:t>數字為七月月報中的 </a:t>
+            </a:r>
+            <a:r>
+              <a:rPr lang="en-US" altLang="zh-TW" sz="1200">
+                <a:solidFill>
+                  <a:srgbClr val="526A7D"/>
+                </a:solidFill>
+                <a:latin typeface="Microsoft JhengHei" panose="020B0604030504040204" pitchFamily="34" charset="-120"/>
+                <a:ea typeface="Microsoft JhengHei" panose="020B0604030504040204" pitchFamily="34" charset="-120"/>
+              </a:rPr>
+              <a:t>HFSS </a:t>
+            </a:r>
+            <a:r>
+              <a:rPr lang="zh-TW" altLang="en-US" sz="1200">
+                <a:solidFill>
+                  <a:srgbClr val="526A7D"/>
+                </a:solidFill>
+                <a:latin typeface="Microsoft JhengHei" panose="020B0604030504040204" pitchFamily="34" charset="-120"/>
+                <a:ea typeface="Microsoft JhengHei" panose="020B0604030504040204" pitchFamily="34" charset="-120"/>
+              </a:rPr>
+              <a:t>模擬快照，未換算為實體製造良率。</a:t>
+            </a:r>
+          </a:p>
+        </p:txBody>
+      </p:sp>
+      <p:sp>
+        <p:nvSpPr>
+          <p:cNvPr id="22" name="文字方塊 21">
+            <a:extLst>
+              <a:ext uri="{FF2B5EF4-FFF2-40B4-BE49-F238E27FC236}">
+                <a16:creationId xmlns:a16="http://schemas.microsoft.com/office/drawing/2014/main" id="{66CA529D-84AA-ECDF-7798-B8CEBD8186E4}"/>
+              </a:ext>
+            </a:extLst>
+          </p:cNvPr>
+          <p:cNvSpPr txBox="1"/>
+          <p:nvPr/>
+        </p:nvSpPr>
+        <p:spPr>
+          <a:xfrm>
+            <a:off x="533400" y="6400800"/>
+            <a:ext cx="10541000" cy="241300"/>
+          </a:xfrm>
+          <a:prstGeom prst="rect">
+            <a:avLst/>
+          </a:prstGeom>
+          <a:noFill/>
+        </p:spPr>
+        <p:txBody>
+          <a:bodyPr vert="horz" wrap="square" lIns="0" tIns="0" rIns="0" bIns="0" rtlCol="0">
+            <a:noAutofit/>
+          </a:bodyPr>
+          <a:lstStyle/>
+          <a:p>
+            <a:r>
+              <a:rPr lang="zh-TW" altLang="en-US" sz="900">
+                <a:solidFill>
+                  <a:srgbClr val="526A7D"/>
+                </a:solidFill>
+                <a:latin typeface="Microsoft JhengHei" panose="020B0604030504040204" pitchFamily="34" charset="-120"/>
+                <a:ea typeface="Microsoft JhengHei" panose="020B0604030504040204" pitchFamily="34" charset="-120"/>
+              </a:rPr>
+              <a:t>來源：七月進度報告 </a:t>
+            </a:r>
+            <a:r>
+              <a:rPr lang="en-US" altLang="zh-TW" sz="900">
+                <a:solidFill>
+                  <a:srgbClr val="526A7D"/>
+                </a:solidFill>
+                <a:latin typeface="Microsoft JhengHei" panose="020B0604030504040204" pitchFamily="34" charset="-120"/>
+                <a:ea typeface="Microsoft JhengHei" panose="020B0604030504040204" pitchFamily="34" charset="-120"/>
+              </a:rPr>
+              <a:t>v2 §7.1–7.3</a:t>
+            </a:r>
+            <a:r>
+              <a:rPr lang="zh-TW" altLang="en-US" sz="900">
+                <a:solidFill>
+                  <a:srgbClr val="526A7D"/>
+                </a:solidFill>
+                <a:latin typeface="Microsoft JhengHei" panose="020B0604030504040204" pitchFamily="34" charset="-120"/>
+                <a:ea typeface="Microsoft JhengHei" panose="020B0604030504040204" pitchFamily="34" charset="-120"/>
+              </a:rPr>
+              <a:t>、多樣性 </a:t>
+            </a:r>
+            <a:r>
+              <a:rPr lang="en-US" altLang="zh-TW" sz="900">
+                <a:solidFill>
+                  <a:srgbClr val="526A7D"/>
+                </a:solidFill>
+                <a:latin typeface="Microsoft JhengHei" panose="020B0604030504040204" pitchFamily="34" charset="-120"/>
+                <a:ea typeface="Microsoft JhengHei" panose="020B0604030504040204" pitchFamily="34" charset="-120"/>
+              </a:rPr>
+              <a:t>gallery</a:t>
+            </a:r>
+            <a:r>
+              <a:rPr lang="zh-TW" altLang="en-US" sz="900">
+                <a:solidFill>
+                  <a:srgbClr val="526A7D"/>
+                </a:solidFill>
+                <a:latin typeface="Microsoft JhengHei" panose="020B0604030504040204" pitchFamily="34" charset="-120"/>
+                <a:ea typeface="Microsoft JhengHei" panose="020B0604030504040204" pitchFamily="34" charset="-120"/>
+              </a:rPr>
+              <a:t>。兩圖樣均保留原始方向，饋線朝下。</a:t>
+            </a:r>
+          </a:p>
+        </p:txBody>
+      </p:sp>
+      <p:sp>
+        <p:nvSpPr>
+          <p:cNvPr id="23" name="文字方塊 22">
+            <a:extLst>
+              <a:ext uri="{FF2B5EF4-FFF2-40B4-BE49-F238E27FC236}">
+                <a16:creationId xmlns:a16="http://schemas.microsoft.com/office/drawing/2014/main" id="{4E8FCEE5-138D-5E4D-843D-A0047BC8BCB1}"/>
+              </a:ext>
+            </a:extLst>
+          </p:cNvPr>
+          <p:cNvSpPr txBox="1"/>
+          <p:nvPr/>
+        </p:nvSpPr>
+        <p:spPr>
+          <a:xfrm>
+            <a:off x="11341100" y="6438900"/>
+            <a:ext cx="317500" cy="228600"/>
+          </a:xfrm>
+          <a:prstGeom prst="rect">
+            <a:avLst/>
+          </a:prstGeom>
+          <a:noFill/>
+        </p:spPr>
+        <p:txBody>
+          <a:bodyPr vert="horz" wrap="square" lIns="0" tIns="0" rIns="0" bIns="0" rtlCol="0">
+            <a:noAutofit/>
+          </a:bodyPr>
+          <a:lstStyle/>
+          <a:p>
+            <a:pPr algn="r"/>
+            <a:r>
+              <a:rPr lang="en-US" altLang="zh-TW" sz="1100">
+                <a:solidFill>
+                  <a:srgbClr val="526A7D"/>
+                </a:solidFill>
+                <a:latin typeface="Microsoft JhengHei" panose="020B0604030504040204" pitchFamily="34" charset="-120"/>
+                <a:ea typeface="Microsoft JhengHei" panose="020B0604030504040204" pitchFamily="34" charset="-120"/>
+              </a:rPr>
+              <a:t>20</a:t>
+            </a:r>
+            <a:endParaRPr lang="zh-TW" altLang="en-US" sz="1100">
+              <a:solidFill>
+                <a:srgbClr val="526A7D"/>
+              </a:solidFill>
+              <a:latin typeface="Microsoft JhengHei" panose="020B0604030504040204" pitchFamily="34" charset="-120"/>
+              <a:ea typeface="Microsoft JhengHei" panose="020B0604030504040204" pitchFamily="34" charset="-120"/>
+            </a:endParaRPr>
+          </a:p>
+        </p:txBody>
+      </p:sp>
+    </p:spTree>
+    <p:extLst>
+      <p:ext uri="{BB962C8B-B14F-4D97-AF65-F5344CB8AC3E}">
+        <p14:creationId xmlns:p14="http://schemas.microsoft.com/office/powerpoint/2010/main" val="2040174911"/>
+      </p:ext>
+    </p:extLst>
+  </p:cSld>
+  <p:clrMapOvr>
+    <a:masterClrMapping/>
+  </p:clrMapOvr>
+</p:sld>
+</file>
+
+<file path=ppt/slides/slide21.xml><?xml version="1.0" encoding="utf-8"?>
+<p:sld xmlns:a="http://schemas.openxmlformats.org/drawingml/2006/main" xmlns:r="http://schemas.openxmlformats.org/officeDocument/2006/relationships" xmlns:p="http://schemas.openxmlformats.org/presentationml/2006/main">
+  <p:cSld>
+    <p:spTree>
+      <p:nvGrpSpPr>
+        <p:cNvPr id="1" name=""/>
+        <p:cNvGrpSpPr/>
+        <p:nvPr/>
+      </p:nvGrpSpPr>
+      <p:grpSpPr>
+        <a:xfrm>
+          <a:off x="0" y="0"/>
+          <a:ext cx="0" cy="0"/>
+          <a:chOff x="0" y="0"/>
+          <a:chExt cx="0" cy="0"/>
+        </a:xfrm>
+      </p:grpSpPr>
+      <p:sp>
+        <p:nvSpPr>
+          <p:cNvPr id="2" name="recap_title">
+            <a:extLst>
+              <a:ext uri="{FF2B5EF4-FFF2-40B4-BE49-F238E27FC236}">
+                <a16:creationId xmlns:a16="http://schemas.microsoft.com/office/drawing/2014/main" id="{1846AAD5-E523-0626-0D55-C399885B40F7}"/>
+              </a:ext>
+            </a:extLst>
+          </p:cNvPr>
+          <p:cNvSpPr txBox="1"/>
+          <p:nvPr/>
+        </p:nvSpPr>
+        <p:spPr>
+          <a:xfrm>
+            <a:off x="533400" y="279399"/>
+            <a:ext cx="11112500" cy="584200"/>
+          </a:xfrm>
+          <a:prstGeom prst="rect">
+            <a:avLst/>
+          </a:prstGeom>
+          <a:noFill/>
+        </p:spPr>
+        <p:txBody>
+          <a:bodyPr vert="horz" wrap="square" lIns="0" tIns="0" rIns="0" bIns="0" rtlCol="0">
+            <a:noAutofit/>
+          </a:bodyPr>
+          <a:lstStyle/>
+          <a:p>
+            <a:r>
+              <a:rPr lang="zh-TW" altLang="en-US" sz="3000" b="1">
+                <a:solidFill>
+                  <a:srgbClr val="152C3D"/>
+                </a:solidFill>
+                <a:latin typeface="Microsoft JhengHei" panose="020B0604030504040204" pitchFamily="34" charset="-120"/>
+                <a:ea typeface="Microsoft JhengHei" panose="020B0604030504040204" pitchFamily="34" charset="-120"/>
+              </a:rPr>
+              <a:t>八月：資料瀏覽與可製造性篩選</a:t>
+            </a:r>
+          </a:p>
+        </p:txBody>
+      </p:sp>
+      <p:cxnSp>
+        <p:nvCxnSpPr>
+          <p:cNvPr id="3" name="直線接點 2">
+            <a:extLst>
+              <a:ext uri="{FF2B5EF4-FFF2-40B4-BE49-F238E27FC236}">
+                <a16:creationId xmlns:a16="http://schemas.microsoft.com/office/drawing/2014/main" id="{6543023E-2A0F-C2DE-4E69-2241CD01580A}"/>
+              </a:ext>
+            </a:extLst>
+          </p:cNvPr>
+          <p:cNvCxnSpPr/>
+          <p:nvPr/>
+        </p:nvCxnSpPr>
+        <p:spPr>
+          <a:xfrm>
+            <a:off x="533400" y="1041400"/>
+            <a:ext cx="11125200" cy="0"/>
+          </a:xfrm>
+          <a:prstGeom prst="line">
+            <a:avLst/>
+          </a:prstGeom>
+          <a:ln w="8890">
+            <a:solidFill>
+              <a:srgbClr val="C6D5E1"/>
+            </a:solidFill>
+          </a:ln>
+          <a:effectLst/>
+          <a:extLst>
+            <a:ext uri="{AF507438-7753-43E0-B8FC-AC1667EBCBE1}">
+              <a14:hiddenEffects xmlns:a14="http://schemas.microsoft.com/office/drawing/2010/main">
+                <a:effectLst>
+                  <a:outerShdw blurRad="40000" dist="20000" dir="5400000" rotWithShape="0">
+                    <a:srgbClr val="000000">
+                      <a:alpha val="38000"/>
+                    </a:srgbClr>
+                  </a:outerShdw>
+                </a:effectLst>
+              </a14:hiddenEffects>
+            </a:ext>
+          </a:extLst>
+        </p:spPr>
+        <p:style>
+          <a:lnRef idx="2">
+            <a:schemeClr val="accent1"/>
+          </a:lnRef>
+          <a:fillRef idx="0">
+            <a:schemeClr val="accent1"/>
+          </a:fillRef>
+          <a:effectRef idx="1">
+            <a:schemeClr val="accent1"/>
+          </a:effectRef>
+          <a:fontRef idx="minor">
+            <a:schemeClr val="tx1"/>
+          </a:fontRef>
+        </p:style>
+      </p:cxnSp>
+      <p:cxnSp>
+        <p:nvCxnSpPr>
+          <p:cNvPr id="4" name="直線接點 3">
+            <a:extLst>
+              <a:ext uri="{FF2B5EF4-FFF2-40B4-BE49-F238E27FC236}">
+                <a16:creationId xmlns:a16="http://schemas.microsoft.com/office/drawing/2014/main" id="{1FDB7ACD-66CC-1E9E-D5A1-2B3FCA025689}"/>
+              </a:ext>
+            </a:extLst>
+          </p:cNvPr>
+          <p:cNvCxnSpPr/>
+          <p:nvPr/>
+        </p:nvCxnSpPr>
+        <p:spPr>
+          <a:xfrm>
+            <a:off x="533400" y="1041400"/>
+            <a:ext cx="1244600" cy="0"/>
+          </a:xfrm>
+          <a:prstGeom prst="line">
+            <a:avLst/>
+          </a:prstGeom>
+          <a:ln w="29210">
+            <a:solidFill>
+              <a:srgbClr val="245B85"/>
+            </a:solidFill>
+          </a:ln>
+          <a:effectLst/>
+          <a:extLst>
+            <a:ext uri="{AF507438-7753-43E0-B8FC-AC1667EBCBE1}">
+              <a14:hiddenEffects xmlns:a14="http://schemas.microsoft.com/office/drawing/2010/main">
+                <a:effectLst>
+                  <a:outerShdw blurRad="40000" dist="20000" dir="5400000" rotWithShape="0">
+                    <a:srgbClr val="000000">
+                      <a:alpha val="38000"/>
+                    </a:srgbClr>
+                  </a:outerShdw>
+                </a:effectLst>
+              </a14:hiddenEffects>
+            </a:ext>
+          </a:extLst>
+        </p:spPr>
+        <p:style>
+          <a:lnRef idx="2">
+            <a:schemeClr val="accent1"/>
+          </a:lnRef>
+          <a:fillRef idx="0">
+            <a:schemeClr val="accent1"/>
+          </a:fillRef>
+          <a:effectRef idx="1">
+            <a:schemeClr val="accent1"/>
+          </a:effectRef>
+          <a:fontRef idx="minor">
+            <a:schemeClr val="tx1"/>
+          </a:fontRef>
+        </p:style>
+      </p:cxnSp>
+      <p:sp>
+        <p:nvSpPr>
+          <p:cNvPr id="5" name="文字方塊 4">
+            <a:extLst>
+              <a:ext uri="{FF2B5EF4-FFF2-40B4-BE49-F238E27FC236}">
+                <a16:creationId xmlns:a16="http://schemas.microsoft.com/office/drawing/2014/main" id="{38A0CB60-7A6D-4BFD-9457-29B898825F07}"/>
+              </a:ext>
+            </a:extLst>
+          </p:cNvPr>
+          <p:cNvSpPr txBox="1"/>
+          <p:nvPr/>
+        </p:nvSpPr>
+        <p:spPr>
+          <a:xfrm>
+            <a:off x="533400" y="1371599"/>
+            <a:ext cx="11125200" cy="406400"/>
+          </a:xfrm>
+          <a:prstGeom prst="rect">
+            <a:avLst/>
+          </a:prstGeom>
+          <a:noFill/>
+        </p:spPr>
+        <p:txBody>
+          <a:bodyPr vert="horz" wrap="square" lIns="0" tIns="0" rIns="0" bIns="0" rtlCol="0">
+            <a:noAutofit/>
+          </a:bodyPr>
+          <a:lstStyle/>
+          <a:p>
+            <a:r>
+              <a:rPr lang="zh-TW" altLang="en-US">
+                <a:solidFill>
+                  <a:srgbClr val="152C3D"/>
+                </a:solidFill>
+                <a:latin typeface="Microsoft JhengHei" panose="020B0604030504040204" pitchFamily="34" charset="-120"/>
+                <a:ea typeface="Microsoft JhengHei" panose="020B0604030504040204" pitchFamily="34" charset="-120"/>
+              </a:rPr>
+              <a:t>約 </a:t>
+            </a:r>
+            <a:r>
+              <a:rPr lang="en-US" altLang="zh-TW">
+                <a:solidFill>
+                  <a:srgbClr val="152C3D"/>
+                </a:solidFill>
+                <a:latin typeface="Microsoft JhengHei" panose="020B0604030504040204" pitchFamily="34" charset="-120"/>
+                <a:ea typeface="Microsoft JhengHei" panose="020B0604030504040204" pitchFamily="34" charset="-120"/>
+              </a:rPr>
+              <a:t>3.9 </a:t>
+            </a:r>
+            <a:r>
+              <a:rPr lang="zh-TW" altLang="en-US">
+                <a:solidFill>
+                  <a:srgbClr val="152C3D"/>
+                </a:solidFill>
+                <a:latin typeface="Microsoft JhengHei" panose="020B0604030504040204" pitchFamily="34" charset="-120"/>
+                <a:ea typeface="Microsoft JhengHei" panose="020B0604030504040204" pitchFamily="34" charset="-120"/>
+              </a:rPr>
+              <a:t>萬筆單埠模擬資料，依幾何變形後的結果篩選</a:t>
+            </a:r>
+          </a:p>
+        </p:txBody>
+      </p:sp>
+      <p:pic>
+        <p:nvPicPr>
+          <p:cNvPr id="7" name="圖片 6">
+            <a:extLst>
+              <a:ext uri="{FF2B5EF4-FFF2-40B4-BE49-F238E27FC236}">
+                <a16:creationId xmlns:a16="http://schemas.microsoft.com/office/drawing/2014/main" id="{F9270151-702C-6829-00CF-39ADF6343333}"/>
+              </a:ext>
+            </a:extLst>
+          </p:cNvPr>
+          <p:cNvPicPr>
+            <a:picLocks noChangeAspect="1"/>
+          </p:cNvPicPr>
+          <p:nvPr/>
+        </p:nvPicPr>
+        <p:blipFill>
+          <a:blip r:embed="rId3"/>
+          <a:srcRect l="16500" r="16500" b="49177"/>
+          <a:stretch>
+            <a:fillRect/>
+          </a:stretch>
+        </p:blipFill>
+        <p:spPr>
+          <a:xfrm>
+            <a:off x="533400" y="1959550"/>
+            <a:ext cx="11125200" cy="3472301"/>
+          </a:xfrm>
+          <a:prstGeom prst="rect">
+            <a:avLst/>
+          </a:prstGeom>
+        </p:spPr>
+      </p:pic>
+      <p:sp>
+        <p:nvSpPr>
+          <p:cNvPr id="8" name="文字方塊 7">
+            <a:extLst>
+              <a:ext uri="{FF2B5EF4-FFF2-40B4-BE49-F238E27FC236}">
+                <a16:creationId xmlns:a16="http://schemas.microsoft.com/office/drawing/2014/main" id="{B032E9FF-4CBB-7189-2E2F-890B182792C8}"/>
+              </a:ext>
+            </a:extLst>
+          </p:cNvPr>
+          <p:cNvSpPr txBox="1"/>
+          <p:nvPr/>
+        </p:nvSpPr>
+        <p:spPr>
+          <a:xfrm>
+            <a:off x="533400" y="5676899"/>
+            <a:ext cx="11125200" cy="571500"/>
+          </a:xfrm>
+          <a:prstGeom prst="rect">
+            <a:avLst/>
+          </a:prstGeom>
+          <a:noFill/>
+        </p:spPr>
+        <p:txBody>
+          <a:bodyPr vert="horz" wrap="square" lIns="0" tIns="0" rIns="0" bIns="0" rtlCol="0">
+            <a:noAutofit/>
+          </a:bodyPr>
+          <a:lstStyle/>
+          <a:p>
+            <a:r>
+              <a:rPr lang="zh-TW" altLang="en-US" sz="1700">
+                <a:solidFill>
+                  <a:srgbClr val="152C3D"/>
+                </a:solidFill>
+                <a:latin typeface="Microsoft JhengHei" panose="020B0604030504040204" pitchFamily="34" charset="-120"/>
+                <a:ea typeface="Microsoft JhengHei" panose="020B0604030504040204" pitchFamily="34" charset="-120"/>
+              </a:rPr>
+              <a:t>原圖 </a:t>
+            </a:r>
+            <a:r>
+              <a:rPr lang="en-US" altLang="zh-TW" sz="1700">
+                <a:solidFill>
+                  <a:srgbClr val="152C3D"/>
+                </a:solidFill>
+                <a:latin typeface="Microsoft JhengHei" panose="020B0604030504040204" pitchFamily="34" charset="-120"/>
+                <a:ea typeface="Microsoft JhengHei" panose="020B0604030504040204" pitchFamily="34" charset="-120"/>
+              </a:rPr>
+              <a:t>wm</a:t>
+            </a:r>
+            <a:r>
+              <a:rPr lang="zh-TW" altLang="en-US" sz="1700">
+                <a:solidFill>
+                  <a:srgbClr val="152C3D"/>
+                </a:solidFill>
+                <a:latin typeface="Microsoft JhengHei" panose="020B0604030504040204" pitchFamily="34" charset="-120"/>
+                <a:ea typeface="Microsoft JhengHei" panose="020B0604030504040204" pitchFamily="34" charset="-120"/>
+              </a:rPr>
+              <a:t>、菱形化後 </a:t>
+            </a:r>
+            <a:r>
+              <a:rPr lang="en-US" altLang="zh-TW" sz="1700">
+                <a:solidFill>
+                  <a:srgbClr val="152C3D"/>
+                </a:solidFill>
+                <a:latin typeface="Microsoft JhengHei" panose="020B0604030504040204" pitchFamily="34" charset="-120"/>
+                <a:ea typeface="Microsoft JhengHei" panose="020B0604030504040204" pitchFamily="34" charset="-120"/>
+              </a:rPr>
+              <a:t>db100_wm </a:t>
+            </a:r>
+            <a:r>
+              <a:rPr lang="zh-TW" altLang="en-US" sz="1700">
+                <a:solidFill>
+                  <a:srgbClr val="152C3D"/>
+                </a:solidFill>
+                <a:latin typeface="Microsoft JhengHei" panose="020B0604030504040204" pitchFamily="34" charset="-120"/>
+                <a:ea typeface="Microsoft JhengHei" panose="020B0604030504040204" pitchFamily="34" charset="-120"/>
+              </a:rPr>
+              <a:t>與差值並列；先用合格閘門篩選，再匯出候選。</a:t>
+            </a:r>
+          </a:p>
+        </p:txBody>
+      </p:sp>
+      <p:sp>
+        <p:nvSpPr>
+          <p:cNvPr id="9" name="文字方塊 8">
+            <a:extLst>
+              <a:ext uri="{FF2B5EF4-FFF2-40B4-BE49-F238E27FC236}">
+                <a16:creationId xmlns:a16="http://schemas.microsoft.com/office/drawing/2014/main" id="{4A3AAC9A-B108-CFB0-6FBE-F30FC83651E6}"/>
+              </a:ext>
+            </a:extLst>
+          </p:cNvPr>
+          <p:cNvSpPr txBox="1"/>
+          <p:nvPr/>
+        </p:nvSpPr>
+        <p:spPr>
+          <a:xfrm>
+            <a:off x="533400" y="6083300"/>
+            <a:ext cx="11125200" cy="228600"/>
+          </a:xfrm>
+          <a:prstGeom prst="rect">
+            <a:avLst/>
+          </a:prstGeom>
+          <a:noFill/>
+        </p:spPr>
+        <p:txBody>
+          <a:bodyPr vert="horz" wrap="square" lIns="0" tIns="0" rIns="0" bIns="0" rtlCol="0">
+            <a:noAutofit/>
+          </a:bodyPr>
+          <a:lstStyle/>
+          <a:p>
+            <a:r>
+              <a:rPr lang="zh-TW" altLang="en-US" sz="1200">
+                <a:solidFill>
+                  <a:srgbClr val="526A7D"/>
+                </a:solidFill>
+                <a:latin typeface="Microsoft JhengHei" panose="020B0604030504040204" pitchFamily="34" charset="-120"/>
+                <a:ea typeface="Microsoft JhengHei" panose="020B0604030504040204" pitchFamily="34" charset="-120"/>
+              </a:rPr>
+              <a:t>製造視角採幾何變形後的 </a:t>
+            </a:r>
+            <a:r>
+              <a:rPr lang="en-US" altLang="zh-TW" sz="1200">
+                <a:solidFill>
+                  <a:srgbClr val="526A7D"/>
+                </a:solidFill>
+                <a:latin typeface="Microsoft JhengHei" panose="020B0604030504040204" pitchFamily="34" charset="-120"/>
+                <a:ea typeface="Microsoft JhengHei" panose="020B0604030504040204" pitchFamily="34" charset="-120"/>
+              </a:rPr>
+              <a:t>HFSS </a:t>
+            </a:r>
+            <a:r>
+              <a:rPr lang="zh-TW" altLang="en-US" sz="1200">
+                <a:solidFill>
+                  <a:srgbClr val="526A7D"/>
+                </a:solidFill>
+                <a:latin typeface="Microsoft JhengHei" panose="020B0604030504040204" pitchFamily="34" charset="-120"/>
+                <a:ea typeface="Microsoft JhengHei" panose="020B0604030504040204" pitchFamily="34" charset="-120"/>
+              </a:rPr>
+              <a:t>分數，與實體量測結果分開記錄。</a:t>
+            </a:r>
+          </a:p>
+        </p:txBody>
+      </p:sp>
+      <p:sp>
+        <p:nvSpPr>
+          <p:cNvPr id="10" name="文字方塊 9">
+            <a:extLst>
+              <a:ext uri="{FF2B5EF4-FFF2-40B4-BE49-F238E27FC236}">
+                <a16:creationId xmlns:a16="http://schemas.microsoft.com/office/drawing/2014/main" id="{45C372B8-D16E-8F39-FD38-C7113DFDF99D}"/>
+              </a:ext>
+            </a:extLst>
+          </p:cNvPr>
+          <p:cNvSpPr txBox="1"/>
+          <p:nvPr/>
+        </p:nvSpPr>
+        <p:spPr>
+          <a:xfrm>
+            <a:off x="533400" y="6400800"/>
+            <a:ext cx="10541000" cy="241300"/>
+          </a:xfrm>
+          <a:prstGeom prst="rect">
+            <a:avLst/>
+          </a:prstGeom>
+          <a:noFill/>
+        </p:spPr>
+        <p:txBody>
+          <a:bodyPr vert="horz" wrap="square" lIns="0" tIns="0" rIns="0" bIns="0" rtlCol="0">
+            <a:noAutofit/>
+          </a:bodyPr>
+          <a:lstStyle/>
+          <a:p>
+            <a:r>
+              <a:rPr lang="zh-TW" altLang="en-US" sz="900">
+                <a:solidFill>
+                  <a:srgbClr val="526A7D"/>
+                </a:solidFill>
+                <a:latin typeface="Microsoft JhengHei" panose="020B0604030504040204" pitchFamily="34" charset="-120"/>
+                <a:ea typeface="Microsoft JhengHei" panose="020B0604030504040204" pitchFamily="34" charset="-120"/>
+              </a:rPr>
+              <a:t>來源：八月進度報告；</a:t>
+            </a:r>
+            <a:r>
+              <a:rPr lang="en-US" altLang="zh-TW" sz="900">
+                <a:solidFill>
+                  <a:srgbClr val="526A7D"/>
+                </a:solidFill>
+                <a:latin typeface="Microsoft JhengHei" panose="020B0604030504040204" pitchFamily="34" charset="-120"/>
+                <a:ea typeface="Microsoft JhengHei" panose="020B0604030504040204" pitchFamily="34" charset="-120"/>
+              </a:rPr>
+              <a:t>Pattern Browser </a:t>
+            </a:r>
+            <a:r>
+              <a:rPr lang="zh-TW" altLang="en-US" sz="900">
+                <a:solidFill>
+                  <a:srgbClr val="526A7D"/>
+                </a:solidFill>
+                <a:latin typeface="Microsoft JhengHei" panose="020B0604030504040204" pitchFamily="34" charset="-120"/>
+                <a:ea typeface="Microsoft JhengHei" panose="020B0604030504040204" pitchFamily="34" charset="-120"/>
+              </a:rPr>
+              <a:t>單埠製造視角截圖（當時資料快照，放大前三列）。</a:t>
+            </a:r>
+          </a:p>
+        </p:txBody>
+      </p:sp>
+      <p:sp>
+        <p:nvSpPr>
+          <p:cNvPr id="11" name="文字方塊 10">
+            <a:extLst>
+              <a:ext uri="{FF2B5EF4-FFF2-40B4-BE49-F238E27FC236}">
+                <a16:creationId xmlns:a16="http://schemas.microsoft.com/office/drawing/2014/main" id="{64D40EC9-7328-620B-C942-1D45683E1A6D}"/>
+              </a:ext>
+            </a:extLst>
+          </p:cNvPr>
+          <p:cNvSpPr txBox="1"/>
+          <p:nvPr/>
+        </p:nvSpPr>
+        <p:spPr>
+          <a:xfrm>
+            <a:off x="11341100" y="6438900"/>
+            <a:ext cx="317500" cy="228600"/>
+          </a:xfrm>
+          <a:prstGeom prst="rect">
+            <a:avLst/>
+          </a:prstGeom>
+          <a:noFill/>
+        </p:spPr>
+        <p:txBody>
+          <a:bodyPr vert="horz" wrap="square" lIns="0" tIns="0" rIns="0" bIns="0" rtlCol="0">
+            <a:noAutofit/>
+          </a:bodyPr>
+          <a:lstStyle/>
+          <a:p>
+            <a:pPr algn="r"/>
+            <a:r>
+              <a:rPr lang="en-US" altLang="zh-TW" sz="1100">
+                <a:solidFill>
+                  <a:srgbClr val="526A7D"/>
+                </a:solidFill>
+                <a:latin typeface="Microsoft JhengHei" panose="020B0604030504040204" pitchFamily="34" charset="-120"/>
+                <a:ea typeface="Microsoft JhengHei" panose="020B0604030504040204" pitchFamily="34" charset="-120"/>
+              </a:rPr>
+              <a:t>21</a:t>
+            </a:r>
+            <a:endParaRPr lang="zh-TW" altLang="en-US" sz="1100">
+              <a:solidFill>
+                <a:srgbClr val="526A7D"/>
+              </a:solidFill>
+              <a:latin typeface="Microsoft JhengHei" panose="020B0604030504040204" pitchFamily="34" charset="-120"/>
+              <a:ea typeface="Microsoft JhengHei" panose="020B0604030504040204" pitchFamily="34" charset="-120"/>
+            </a:endParaRPr>
+          </a:p>
+        </p:txBody>
+      </p:sp>
+    </p:spTree>
+    <p:extLst>
+      <p:ext uri="{BB962C8B-B14F-4D97-AF65-F5344CB8AC3E}">
+        <p14:creationId xmlns:p14="http://schemas.microsoft.com/office/powerpoint/2010/main" val="2574327772"/>
+      </p:ext>
+    </p:extLst>
+  </p:cSld>
+  <p:clrMapOvr>
+    <a:masterClrMapping/>
+  </p:clrMapOvr>
+</p:sld>
+</file>
+
+<file path=ppt/slides/slide22.xml><?xml version="1.0" encoding="utf-8"?>
+<p:sld xmlns:a="http://schemas.openxmlformats.org/drawingml/2006/main" xmlns:r="http://schemas.openxmlformats.org/officeDocument/2006/relationships" xmlns:p="http://schemas.openxmlformats.org/presentationml/2006/main">
+  <p:cSld>
+    <p:spTree>
+      <p:nvGrpSpPr>
+        <p:cNvPr id="1" name=""/>
+        <p:cNvGrpSpPr/>
+        <p:nvPr/>
+      </p:nvGrpSpPr>
+      <p:grpSpPr>
+        <a:xfrm>
+          <a:off x="0" y="0"/>
+          <a:ext cx="0" cy="0"/>
+          <a:chOff x="0" y="0"/>
+          <a:chExt cx="0" cy="0"/>
+        </a:xfrm>
+      </p:grpSpPr>
+      <p:sp>
+        <p:nvSpPr>
+          <p:cNvPr id="2" name="recap_title">
+            <a:extLst>
+              <a:ext uri="{FF2B5EF4-FFF2-40B4-BE49-F238E27FC236}">
+                <a16:creationId xmlns:a16="http://schemas.microsoft.com/office/drawing/2014/main" id="{71643779-1F66-D0E6-56D0-B6FC89806FF4}"/>
+              </a:ext>
+            </a:extLst>
+          </p:cNvPr>
+          <p:cNvSpPr txBox="1"/>
+          <p:nvPr/>
+        </p:nvSpPr>
+        <p:spPr>
+          <a:xfrm>
+            <a:off x="533400" y="279399"/>
+            <a:ext cx="11112500" cy="584200"/>
+          </a:xfrm>
+          <a:prstGeom prst="rect">
+            <a:avLst/>
+          </a:prstGeom>
+          <a:noFill/>
+        </p:spPr>
+        <p:txBody>
+          <a:bodyPr vert="horz" wrap="square" lIns="0" tIns="0" rIns="0" bIns="0" rtlCol="0">
+            <a:noAutofit/>
+          </a:bodyPr>
+          <a:lstStyle/>
+          <a:p>
+            <a:r>
+              <a:rPr lang="zh-TW" altLang="en-US" sz="3000" b="1">
+                <a:solidFill>
+                  <a:srgbClr val="152C3D"/>
+                </a:solidFill>
+                <a:latin typeface="Microsoft JhengHei" panose="020B0604030504040204" pitchFamily="34" charset="-120"/>
+                <a:ea typeface="Microsoft JhengHei" panose="020B0604030504040204" pitchFamily="34" charset="-120"/>
+              </a:rPr>
+              <a:t>八月：顯式菱形橋與可製造幾何</a:t>
+            </a:r>
+          </a:p>
+        </p:txBody>
+      </p:sp>
+      <p:cxnSp>
+        <p:nvCxnSpPr>
+          <p:cNvPr id="3" name="直線接點 2">
+            <a:extLst>
+              <a:ext uri="{FF2B5EF4-FFF2-40B4-BE49-F238E27FC236}">
+                <a16:creationId xmlns:a16="http://schemas.microsoft.com/office/drawing/2014/main" id="{269F84B8-7A15-BFDB-A6B5-D50BF9E7D149}"/>
+              </a:ext>
+            </a:extLst>
+          </p:cNvPr>
+          <p:cNvCxnSpPr/>
+          <p:nvPr/>
+        </p:nvCxnSpPr>
+        <p:spPr>
+          <a:xfrm>
+            <a:off x="533400" y="1041400"/>
+            <a:ext cx="11125200" cy="0"/>
+          </a:xfrm>
+          <a:prstGeom prst="line">
+            <a:avLst/>
+          </a:prstGeom>
+          <a:ln w="8890">
+            <a:solidFill>
+              <a:srgbClr val="C6D5E1"/>
+            </a:solidFill>
+          </a:ln>
+          <a:effectLst/>
+          <a:extLst>
+            <a:ext uri="{AF507438-7753-43E0-B8FC-AC1667EBCBE1}">
+              <a14:hiddenEffects xmlns:a14="http://schemas.microsoft.com/office/drawing/2010/main">
+                <a:effectLst>
+                  <a:outerShdw blurRad="40000" dist="20000" dir="5400000" rotWithShape="0">
+                    <a:srgbClr val="000000">
+                      <a:alpha val="38000"/>
+                    </a:srgbClr>
+                  </a:outerShdw>
+                </a:effectLst>
+              </a14:hiddenEffects>
+            </a:ext>
+          </a:extLst>
+        </p:spPr>
+        <p:style>
+          <a:lnRef idx="2">
+            <a:schemeClr val="accent1"/>
+          </a:lnRef>
+          <a:fillRef idx="0">
+            <a:schemeClr val="accent1"/>
+          </a:fillRef>
+          <a:effectRef idx="1">
+            <a:schemeClr val="accent1"/>
+          </a:effectRef>
+          <a:fontRef idx="minor">
+            <a:schemeClr val="tx1"/>
+          </a:fontRef>
+        </p:style>
+      </p:cxnSp>
+      <p:cxnSp>
+        <p:nvCxnSpPr>
+          <p:cNvPr id="4" name="直線接點 3">
+            <a:extLst>
+              <a:ext uri="{FF2B5EF4-FFF2-40B4-BE49-F238E27FC236}">
+                <a16:creationId xmlns:a16="http://schemas.microsoft.com/office/drawing/2014/main" id="{535CAC8B-0995-C8B6-A897-8A607EB60140}"/>
+              </a:ext>
+            </a:extLst>
+          </p:cNvPr>
+          <p:cNvCxnSpPr/>
+          <p:nvPr/>
+        </p:nvCxnSpPr>
+        <p:spPr>
+          <a:xfrm>
+            <a:off x="533400" y="1041400"/>
+            <a:ext cx="1244600" cy="0"/>
+          </a:xfrm>
+          <a:prstGeom prst="line">
+            <a:avLst/>
+          </a:prstGeom>
+          <a:ln w="29210">
+            <a:solidFill>
+              <a:srgbClr val="245B85"/>
+            </a:solidFill>
+          </a:ln>
+          <a:effectLst/>
+          <a:extLst>
+            <a:ext uri="{AF507438-7753-43E0-B8FC-AC1667EBCBE1}">
+              <a14:hiddenEffects xmlns:a14="http://schemas.microsoft.com/office/drawing/2010/main">
+                <a:effectLst>
+                  <a:outerShdw blurRad="40000" dist="20000" dir="5400000" rotWithShape="0">
+                    <a:srgbClr val="000000">
+                      <a:alpha val="38000"/>
+                    </a:srgbClr>
+                  </a:outerShdw>
+                </a:effectLst>
+              </a14:hiddenEffects>
+            </a:ext>
+          </a:extLst>
+        </p:spPr>
+        <p:style>
+          <a:lnRef idx="2">
+            <a:schemeClr val="accent1"/>
+          </a:lnRef>
+          <a:fillRef idx="0">
+            <a:schemeClr val="accent1"/>
+          </a:fillRef>
+          <a:effectRef idx="1">
+            <a:schemeClr val="accent1"/>
+          </a:effectRef>
+          <a:fontRef idx="minor">
+            <a:schemeClr val="tx1"/>
+          </a:fontRef>
+        </p:style>
+      </p:cxnSp>
+      <p:pic>
+        <p:nvPicPr>
+          <p:cNvPr id="6" name="圖形 5">
+            <a:extLst>
+              <a:ext uri="{FF2B5EF4-FFF2-40B4-BE49-F238E27FC236}">
+                <a16:creationId xmlns:a16="http://schemas.microsoft.com/office/drawing/2014/main" id="{E727A67C-8292-44E7-1CFF-A2B72F118BD8}"/>
+              </a:ext>
+            </a:extLst>
+          </p:cNvPr>
+          <p:cNvPicPr>
+            <a:picLocks noChangeAspect="1"/>
+          </p:cNvPicPr>
+          <p:nvPr/>
+        </p:nvPicPr>
+        <p:blipFill>
+          <a:blip r:embed="rId3">
+            <a:extLst>
+              <a:ext uri="{96DAC541-7B7A-43D3-8B79-37D633B846F1}">
+                <asvg:svgBlip xmlns:asvg="http://schemas.microsoft.com/office/drawing/2016/SVG/main" r:embed="rId4"/>
+              </a:ext>
+            </a:extLst>
+          </a:blip>
+          <a:stretch>
+            <a:fillRect/>
+          </a:stretch>
+        </p:blipFill>
+        <p:spPr>
+          <a:xfrm>
+            <a:off x="533400" y="1357313"/>
+            <a:ext cx="11125200" cy="4867275"/>
+          </a:xfrm>
+          <a:prstGeom prst="rect">
+            <a:avLst/>
+          </a:prstGeom>
+        </p:spPr>
+      </p:pic>
+      <p:sp>
+        <p:nvSpPr>
+          <p:cNvPr id="7" name="文字方塊 6">
+            <a:extLst>
+              <a:ext uri="{FF2B5EF4-FFF2-40B4-BE49-F238E27FC236}">
+                <a16:creationId xmlns:a16="http://schemas.microsoft.com/office/drawing/2014/main" id="{6B51FEA6-55AD-9B91-A668-96F66741AF64}"/>
+              </a:ext>
+            </a:extLst>
+          </p:cNvPr>
+          <p:cNvSpPr txBox="1"/>
+          <p:nvPr/>
+        </p:nvSpPr>
+        <p:spPr>
+          <a:xfrm>
+            <a:off x="533400" y="6400800"/>
+            <a:ext cx="10541000" cy="241300"/>
+          </a:xfrm>
+          <a:prstGeom prst="rect">
+            <a:avLst/>
+          </a:prstGeom>
+          <a:noFill/>
+        </p:spPr>
+        <p:txBody>
+          <a:bodyPr vert="horz" wrap="square" lIns="0" tIns="0" rIns="0" bIns="0" rtlCol="0">
+            <a:noAutofit/>
+          </a:bodyPr>
+          <a:lstStyle/>
+          <a:p>
+            <a:r>
+              <a:rPr lang="zh-TW" altLang="en-US" sz="900">
+                <a:solidFill>
+                  <a:srgbClr val="526A7D"/>
+                </a:solidFill>
+                <a:latin typeface="Microsoft JhengHei" panose="020B0604030504040204" pitchFamily="34" charset="-120"/>
+                <a:ea typeface="Microsoft JhengHei" panose="020B0604030504040204" pitchFamily="34" charset="-120"/>
+              </a:rPr>
+              <a:t>來源：</a:t>
+            </a:r>
+            <a:r>
+              <a:rPr lang="en-US" altLang="zh-TW" sz="900">
+                <a:solidFill>
+                  <a:srgbClr val="526A7D"/>
+                </a:solidFill>
+                <a:latin typeface="Microsoft JhengHei" panose="020B0604030504040204" pitchFamily="34" charset="-120"/>
+                <a:ea typeface="Microsoft JhengHei" panose="020B0604030504040204" pitchFamily="34" charset="-120"/>
+              </a:rPr>
+              <a:t>R70–R71</a:t>
+            </a:r>
+            <a:r>
+              <a:rPr lang="zh-TW" altLang="en-US" sz="900">
+                <a:solidFill>
+                  <a:srgbClr val="526A7D"/>
+                </a:solidFill>
+                <a:latin typeface="Microsoft JhengHei" panose="020B0604030504040204" pitchFamily="34" charset="-120"/>
+                <a:ea typeface="Microsoft JhengHei" panose="020B0604030504040204" pitchFamily="34" charset="-120"/>
+              </a:rPr>
+              <a:t>；</a:t>
+            </a:r>
+            <a:r>
+              <a:rPr lang="en-US" altLang="zh-TW" sz="900">
+                <a:solidFill>
+                  <a:srgbClr val="526A7D"/>
+                </a:solidFill>
+                <a:latin typeface="Microsoft JhengHei" panose="020B0604030504040204" pitchFamily="34" charset="-120"/>
+                <a:ea typeface="Microsoft JhengHei" panose="020B0604030504040204" pitchFamily="34" charset="-120"/>
+              </a:rPr>
+              <a:t>dual_port.py </a:t>
+            </a:r>
+            <a:r>
+              <a:rPr lang="zh-TW" altLang="en-US" sz="900">
+                <a:solidFill>
+                  <a:srgbClr val="526A7D"/>
+                </a:solidFill>
+                <a:latin typeface="Microsoft JhengHei" panose="020B0604030504040204" pitchFamily="34" charset="-120"/>
+                <a:ea typeface="Microsoft JhengHei" panose="020B0604030504040204" pitchFamily="34" charset="-120"/>
+              </a:rPr>
+              <a:t>的 </a:t>
+            </a:r>
+            <a:r>
+              <a:rPr lang="en-US" altLang="zh-TW" sz="900">
+                <a:solidFill>
+                  <a:srgbClr val="526A7D"/>
+                </a:solidFill>
+                <a:latin typeface="Microsoft JhengHei" panose="020B0604030504040204" pitchFamily="34" charset="-120"/>
+                <a:ea typeface="Microsoft JhengHei" panose="020B0604030504040204" pitchFamily="34" charset="-120"/>
+              </a:rPr>
+              <a:t>diag_bridge_w </a:t>
+            </a:r>
+            <a:r>
+              <a:rPr lang="zh-TW" altLang="en-US" sz="900">
+                <a:solidFill>
+                  <a:srgbClr val="526A7D"/>
+                </a:solidFill>
+                <a:latin typeface="Microsoft JhengHei" panose="020B0604030504040204" pitchFamily="34" charset="-120"/>
+                <a:ea typeface="Microsoft JhengHei" panose="020B0604030504040204" pitchFamily="34" charset="-120"/>
+              </a:rPr>
+              <a:t>實作。示意圖不依實際比例；實體製程仍需驗證。</a:t>
+            </a:r>
+          </a:p>
+        </p:txBody>
+      </p:sp>
+      <p:sp>
+        <p:nvSpPr>
+          <p:cNvPr id="8" name="文字方塊 7">
+            <a:extLst>
+              <a:ext uri="{FF2B5EF4-FFF2-40B4-BE49-F238E27FC236}">
+                <a16:creationId xmlns:a16="http://schemas.microsoft.com/office/drawing/2014/main" id="{ACF8F6CB-3B32-4C7E-6857-04A1AAC7547C}"/>
+              </a:ext>
+            </a:extLst>
+          </p:cNvPr>
+          <p:cNvSpPr txBox="1"/>
+          <p:nvPr/>
+        </p:nvSpPr>
+        <p:spPr>
+          <a:xfrm>
+            <a:off x="11341100" y="6438900"/>
+            <a:ext cx="317500" cy="228600"/>
+          </a:xfrm>
+          <a:prstGeom prst="rect">
+            <a:avLst/>
+          </a:prstGeom>
+          <a:noFill/>
+        </p:spPr>
+        <p:txBody>
+          <a:bodyPr vert="horz" wrap="square" lIns="0" tIns="0" rIns="0" bIns="0" rtlCol="0">
+            <a:noAutofit/>
+          </a:bodyPr>
+          <a:lstStyle/>
+          <a:p>
+            <a:pPr algn="r"/>
+            <a:r>
+              <a:rPr lang="en-US" altLang="zh-TW" sz="1100">
+                <a:solidFill>
+                  <a:srgbClr val="526A7D"/>
+                </a:solidFill>
+                <a:latin typeface="Microsoft JhengHei" panose="020B0604030504040204" pitchFamily="34" charset="-120"/>
+                <a:ea typeface="Microsoft JhengHei" panose="020B0604030504040204" pitchFamily="34" charset="-120"/>
+              </a:rPr>
+              <a:t>22</a:t>
+            </a:r>
+            <a:endParaRPr lang="zh-TW" altLang="en-US" sz="1100">
+              <a:solidFill>
+                <a:srgbClr val="526A7D"/>
+              </a:solidFill>
+              <a:latin typeface="Microsoft JhengHei" panose="020B0604030504040204" pitchFamily="34" charset="-120"/>
+              <a:ea typeface="Microsoft JhengHei" panose="020B0604030504040204" pitchFamily="34" charset="-120"/>
+            </a:endParaRPr>
+          </a:p>
+        </p:txBody>
+      </p:sp>
+    </p:spTree>
+    <p:extLst>
+      <p:ext uri="{BB962C8B-B14F-4D97-AF65-F5344CB8AC3E}">
+        <p14:creationId xmlns:p14="http://schemas.microsoft.com/office/powerpoint/2010/main" val="2196412635"/>
+      </p:ext>
+    </p:extLst>
+  </p:cSld>
+  <p:clrMapOvr>
+    <a:masterClrMapping/>
+  </p:clrMapOvr>
+</p:sld>
+</file>
+
+<file path=ppt/slides/slide23.xml><?xml version="1.0" encoding="utf-8"?>
+<p:sld xmlns:a="http://schemas.openxmlformats.org/drawingml/2006/main" xmlns:r="http://schemas.openxmlformats.org/officeDocument/2006/relationships" xmlns:p="http://schemas.openxmlformats.org/presentationml/2006/main">
+  <p:cSld>
+    <p:spTree>
+      <p:nvGrpSpPr>
+        <p:cNvPr id="1" name=""/>
+        <p:cNvGrpSpPr/>
+        <p:nvPr/>
+      </p:nvGrpSpPr>
+      <p:grpSpPr>
+        <a:xfrm>
+          <a:off x="0" y="0"/>
+          <a:ext cx="0" cy="0"/>
+          <a:chOff x="0" y="0"/>
+          <a:chExt cx="0" cy="0"/>
+        </a:xfrm>
+      </p:grpSpPr>
+      <p:sp>
+        <p:nvSpPr>
+          <p:cNvPr id="2" name="recap_title">
+            <a:extLst>
+              <a:ext uri="{FF2B5EF4-FFF2-40B4-BE49-F238E27FC236}">
+                <a16:creationId xmlns:a16="http://schemas.microsoft.com/office/drawing/2014/main" id="{A3E38320-7477-45FD-470E-DE81EAB0F5C3}"/>
+              </a:ext>
+            </a:extLst>
+          </p:cNvPr>
+          <p:cNvSpPr txBox="1"/>
+          <p:nvPr/>
+        </p:nvSpPr>
+        <p:spPr>
+          <a:xfrm>
+            <a:off x="533400" y="279399"/>
+            <a:ext cx="11112500" cy="584200"/>
+          </a:xfrm>
+          <a:prstGeom prst="rect">
+            <a:avLst/>
+          </a:prstGeom>
+          <a:noFill/>
+        </p:spPr>
+        <p:txBody>
+          <a:bodyPr vert="horz" wrap="square" lIns="0" tIns="0" rIns="0" bIns="0" rtlCol="0">
+            <a:noAutofit/>
+          </a:bodyPr>
+          <a:lstStyle/>
+          <a:p>
+            <a:r>
+              <a:rPr lang="zh-TW" altLang="en-US" sz="3000" b="1">
+                <a:solidFill>
+                  <a:srgbClr val="152C3D"/>
+                </a:solidFill>
+                <a:latin typeface="Microsoft JhengHei" panose="020B0604030504040204" pitchFamily="34" charset="-120"/>
+                <a:ea typeface="Microsoft JhengHei" panose="020B0604030504040204" pitchFamily="34" charset="-120"/>
+              </a:rPr>
+              <a:t>八月：</a:t>
+            </a:r>
+            <a:r>
+              <a:rPr lang="en-US" altLang="zh-TW" sz="3000" b="1">
+                <a:solidFill>
+                  <a:srgbClr val="152C3D"/>
+                </a:solidFill>
+                <a:latin typeface="Microsoft JhengHei" panose="020B0604030504040204" pitchFamily="34" charset="-120"/>
+                <a:ea typeface="Microsoft JhengHei" panose="020B0604030504040204" pitchFamily="34" charset="-120"/>
+              </a:rPr>
+              <a:t>Dual-port </a:t>
+            </a:r>
+            <a:r>
+              <a:rPr lang="zh-TW" altLang="en-US" sz="3000" b="1">
+                <a:solidFill>
+                  <a:srgbClr val="152C3D"/>
+                </a:solidFill>
+                <a:latin typeface="Microsoft JhengHei" panose="020B0604030504040204" pitchFamily="34" charset="-120"/>
+                <a:ea typeface="Microsoft JhengHei" panose="020B0604030504040204" pitchFamily="34" charset="-120"/>
+              </a:rPr>
+              <a:t>性能與代表設計</a:t>
+            </a:r>
+          </a:p>
+        </p:txBody>
+      </p:sp>
+      <p:cxnSp>
+        <p:nvCxnSpPr>
+          <p:cNvPr id="3" name="直線接點 2">
+            <a:extLst>
+              <a:ext uri="{FF2B5EF4-FFF2-40B4-BE49-F238E27FC236}">
+                <a16:creationId xmlns:a16="http://schemas.microsoft.com/office/drawing/2014/main" id="{1163A48E-DF6C-F9F1-E5D5-C9080497F482}"/>
+              </a:ext>
+            </a:extLst>
+          </p:cNvPr>
+          <p:cNvCxnSpPr/>
+          <p:nvPr/>
+        </p:nvCxnSpPr>
+        <p:spPr>
+          <a:xfrm>
+            <a:off x="533400" y="1041400"/>
+            <a:ext cx="11125200" cy="0"/>
+          </a:xfrm>
+          <a:prstGeom prst="line">
+            <a:avLst/>
+          </a:prstGeom>
+          <a:ln w="8890">
+            <a:solidFill>
+              <a:srgbClr val="C6D5E1"/>
+            </a:solidFill>
+          </a:ln>
+          <a:effectLst/>
+          <a:extLst>
+            <a:ext uri="{AF507438-7753-43E0-B8FC-AC1667EBCBE1}">
+              <a14:hiddenEffects xmlns:a14="http://schemas.microsoft.com/office/drawing/2010/main">
+                <a:effectLst>
+                  <a:outerShdw blurRad="40000" dist="20000" dir="5400000" rotWithShape="0">
+                    <a:srgbClr val="000000">
+                      <a:alpha val="38000"/>
+                    </a:srgbClr>
+                  </a:outerShdw>
+                </a:effectLst>
+              </a14:hiddenEffects>
+            </a:ext>
+          </a:extLst>
+        </p:spPr>
+        <p:style>
+          <a:lnRef idx="2">
+            <a:schemeClr val="accent1"/>
+          </a:lnRef>
+          <a:fillRef idx="0">
+            <a:schemeClr val="accent1"/>
+          </a:fillRef>
+          <a:effectRef idx="1">
+            <a:schemeClr val="accent1"/>
+          </a:effectRef>
+          <a:fontRef idx="minor">
+            <a:schemeClr val="tx1"/>
+          </a:fontRef>
+        </p:style>
+      </p:cxnSp>
+      <p:cxnSp>
+        <p:nvCxnSpPr>
+          <p:cNvPr id="4" name="直線接點 3">
+            <a:extLst>
+              <a:ext uri="{FF2B5EF4-FFF2-40B4-BE49-F238E27FC236}">
+                <a16:creationId xmlns:a16="http://schemas.microsoft.com/office/drawing/2014/main" id="{047F5069-C72F-DFAE-E8FB-9CA722EF1D12}"/>
+              </a:ext>
+            </a:extLst>
+          </p:cNvPr>
+          <p:cNvCxnSpPr/>
+          <p:nvPr/>
+        </p:nvCxnSpPr>
+        <p:spPr>
+          <a:xfrm>
+            <a:off x="533400" y="1041400"/>
+            <a:ext cx="1244600" cy="0"/>
+          </a:xfrm>
+          <a:prstGeom prst="line">
+            <a:avLst/>
+          </a:prstGeom>
+          <a:ln w="29210">
+            <a:solidFill>
+              <a:srgbClr val="245B85"/>
+            </a:solidFill>
+          </a:ln>
+          <a:effectLst/>
+          <a:extLst>
+            <a:ext uri="{AF507438-7753-43E0-B8FC-AC1667EBCBE1}">
+              <a14:hiddenEffects xmlns:a14="http://schemas.microsoft.com/office/drawing/2010/main">
+                <a:effectLst>
+                  <a:outerShdw blurRad="40000" dist="20000" dir="5400000" rotWithShape="0">
+                    <a:srgbClr val="000000">
+                      <a:alpha val="38000"/>
+                    </a:srgbClr>
+                  </a:outerShdw>
+                </a:effectLst>
+              </a14:hiddenEffects>
+            </a:ext>
+          </a:extLst>
+        </p:spPr>
+        <p:style>
+          <a:lnRef idx="2">
+            <a:schemeClr val="accent1"/>
+          </a:lnRef>
+          <a:fillRef idx="0">
+            <a:schemeClr val="accent1"/>
+          </a:fillRef>
+          <a:effectRef idx="1">
+            <a:schemeClr val="accent1"/>
+          </a:effectRef>
+          <a:fontRef idx="minor">
+            <a:schemeClr val="tx1"/>
+          </a:fontRef>
+        </p:style>
+      </p:cxnSp>
+      <p:sp>
+        <p:nvSpPr>
+          <p:cNvPr id="5" name="文字方塊 4">
+            <a:extLst>
+              <a:ext uri="{FF2B5EF4-FFF2-40B4-BE49-F238E27FC236}">
+                <a16:creationId xmlns:a16="http://schemas.microsoft.com/office/drawing/2014/main" id="{FC8D8681-DA33-F171-05ED-2571EF967C1A}"/>
+              </a:ext>
+            </a:extLst>
+          </p:cNvPr>
+          <p:cNvSpPr txBox="1"/>
+          <p:nvPr/>
+        </p:nvSpPr>
+        <p:spPr>
+          <a:xfrm>
+            <a:off x="533400" y="1371599"/>
+            <a:ext cx="11125200" cy="393700"/>
+          </a:xfrm>
+          <a:prstGeom prst="rect">
+            <a:avLst/>
+          </a:prstGeom>
+          <a:noFill/>
+        </p:spPr>
+        <p:txBody>
+          <a:bodyPr vert="horz" wrap="square" lIns="0" tIns="0" rIns="0" bIns="0" rtlCol="0">
+            <a:noAutofit/>
+          </a:bodyPr>
+          <a:lstStyle/>
+          <a:p>
+            <a:r>
+              <a:rPr lang="zh-TW" altLang="en-US">
+                <a:solidFill>
+                  <a:srgbClr val="152C3D"/>
+                </a:solidFill>
+                <a:latin typeface="Microsoft JhengHei" panose="020B0604030504040204" pitchFamily="34" charset="-120"/>
+                <a:ea typeface="Microsoft JhengHei" panose="020B0604030504040204" pitchFamily="34" charset="-120"/>
+              </a:rPr>
+              <a:t>可製造幾何下的性能進展｜</a:t>
+            </a:r>
+            <a:r>
+              <a:rPr lang="en-US" altLang="zh-TW">
+                <a:solidFill>
+                  <a:srgbClr val="152C3D"/>
+                </a:solidFill>
+                <a:latin typeface="Microsoft JhengHei" panose="020B0604030504040204" pitchFamily="34" charset="-120"/>
+                <a:ea typeface="Microsoft JhengHei" panose="020B0604030504040204" pitchFamily="34" charset="-120"/>
+              </a:rPr>
+              <a:t>8/13–8/24</a:t>
+            </a:r>
+            <a:endParaRPr lang="zh-TW" altLang="en-US">
+              <a:solidFill>
+                <a:srgbClr val="152C3D"/>
+              </a:solidFill>
+              <a:latin typeface="Microsoft JhengHei" panose="020B0604030504040204" pitchFamily="34" charset="-120"/>
+              <a:ea typeface="Microsoft JhengHei" panose="020B0604030504040204" pitchFamily="34" charset="-120"/>
+            </a:endParaRPr>
+          </a:p>
+        </p:txBody>
+      </p:sp>
+      <p:pic>
+        <p:nvPicPr>
+          <p:cNvPr id="7" name="圖片 6">
+            <a:extLst>
+              <a:ext uri="{FF2B5EF4-FFF2-40B4-BE49-F238E27FC236}">
+                <a16:creationId xmlns:a16="http://schemas.microsoft.com/office/drawing/2014/main" id="{74B19000-F22B-E9B2-9013-E311592736C3}"/>
+              </a:ext>
+            </a:extLst>
+          </p:cNvPr>
+          <p:cNvPicPr>
+            <a:picLocks noChangeAspect="1"/>
+          </p:cNvPicPr>
+          <p:nvPr/>
+        </p:nvPicPr>
+        <p:blipFill>
+          <a:blip r:embed="rId3"/>
+          <a:stretch>
+            <a:fillRect/>
+          </a:stretch>
+        </p:blipFill>
+        <p:spPr>
+          <a:xfrm>
+            <a:off x="533400" y="1945078"/>
+            <a:ext cx="7594600" cy="3361544"/>
+          </a:xfrm>
+          <a:prstGeom prst="rect">
+            <a:avLst/>
+          </a:prstGeom>
+        </p:spPr>
+      </p:pic>
+      <p:sp>
+        <p:nvSpPr>
+          <p:cNvPr id="8" name="文字方塊 7">
+            <a:extLst>
+              <a:ext uri="{FF2B5EF4-FFF2-40B4-BE49-F238E27FC236}">
+                <a16:creationId xmlns:a16="http://schemas.microsoft.com/office/drawing/2014/main" id="{C25402EC-46EF-1558-8387-35FFA52078A2}"/>
+              </a:ext>
+            </a:extLst>
+          </p:cNvPr>
+          <p:cNvSpPr txBox="1"/>
+          <p:nvPr/>
+        </p:nvSpPr>
+        <p:spPr>
+          <a:xfrm>
+            <a:off x="8356600" y="1917699"/>
+            <a:ext cx="3302000" cy="381000"/>
+          </a:xfrm>
+          <a:prstGeom prst="rect">
+            <a:avLst/>
+          </a:prstGeom>
+          <a:noFill/>
+        </p:spPr>
+        <p:txBody>
+          <a:bodyPr vert="horz" wrap="square" lIns="0" tIns="0" rIns="0" bIns="0" rtlCol="0">
+            <a:noAutofit/>
+          </a:bodyPr>
+          <a:lstStyle/>
+          <a:p>
+            <a:r>
+              <a:rPr lang="zh-TW" altLang="en-US" sz="1600" b="1">
+                <a:solidFill>
+                  <a:srgbClr val="245B85"/>
+                </a:solidFill>
+                <a:latin typeface="Microsoft JhengHei" panose="020B0604030504040204" pitchFamily="34" charset="-120"/>
+                <a:ea typeface="Microsoft JhengHei" panose="020B0604030504040204" pitchFamily="34" charset="-120"/>
+              </a:rPr>
+              <a:t>代表圖樣：同家族局部微調</a:t>
+            </a:r>
+          </a:p>
+        </p:txBody>
+      </p:sp>
+      <p:pic>
+        <p:nvPicPr>
+          <p:cNvPr id="10" name="圖片 9">
+            <a:extLst>
+              <a:ext uri="{FF2B5EF4-FFF2-40B4-BE49-F238E27FC236}">
+                <a16:creationId xmlns:a16="http://schemas.microsoft.com/office/drawing/2014/main" id="{9A7C8D62-B7BA-FEB9-7D09-A29696692D9B}"/>
+              </a:ext>
+            </a:extLst>
+          </p:cNvPr>
+          <p:cNvPicPr>
+            <a:picLocks noChangeAspect="1"/>
+          </p:cNvPicPr>
+          <p:nvPr/>
+        </p:nvPicPr>
+        <p:blipFill>
+          <a:blip r:embed="rId4"/>
+          <a:srcRect l="709" t="19286" r="83511" b="18571"/>
+          <a:stretch>
+            <a:fillRect/>
+          </a:stretch>
+        </p:blipFill>
+        <p:spPr>
+          <a:xfrm>
+            <a:off x="8483600" y="2517891"/>
+            <a:ext cx="1422400" cy="1390418"/>
+          </a:xfrm>
+          <a:prstGeom prst="rect">
+            <a:avLst/>
+          </a:prstGeom>
+        </p:spPr>
+      </p:pic>
+      <p:pic>
+        <p:nvPicPr>
+          <p:cNvPr id="12" name="圖片 11">
+            <a:extLst>
+              <a:ext uri="{FF2B5EF4-FFF2-40B4-BE49-F238E27FC236}">
+                <a16:creationId xmlns:a16="http://schemas.microsoft.com/office/drawing/2014/main" id="{3361639C-3DC2-493F-E2FB-08D5D8F50B7A}"/>
+              </a:ext>
+            </a:extLst>
+          </p:cNvPr>
+          <p:cNvPicPr>
+            <a:picLocks noChangeAspect="1"/>
+          </p:cNvPicPr>
+          <p:nvPr/>
+        </p:nvPicPr>
+        <p:blipFill>
+          <a:blip r:embed="rId4"/>
+          <a:srcRect l="83688" t="19286" r="532" b="18571"/>
+          <a:stretch>
+            <a:fillRect/>
+          </a:stretch>
+        </p:blipFill>
+        <p:spPr>
+          <a:xfrm>
+            <a:off x="10236200" y="2517883"/>
+            <a:ext cx="1422400" cy="1390434"/>
+          </a:xfrm>
+          <a:prstGeom prst="rect">
+            <a:avLst/>
+          </a:prstGeom>
+        </p:spPr>
+      </p:pic>
+      <p:cxnSp>
+        <p:nvCxnSpPr>
+          <p:cNvPr id="13" name="直線接點 12">
+            <a:extLst>
+              <a:ext uri="{FF2B5EF4-FFF2-40B4-BE49-F238E27FC236}">
+                <a16:creationId xmlns:a16="http://schemas.microsoft.com/office/drawing/2014/main" id="{9DBDB97A-98DF-F3AF-ED08-B457520E39B1}"/>
+              </a:ext>
+            </a:extLst>
+          </p:cNvPr>
+          <p:cNvCxnSpPr/>
+          <p:nvPr/>
+        </p:nvCxnSpPr>
+        <p:spPr>
+          <a:xfrm>
+            <a:off x="9969500" y="3213100"/>
+            <a:ext cx="177800" cy="0"/>
+          </a:xfrm>
+          <a:prstGeom prst="line">
+            <a:avLst/>
+          </a:prstGeom>
+          <a:ln w="19050">
+            <a:solidFill>
+              <a:srgbClr val="245B85"/>
+            </a:solidFill>
+            <a:tailEnd type="arrow"/>
+          </a:ln>
+          <a:effectLst/>
+          <a:extLst>
+            <a:ext uri="{AF507438-7753-43E0-B8FC-AC1667EBCBE1}">
+              <a14:hiddenEffects xmlns:a14="http://schemas.microsoft.com/office/drawing/2010/main">
+                <a:effectLst>
+                  <a:outerShdw blurRad="40000" dist="20000" dir="5400000" rotWithShape="0">
+                    <a:srgbClr val="000000">
+                      <a:alpha val="38000"/>
+                    </a:srgbClr>
+                  </a:outerShdw>
+                </a:effectLst>
+              </a14:hiddenEffects>
+            </a:ext>
+          </a:extLst>
+        </p:spPr>
+        <p:style>
+          <a:lnRef idx="2">
+            <a:schemeClr val="accent1"/>
+          </a:lnRef>
+          <a:fillRef idx="0">
+            <a:schemeClr val="accent1"/>
+          </a:fillRef>
+          <a:effectRef idx="1">
+            <a:schemeClr val="accent1"/>
+          </a:effectRef>
+          <a:fontRef idx="minor">
+            <a:schemeClr val="tx1"/>
+          </a:fontRef>
+        </p:style>
+      </p:cxnSp>
+      <p:sp>
+        <p:nvSpPr>
+          <p:cNvPr id="14" name="文字方塊 13">
+            <a:extLst>
+              <a:ext uri="{FF2B5EF4-FFF2-40B4-BE49-F238E27FC236}">
+                <a16:creationId xmlns:a16="http://schemas.microsoft.com/office/drawing/2014/main" id="{E7AA638D-CDFC-6794-AC61-E8A013F4C290}"/>
+              </a:ext>
+            </a:extLst>
+          </p:cNvPr>
+          <p:cNvSpPr txBox="1"/>
+          <p:nvPr/>
+        </p:nvSpPr>
+        <p:spPr>
+          <a:xfrm>
+            <a:off x="8343900" y="4013199"/>
+            <a:ext cx="1739900" cy="368300"/>
+          </a:xfrm>
+          <a:prstGeom prst="rect">
+            <a:avLst/>
+          </a:prstGeom>
+          <a:noFill/>
+        </p:spPr>
+        <p:txBody>
+          <a:bodyPr vert="horz" wrap="square" lIns="0" tIns="0" rIns="0" bIns="0" rtlCol="0">
+            <a:noAutofit/>
+          </a:bodyPr>
+          <a:lstStyle/>
+          <a:p>
+            <a:pPr algn="ctr"/>
+            <a:r>
+              <a:rPr lang="en-US" altLang="zh-TW" sz="1700" b="1">
+                <a:solidFill>
+                  <a:srgbClr val="526A7D"/>
+                </a:solidFill>
+                <a:latin typeface="Microsoft JhengHei" panose="020B0604030504040204" pitchFamily="34" charset="-120"/>
+                <a:ea typeface="Microsoft JhengHei" panose="020B0604030504040204" pitchFamily="34" charset="-120"/>
+              </a:rPr>
+              <a:t>−5.90 dB</a:t>
+            </a:r>
+            <a:endParaRPr lang="zh-TW" altLang="en-US" sz="1700" b="1">
+              <a:solidFill>
+                <a:srgbClr val="526A7D"/>
+              </a:solidFill>
+              <a:latin typeface="Microsoft JhengHei" panose="020B0604030504040204" pitchFamily="34" charset="-120"/>
+              <a:ea typeface="Microsoft JhengHei" panose="020B0604030504040204" pitchFamily="34" charset="-120"/>
+            </a:endParaRPr>
+          </a:p>
+        </p:txBody>
+      </p:sp>
+      <p:sp>
+        <p:nvSpPr>
+          <p:cNvPr id="15" name="文字方塊 14">
+            <a:extLst>
+              <a:ext uri="{FF2B5EF4-FFF2-40B4-BE49-F238E27FC236}">
+                <a16:creationId xmlns:a16="http://schemas.microsoft.com/office/drawing/2014/main" id="{42EB9387-9B79-FD97-BF2A-D6F1678432B9}"/>
+              </a:ext>
+            </a:extLst>
+          </p:cNvPr>
+          <p:cNvSpPr txBox="1"/>
+          <p:nvPr/>
+        </p:nvSpPr>
+        <p:spPr>
+          <a:xfrm>
+            <a:off x="10160000" y="4013199"/>
+            <a:ext cx="1498600" cy="368300"/>
+          </a:xfrm>
+          <a:prstGeom prst="rect">
+            <a:avLst/>
+          </a:prstGeom>
+          <a:noFill/>
+        </p:spPr>
+        <p:txBody>
+          <a:bodyPr vert="horz" wrap="square" lIns="0" tIns="0" rIns="0" bIns="0" rtlCol="0">
+            <a:noAutofit/>
+          </a:bodyPr>
+          <a:lstStyle/>
+          <a:p>
+            <a:pPr algn="ctr"/>
+            <a:r>
+              <a:rPr lang="en-US" altLang="zh-TW" sz="1700" b="1">
+                <a:solidFill>
+                  <a:srgbClr val="245B85"/>
+                </a:solidFill>
+                <a:latin typeface="Microsoft JhengHei" panose="020B0604030504040204" pitchFamily="34" charset="-120"/>
+                <a:ea typeface="Microsoft JhengHei" panose="020B0604030504040204" pitchFamily="34" charset="-120"/>
+              </a:rPr>
+              <a:t>−2.39 dB</a:t>
+            </a:r>
+            <a:endParaRPr lang="zh-TW" altLang="en-US" sz="1700" b="1">
+              <a:solidFill>
+                <a:srgbClr val="245B85"/>
+              </a:solidFill>
+              <a:latin typeface="Microsoft JhengHei" panose="020B0604030504040204" pitchFamily="34" charset="-120"/>
+              <a:ea typeface="Microsoft JhengHei" panose="020B0604030504040204" pitchFamily="34" charset="-120"/>
+            </a:endParaRPr>
+          </a:p>
+        </p:txBody>
+      </p:sp>
+      <p:sp>
+        <p:nvSpPr>
+          <p:cNvPr id="16" name="文字方塊 15">
+            <a:extLst>
+              <a:ext uri="{FF2B5EF4-FFF2-40B4-BE49-F238E27FC236}">
+                <a16:creationId xmlns:a16="http://schemas.microsoft.com/office/drawing/2014/main" id="{D85073E9-CCA2-D3AF-4943-8A678AC91C83}"/>
+              </a:ext>
+            </a:extLst>
+          </p:cNvPr>
+          <p:cNvSpPr txBox="1"/>
+          <p:nvPr/>
+        </p:nvSpPr>
+        <p:spPr>
+          <a:xfrm>
+            <a:off x="8356600" y="4610099"/>
+            <a:ext cx="3302000" cy="508000"/>
+          </a:xfrm>
+          <a:prstGeom prst="rect">
+            <a:avLst/>
+          </a:prstGeom>
+          <a:noFill/>
+        </p:spPr>
+        <p:txBody>
+          <a:bodyPr vert="horz" wrap="square" lIns="0" tIns="0" rIns="0" bIns="0" rtlCol="0">
+            <a:noAutofit/>
+          </a:bodyPr>
+          <a:lstStyle/>
+          <a:p>
+            <a:r>
+              <a:rPr lang="zh-TW" altLang="en-US" sz="2600" b="1">
+                <a:solidFill>
+                  <a:srgbClr val="245B85"/>
+                </a:solidFill>
+                <a:latin typeface="Microsoft JhengHei" panose="020B0604030504040204" pitchFamily="34" charset="-120"/>
+                <a:ea typeface="Microsoft JhengHei" panose="020B0604030504040204" pitchFamily="34" charset="-120"/>
+              </a:rPr>
+              <a:t>改善 </a:t>
+            </a:r>
+            <a:r>
+              <a:rPr lang="en-US" altLang="zh-TW" sz="2600" b="1">
+                <a:solidFill>
+                  <a:srgbClr val="245B85"/>
+                </a:solidFill>
+                <a:latin typeface="Microsoft JhengHei" panose="020B0604030504040204" pitchFamily="34" charset="-120"/>
+                <a:ea typeface="Microsoft JhengHei" panose="020B0604030504040204" pitchFamily="34" charset="-120"/>
+              </a:rPr>
+              <a:t>3.51 dB</a:t>
+            </a:r>
+            <a:endParaRPr lang="zh-TW" altLang="en-US" sz="2600" b="1">
+              <a:solidFill>
+                <a:srgbClr val="245B85"/>
+              </a:solidFill>
+              <a:latin typeface="Microsoft JhengHei" panose="020B0604030504040204" pitchFamily="34" charset="-120"/>
+              <a:ea typeface="Microsoft JhengHei" panose="020B0604030504040204" pitchFamily="34" charset="-120"/>
+            </a:endParaRPr>
+          </a:p>
+        </p:txBody>
+      </p:sp>
+      <p:sp>
+        <p:nvSpPr>
+          <p:cNvPr id="17" name="文字方塊 16">
+            <a:extLst>
+              <a:ext uri="{FF2B5EF4-FFF2-40B4-BE49-F238E27FC236}">
+                <a16:creationId xmlns:a16="http://schemas.microsoft.com/office/drawing/2014/main" id="{A210E207-D28E-A6F7-BDB9-031E2F505761}"/>
+              </a:ext>
+            </a:extLst>
+          </p:cNvPr>
+          <p:cNvSpPr txBox="1"/>
+          <p:nvPr/>
+        </p:nvSpPr>
+        <p:spPr>
+          <a:xfrm>
+            <a:off x="8356600" y="5194299"/>
+            <a:ext cx="3302000" cy="368300"/>
+          </a:xfrm>
+          <a:prstGeom prst="rect">
+            <a:avLst/>
+          </a:prstGeom>
+          <a:noFill/>
+        </p:spPr>
+        <p:txBody>
+          <a:bodyPr vert="horz" wrap="square" lIns="0" tIns="0" rIns="0" bIns="0" rtlCol="0">
+            <a:noAutofit/>
+          </a:bodyPr>
+          <a:lstStyle/>
+          <a:p>
+            <a:r>
+              <a:rPr lang="en-US" altLang="zh-TW" sz="1700">
+                <a:solidFill>
+                  <a:srgbClr val="152C3D"/>
+                </a:solidFill>
+                <a:latin typeface="Microsoft JhengHei" panose="020B0604030504040204" pitchFamily="34" charset="-120"/>
+                <a:ea typeface="Microsoft JhengHei" panose="020B0604030504040204" pitchFamily="34" charset="-120"/>
+              </a:rPr>
+              <a:t>17 </a:t>
+            </a:r>
+            <a:r>
+              <a:rPr lang="zh-TW" altLang="en-US" sz="1700">
+                <a:solidFill>
+                  <a:srgbClr val="152C3D"/>
+                </a:solidFill>
+                <a:latin typeface="Microsoft JhengHei" panose="020B0604030504040204" pitchFamily="34" charset="-120"/>
+                <a:ea typeface="Microsoft JhengHei" panose="020B0604030504040204" pitchFamily="34" charset="-120"/>
+              </a:rPr>
+              <a:t>次刷新｜</a:t>
+            </a:r>
+            <a:r>
+              <a:rPr lang="en-US" altLang="zh-TW" sz="1700">
+                <a:solidFill>
+                  <a:srgbClr val="152C3D"/>
+                </a:solidFill>
+                <a:latin typeface="Microsoft JhengHei" panose="020B0604030504040204" pitchFamily="34" charset="-120"/>
+                <a:ea typeface="Microsoft JhengHei" panose="020B0604030504040204" pitchFamily="34" charset="-120"/>
+              </a:rPr>
+              <a:t>23 </a:t>
+            </a:r>
+            <a:r>
+              <a:rPr lang="zh-TW" altLang="en-US" sz="1700">
+                <a:solidFill>
+                  <a:srgbClr val="152C3D"/>
+                </a:solidFill>
+                <a:latin typeface="Microsoft JhengHei" panose="020B0604030504040204" pitchFamily="34" charset="-120"/>
+                <a:ea typeface="Microsoft JhengHei" panose="020B0604030504040204" pitchFamily="34" charset="-120"/>
+              </a:rPr>
+              <a:t>輪研究</a:t>
+            </a:r>
+          </a:p>
+        </p:txBody>
+      </p:sp>
+      <p:sp>
+        <p:nvSpPr>
+          <p:cNvPr id="18" name="文字方塊 17">
+            <a:extLst>
+              <a:ext uri="{FF2B5EF4-FFF2-40B4-BE49-F238E27FC236}">
+                <a16:creationId xmlns:a16="http://schemas.microsoft.com/office/drawing/2014/main" id="{4D13A6B5-844F-1620-380B-2EBA0B3E0A1D}"/>
+              </a:ext>
+            </a:extLst>
+          </p:cNvPr>
+          <p:cNvSpPr txBox="1"/>
+          <p:nvPr/>
+        </p:nvSpPr>
+        <p:spPr>
+          <a:xfrm>
+            <a:off x="533400" y="5803899"/>
+            <a:ext cx="11125200" cy="431800"/>
+          </a:xfrm>
+          <a:prstGeom prst="rect">
+            <a:avLst/>
+          </a:prstGeom>
+          <a:noFill/>
+        </p:spPr>
+        <p:txBody>
+          <a:bodyPr vert="horz" wrap="square" lIns="0" tIns="0" rIns="0" bIns="0" rtlCol="0">
+            <a:noAutofit/>
+          </a:bodyPr>
+          <a:lstStyle/>
+          <a:p>
+            <a:r>
+              <a:rPr lang="zh-TW" altLang="en-US" sz="1600">
+                <a:solidFill>
+                  <a:srgbClr val="152C3D"/>
+                </a:solidFill>
+                <a:latin typeface="Microsoft JhengHei" panose="020B0604030504040204" pitchFamily="34" charset="-120"/>
+                <a:ea typeface="Microsoft JhengHei" panose="020B0604030504040204" pitchFamily="34" charset="-120"/>
+              </a:rPr>
+              <a:t>幾何換代後重新開帳；−</a:t>
+            </a:r>
+            <a:r>
+              <a:rPr lang="en-US" altLang="zh-TW" sz="1600">
+                <a:solidFill>
+                  <a:srgbClr val="152C3D"/>
+                </a:solidFill>
+                <a:latin typeface="Microsoft JhengHei" panose="020B0604030504040204" pitchFamily="34" charset="-120"/>
+                <a:ea typeface="Microsoft JhengHei" panose="020B0604030504040204" pitchFamily="34" charset="-120"/>
+              </a:rPr>
+              <a:t>2.39 dB </a:t>
+            </a:r>
+            <a:r>
+              <a:rPr lang="zh-TW" altLang="en-US" sz="1600">
+                <a:solidFill>
+                  <a:srgbClr val="152C3D"/>
+                </a:solidFill>
+                <a:latin typeface="Microsoft JhengHei" panose="020B0604030504040204" pitchFamily="34" charset="-120"/>
+                <a:ea typeface="Microsoft JhengHei" panose="020B0604030504040204" pitchFamily="34" charset="-120"/>
+              </a:rPr>
+              <a:t>仍低於零餘裕，性能改善與全部達標分開判讀。</a:t>
+            </a:r>
+          </a:p>
+        </p:txBody>
+      </p:sp>
+      <p:sp>
+        <p:nvSpPr>
+          <p:cNvPr id="19" name="文字方塊 18">
+            <a:extLst>
+              <a:ext uri="{FF2B5EF4-FFF2-40B4-BE49-F238E27FC236}">
+                <a16:creationId xmlns:a16="http://schemas.microsoft.com/office/drawing/2014/main" id="{C10707DD-0818-6DAC-3E4B-C2FEE27FEAE8}"/>
+              </a:ext>
+            </a:extLst>
+          </p:cNvPr>
+          <p:cNvSpPr txBox="1"/>
+          <p:nvPr/>
+        </p:nvSpPr>
+        <p:spPr>
+          <a:xfrm>
+            <a:off x="533400" y="6400800"/>
+            <a:ext cx="10541000" cy="241300"/>
+          </a:xfrm>
+          <a:prstGeom prst="rect">
+            <a:avLst/>
+          </a:prstGeom>
+          <a:noFill/>
+        </p:spPr>
+        <p:txBody>
+          <a:bodyPr vert="horz" wrap="square" lIns="0" tIns="0" rIns="0" bIns="0" rtlCol="0">
+            <a:noAutofit/>
+          </a:bodyPr>
+          <a:lstStyle/>
+          <a:p>
+            <a:r>
+              <a:rPr lang="zh-TW" altLang="en-US" sz="900">
+                <a:solidFill>
+                  <a:srgbClr val="526A7D"/>
+                </a:solidFill>
+                <a:latin typeface="Microsoft JhengHei" panose="020B0604030504040204" pitchFamily="34" charset="-120"/>
+                <a:ea typeface="Microsoft JhengHei" panose="020B0604030504040204" pitchFamily="34" charset="-120"/>
+              </a:rPr>
+              <a:t>來源：八月月報、</a:t>
+            </a:r>
+            <a:r>
+              <a:rPr lang="en-US" altLang="zh-TW" sz="900">
+                <a:solidFill>
+                  <a:srgbClr val="526A7D"/>
+                </a:solidFill>
+                <a:latin typeface="Microsoft JhengHei" panose="020B0604030504040204" pitchFamily="34" charset="-120"/>
+                <a:ea typeface="Microsoft JhengHei" panose="020B0604030504040204" pitchFamily="34" charset="-120"/>
+              </a:rPr>
+              <a:t>dual </a:t>
+            </a:r>
+            <a:r>
+              <a:rPr lang="zh-TW" altLang="en-US" sz="900">
+                <a:solidFill>
+                  <a:srgbClr val="526A7D"/>
+                </a:solidFill>
+                <a:latin typeface="Microsoft JhengHei" panose="020B0604030504040204" pitchFamily="34" charset="-120"/>
+                <a:ea typeface="Microsoft JhengHei" panose="020B0604030504040204" pitchFamily="34" charset="-120"/>
+              </a:rPr>
+              <a:t>歷史紀錄。性能區間 </a:t>
+            </a:r>
+            <a:r>
+              <a:rPr lang="en-US" altLang="zh-TW" sz="900">
+                <a:solidFill>
+                  <a:srgbClr val="526A7D"/>
+                </a:solidFill>
+                <a:latin typeface="Microsoft JhengHei" panose="020B0604030504040204" pitchFamily="34" charset="-120"/>
+                <a:ea typeface="Microsoft JhengHei" panose="020B0604030504040204" pitchFamily="34" charset="-120"/>
+              </a:rPr>
+              <a:t>8/13–8/24</a:t>
+            </a:r>
+            <a:r>
+              <a:rPr lang="zh-TW" altLang="en-US" sz="900">
+                <a:solidFill>
+                  <a:srgbClr val="526A7D"/>
+                </a:solidFill>
+                <a:latin typeface="Microsoft JhengHei" panose="020B0604030504040204" pitchFamily="34" charset="-120"/>
+                <a:ea typeface="Microsoft JhengHei" panose="020B0604030504040204" pitchFamily="34" charset="-120"/>
+              </a:rPr>
+              <a:t>；</a:t>
+            </a:r>
+            <a:r>
+              <a:rPr lang="en-US" altLang="zh-TW" sz="900">
+                <a:solidFill>
+                  <a:srgbClr val="526A7D"/>
+                </a:solidFill>
+                <a:latin typeface="Microsoft JhengHei" panose="020B0604030504040204" pitchFamily="34" charset="-120"/>
+                <a:ea typeface="Microsoft JhengHei" panose="020B0604030504040204" pitchFamily="34" charset="-120"/>
+              </a:rPr>
+              <a:t>R57–R79 </a:t>
+            </a:r>
+            <a:r>
+              <a:rPr lang="zh-TW" altLang="en-US" sz="900">
+                <a:solidFill>
+                  <a:srgbClr val="526A7D"/>
+                </a:solidFill>
+                <a:latin typeface="Microsoft JhengHei" panose="020B0604030504040204" pitchFamily="34" charset="-120"/>
+                <a:ea typeface="Microsoft JhengHei" panose="020B0604030504040204" pitchFamily="34" charset="-120"/>
+              </a:rPr>
+              <a:t>為 </a:t>
+            </a:r>
+            <a:r>
+              <a:rPr lang="en-US" altLang="zh-TW" sz="900">
+                <a:solidFill>
+                  <a:srgbClr val="526A7D"/>
+                </a:solidFill>
+                <a:latin typeface="Microsoft JhengHei" panose="020B0604030504040204" pitchFamily="34" charset="-120"/>
+                <a:ea typeface="Microsoft JhengHei" panose="020B0604030504040204" pitchFamily="34" charset="-120"/>
+              </a:rPr>
+              <a:t>8/11–8/24 </a:t>
+            </a:r>
+            <a:r>
+              <a:rPr lang="zh-TW" altLang="en-US" sz="900">
+                <a:solidFill>
+                  <a:srgbClr val="526A7D"/>
+                </a:solidFill>
+                <a:latin typeface="Microsoft JhengHei" panose="020B0604030504040204" pitchFamily="34" charset="-120"/>
+                <a:ea typeface="Microsoft JhengHei" panose="020B0604030504040204" pitchFamily="34" charset="-120"/>
+              </a:rPr>
+              <a:t>的研究輪次。</a:t>
+            </a:r>
+          </a:p>
+        </p:txBody>
+      </p:sp>
+      <p:sp>
+        <p:nvSpPr>
+          <p:cNvPr id="20" name="文字方塊 19">
+            <a:extLst>
+              <a:ext uri="{FF2B5EF4-FFF2-40B4-BE49-F238E27FC236}">
+                <a16:creationId xmlns:a16="http://schemas.microsoft.com/office/drawing/2014/main" id="{74170FEE-48FD-FB2C-2063-F6549F539BA3}"/>
+              </a:ext>
+            </a:extLst>
+          </p:cNvPr>
+          <p:cNvSpPr txBox="1"/>
+          <p:nvPr/>
+        </p:nvSpPr>
+        <p:spPr>
+          <a:xfrm>
+            <a:off x="11341100" y="6438900"/>
+            <a:ext cx="317500" cy="228600"/>
+          </a:xfrm>
+          <a:prstGeom prst="rect">
+            <a:avLst/>
+          </a:prstGeom>
+          <a:noFill/>
+        </p:spPr>
+        <p:txBody>
+          <a:bodyPr vert="horz" wrap="square" lIns="0" tIns="0" rIns="0" bIns="0" rtlCol="0">
+            <a:noAutofit/>
+          </a:bodyPr>
+          <a:lstStyle/>
+          <a:p>
+            <a:pPr algn="r"/>
+            <a:r>
+              <a:rPr lang="en-US" altLang="zh-TW" sz="1100">
+                <a:solidFill>
+                  <a:srgbClr val="526A7D"/>
+                </a:solidFill>
+                <a:latin typeface="Microsoft JhengHei" panose="020B0604030504040204" pitchFamily="34" charset="-120"/>
+                <a:ea typeface="Microsoft JhengHei" panose="020B0604030504040204" pitchFamily="34" charset="-120"/>
+              </a:rPr>
+              <a:t>23</a:t>
+            </a:r>
+            <a:endParaRPr lang="zh-TW" altLang="en-US" sz="1100">
+              <a:solidFill>
+                <a:srgbClr val="526A7D"/>
+              </a:solidFill>
+              <a:latin typeface="Microsoft JhengHei" panose="020B0604030504040204" pitchFamily="34" charset="-120"/>
+              <a:ea typeface="Microsoft JhengHei" panose="020B0604030504040204" pitchFamily="34" charset="-120"/>
+            </a:endParaRPr>
+          </a:p>
+        </p:txBody>
+      </p:sp>
+    </p:spTree>
+    <p:extLst>
+      <p:ext uri="{BB962C8B-B14F-4D97-AF65-F5344CB8AC3E}">
+        <p14:creationId xmlns:p14="http://schemas.microsoft.com/office/powerpoint/2010/main" val="2242977781"/>
+      </p:ext>
+    </p:extLst>
   </p:cSld>
   <p:clrMapOvr>
     <a:masterClrMapping/>
